--- a/Phase1-Literature-Review/Presentation/Yelp Literature Review_Final_Draft.pptx
+++ b/Phase1-Literature-Review/Presentation/Yelp Literature Review_Final_Draft.pptx
@@ -1,32 +1,32 @@
 
 <file path=ppt/presentation.xml><?xml version="1.0" encoding="utf-8"?>
-<p:presentation xmlns:a="http://schemas.openxmlformats.org/drawingml/2006/main" xmlns:r="http://schemas.openxmlformats.org/officeDocument/2006/relationships" xmlns:p="http://schemas.openxmlformats.org/presentationml/2006/main" xmlns:m="http://schemas.openxmlformats.org/officeDocument/2006/math" xmlns:a14="http://schemas.microsoft.com/office/drawing/2010/main">
+<p:presentation xmlns:a="http://schemas.openxmlformats.org/drawingml/2006/main" xmlns:r="http://schemas.openxmlformats.org/officeDocument/2006/relationships" xmlns:p="http://schemas.openxmlformats.org/presentationml/2006/main">
   <p:sldMasterIdLst>
-    <p:sldMasterId id="2147483648" r:id="rId5"/>
+    <p:sldMasterId id="2147483648" r:id="rId1"/>
   </p:sldMasterIdLst>
   <p:notesMasterIdLst>
-    <p:notesMasterId r:id="rId7"/>
+    <p:notesMasterId r:id="rId19"/>
   </p:notesMasterIdLst>
   <p:sldIdLst>
-    <p:sldId id="256" r:id="rId8"/>
-    <p:sldId id="257" r:id="rId9"/>
-    <p:sldId id="258" r:id="rId10"/>
-    <p:sldId id="259" r:id="rId11"/>
-    <p:sldId id="260" r:id="rId12"/>
-    <p:sldId id="261" r:id="rId13"/>
-    <p:sldId id="262" r:id="rId14"/>
-    <p:sldId id="263" r:id="rId15"/>
-    <p:sldId id="264" r:id="rId16"/>
-    <p:sldId id="265" r:id="rId17"/>
-    <p:sldId id="266" r:id="rId18"/>
-    <p:sldId id="267" r:id="rId19"/>
-    <p:sldId id="268" r:id="rId20"/>
-    <p:sldId id="269" r:id="rId21"/>
-    <p:sldId id="270" r:id="rId22"/>
-    <p:sldId id="271" r:id="rId23"/>
-    <p:sldId id="272" r:id="rId24"/>
+    <p:sldId id="256" r:id="rId2"/>
+    <p:sldId id="273" r:id="rId3"/>
+    <p:sldId id="257" r:id="rId4"/>
+    <p:sldId id="258" r:id="rId5"/>
+    <p:sldId id="260" r:id="rId6"/>
+    <p:sldId id="261" r:id="rId7"/>
+    <p:sldId id="262" r:id="rId8"/>
+    <p:sldId id="263" r:id="rId9"/>
+    <p:sldId id="264" r:id="rId10"/>
+    <p:sldId id="265" r:id="rId11"/>
+    <p:sldId id="266" r:id="rId12"/>
+    <p:sldId id="267" r:id="rId13"/>
+    <p:sldId id="268" r:id="rId14"/>
+    <p:sldId id="269" r:id="rId15"/>
+    <p:sldId id="270" r:id="rId16"/>
+    <p:sldId id="271" r:id="rId17"/>
+    <p:sldId id="272" r:id="rId18"/>
   </p:sldIdLst>
-  <p:sldSz cx="9144000" cy="6858000"/>
+  <p:sldSz cx="9144000" cy="6858000" type="screen4x3"/>
   <p:notesSz cx="6858000" cy="9144000"/>
   <p:defaultTextStyle>
     <a:defPPr marL="0" marR="0" indent="0" algn="l" defTabSz="914400" rtl="0" fontAlgn="auto" latinLnBrk="1" hangingPunct="0">
@@ -44,7 +44,7 @@
       <a:buFontTx/>
       <a:buNone/>
       <a:tabLst/>
-      <a:defRPr b="0" baseline="0" cap="none" i="0" spc="0" strike="noStrike" sz="1800" u="none" kumimoji="0" normalizeH="0">
+      <a:defRPr kumimoji="0" sz="1800" b="0" i="0" u="none" strike="noStrike" cap="none" spc="0" normalizeH="0" baseline="0">
         <a:ln>
           <a:noFill/>
         </a:ln>
@@ -70,7 +70,7 @@
       <a:buFontTx/>
       <a:buNone/>
       <a:tabLst/>
-      <a:defRPr b="0" baseline="0" cap="none" i="0" spc="0" strike="noStrike" sz="1800" u="none" kumimoji="0" normalizeH="0">
+      <a:defRPr kumimoji="0" sz="1800" b="0" i="0" u="none" strike="noStrike" cap="none" spc="0" normalizeH="0" baseline="0">
         <a:ln>
           <a:noFill/>
         </a:ln>
@@ -100,7 +100,7 @@
       <a:buFontTx/>
       <a:buNone/>
       <a:tabLst/>
-      <a:defRPr b="0" baseline="0" cap="none" i="0" spc="0" strike="noStrike" sz="1800" u="none" kumimoji="0" normalizeH="0">
+      <a:defRPr kumimoji="0" sz="1800" b="0" i="0" u="none" strike="noStrike" cap="none" spc="0" normalizeH="0" baseline="0">
         <a:ln>
           <a:noFill/>
         </a:ln>
@@ -130,7 +130,7 @@
       <a:buFontTx/>
       <a:buNone/>
       <a:tabLst/>
-      <a:defRPr b="0" baseline="0" cap="none" i="0" spc="0" strike="noStrike" sz="1800" u="none" kumimoji="0" normalizeH="0">
+      <a:defRPr kumimoji="0" sz="1800" b="0" i="0" u="none" strike="noStrike" cap="none" spc="0" normalizeH="0" baseline="0">
         <a:ln>
           <a:noFill/>
         </a:ln>
@@ -160,7 +160,7 @@
       <a:buFontTx/>
       <a:buNone/>
       <a:tabLst/>
-      <a:defRPr b="0" baseline="0" cap="none" i="0" spc="0" strike="noStrike" sz="1800" u="none" kumimoji="0" normalizeH="0">
+      <a:defRPr kumimoji="0" sz="1800" b="0" i="0" u="none" strike="noStrike" cap="none" spc="0" normalizeH="0" baseline="0">
         <a:ln>
           <a:noFill/>
         </a:ln>
@@ -190,7 +190,7 @@
       <a:buFontTx/>
       <a:buNone/>
       <a:tabLst/>
-      <a:defRPr b="0" baseline="0" cap="none" i="0" spc="0" strike="noStrike" sz="1800" u="none" kumimoji="0" normalizeH="0">
+      <a:defRPr kumimoji="0" sz="1800" b="0" i="0" u="none" strike="noStrike" cap="none" spc="0" normalizeH="0" baseline="0">
         <a:ln>
           <a:noFill/>
         </a:ln>
@@ -220,7 +220,7 @@
       <a:buFontTx/>
       <a:buNone/>
       <a:tabLst/>
-      <a:defRPr b="0" baseline="0" cap="none" i="0" spc="0" strike="noStrike" sz="1800" u="none" kumimoji="0" normalizeH="0">
+      <a:defRPr kumimoji="0" sz="1800" b="0" i="0" u="none" strike="noStrike" cap="none" spc="0" normalizeH="0" baseline="0">
         <a:ln>
           <a:noFill/>
         </a:ln>
@@ -250,7 +250,7 @@
       <a:buFontTx/>
       <a:buNone/>
       <a:tabLst/>
-      <a:defRPr b="0" baseline="0" cap="none" i="0" spc="0" strike="noStrike" sz="1800" u="none" kumimoji="0" normalizeH="0">
+      <a:defRPr kumimoji="0" sz="1800" b="0" i="0" u="none" strike="noStrike" cap="none" spc="0" normalizeH="0" baseline="0">
         <a:ln>
           <a:noFill/>
         </a:ln>
@@ -280,7 +280,7 @@
       <a:buFontTx/>
       <a:buNone/>
       <a:tabLst/>
-      <a:defRPr b="0" baseline="0" cap="none" i="0" spc="0" strike="noStrike" sz="1800" u="none" kumimoji="0" normalizeH="0">
+      <a:defRPr kumimoji="0" sz="1800" b="0" i="0" u="none" strike="noStrike" cap="none" spc="0" normalizeH="0" baseline="0">
         <a:ln>
           <a:noFill/>
         </a:ln>
@@ -310,7 +310,7 @@
       <a:buFontTx/>
       <a:buNone/>
       <a:tabLst/>
-      <a:defRPr b="0" baseline="0" cap="none" i="0" spc="0" strike="noStrike" sz="1800" u="none" kumimoji="0" normalizeH="0">
+      <a:defRPr kumimoji="0" sz="1800" b="0" i="0" u="none" strike="noStrike" cap="none" spc="0" normalizeH="0" baseline="0">
         <a:ln>
           <a:noFill/>
         </a:ln>
@@ -326,16 +326,22 @@
       </a:defRPr>
     </a:lvl9pPr>
   </p:defaultTextStyle>
+  <p:extLst>
+    <p:ext uri="{EFAFB233-063F-42B5-8137-9DF3F51BA10A}">
+      <p15:sldGuideLst xmlns:p15="http://schemas.microsoft.com/office/powerpoint/2012/main"/>
+    </p:ext>
+  </p:extLst>
 </p:presentation>
 </file>
 
-<file path=ppt/commentAuthors.xml><?xml version="1.0" encoding="utf-8"?>
-<p:cmAuthorLst xmlns:a="http://schemas.openxmlformats.org/drawingml/2006/main" xmlns:r="http://schemas.openxmlformats.org/officeDocument/2006/relationships" xmlns:p="http://schemas.openxmlformats.org/presentationml/2006/main" xmlns:m="http://schemas.openxmlformats.org/officeDocument/2006/math" xmlns:a14="http://schemas.microsoft.com/office/drawing/2010/main"/>
-</file>
-
 <file path=ppt/notesMasters/notesMaster1.xml><?xml version="1.0" encoding="utf-8"?>
-<p:notesMaster xmlns:a="http://schemas.openxmlformats.org/drawingml/2006/main" xmlns:r="http://schemas.openxmlformats.org/officeDocument/2006/relationships" xmlns:p="http://schemas.openxmlformats.org/presentationml/2006/main" xmlns:m="http://schemas.openxmlformats.org/officeDocument/2006/math" xmlns:a14="http://schemas.microsoft.com/office/drawing/2010/main">
+<p:notesMaster xmlns:a="http://schemas.openxmlformats.org/drawingml/2006/main" xmlns:r="http://schemas.openxmlformats.org/officeDocument/2006/relationships" xmlns:p="http://schemas.openxmlformats.org/presentationml/2006/main">
   <p:cSld>
+    <p:bg>
+      <p:bgRef idx="1001">
+        <a:schemeClr val="bg1"/>
+      </p:bgRef>
+    </p:bg>
     <p:spTree>
       <p:nvGrpSpPr>
         <p:cNvPr id="1" name=""/>
@@ -353,7 +359,9 @@
       <p:sp>
         <p:nvSpPr>
           <p:cNvPr id="134" name="Shape 134"/>
-          <p:cNvSpPr/>
+          <p:cNvSpPr>
+            <a:spLocks noGrp="1" noRot="1" noChangeAspect="1"/>
+          </p:cNvSpPr>
           <p:nvPr>
             <p:ph type="sldImg"/>
           </p:nvPr>
@@ -371,14 +379,16 @@
           <a:bodyPr/>
           <a:lstStyle/>
           <a:p>
-            <a:pPr/>
+            <a:endParaRPr/>
           </a:p>
         </p:txBody>
       </p:sp>
       <p:sp>
         <p:nvSpPr>
           <p:cNvPr id="135" name="Shape 135"/>
-          <p:cNvSpPr/>
+          <p:cNvSpPr>
+            <a:spLocks noGrp="1"/>
+          </p:cNvSpPr>
           <p:nvPr>
             <p:ph type="body" sz="quarter" idx="1"/>
           </p:nvPr>
@@ -396,7 +406,7 @@
           <a:bodyPr/>
           <a:lstStyle/>
           <a:p>
-            <a:pPr/>
+            <a:endParaRPr/>
           </a:p>
         </p:txBody>
       </p:sp>
@@ -480,8 +490,69 @@
 </p:notesMaster>
 </file>
 
+<file path=ppt/notesSlides/notesSlide1.xml><?xml version="1.0" encoding="utf-8"?>
+<p:notes xmlns:a="http://schemas.openxmlformats.org/drawingml/2006/main" xmlns:r="http://schemas.openxmlformats.org/officeDocument/2006/relationships" xmlns:p="http://schemas.openxmlformats.org/presentationml/2006/main">
+  <p:cSld>
+    <p:spTree>
+      <p:nvGrpSpPr>
+        <p:cNvPr id="1" name=""/>
+        <p:cNvGrpSpPr/>
+        <p:nvPr/>
+      </p:nvGrpSpPr>
+      <p:grpSpPr>
+        <a:xfrm>
+          <a:off x="0" y="0"/>
+          <a:ext cx="0" cy="0"/>
+          <a:chOff x="0" y="0"/>
+          <a:chExt cx="0" cy="0"/>
+        </a:xfrm>
+      </p:grpSpPr>
+      <p:sp>
+        <p:nvSpPr>
+          <p:cNvPr id="2" name="Slide Image Placeholder 1"/>
+          <p:cNvSpPr>
+            <a:spLocks noGrp="1" noRot="1" noChangeAspect="1"/>
+          </p:cNvSpPr>
+          <p:nvPr>
+            <p:ph type="sldImg"/>
+          </p:nvPr>
+        </p:nvSpPr>
+        <p:spPr/>
+      </p:sp>
+      <p:sp>
+        <p:nvSpPr>
+          <p:cNvPr id="3" name="Notes Placeholder 2"/>
+          <p:cNvSpPr>
+            <a:spLocks noGrp="1"/>
+          </p:cNvSpPr>
+          <p:nvPr>
+            <p:ph type="body" idx="1"/>
+          </p:nvPr>
+        </p:nvSpPr>
+        <p:spPr/>
+        <p:txBody>
+          <a:bodyPr/>
+          <a:lstStyle/>
+          <a:p>
+            <a:endParaRPr lang="en-US" dirty="0"/>
+          </a:p>
+        </p:txBody>
+      </p:sp>
+    </p:spTree>
+    <p:extLst>
+      <p:ext uri="{BB962C8B-B14F-4D97-AF65-F5344CB8AC3E}">
+        <p14:creationId xmlns:p14="http://schemas.microsoft.com/office/powerpoint/2010/main" val="1984126518"/>
+      </p:ext>
+    </p:extLst>
+  </p:cSld>
+  <p:clrMapOvr>
+    <a:masterClrMapping/>
+  </p:clrMapOvr>
+</p:notes>
+</file>
+
 <file path=ppt/slideLayouts/slideLayout1.xml><?xml version="1.0" encoding="utf-8"?>
-<p:sldLayout xmlns:a="http://schemas.openxmlformats.org/drawingml/2006/main" xmlns:r="http://schemas.openxmlformats.org/officeDocument/2006/relationships" xmlns:p="http://schemas.openxmlformats.org/presentationml/2006/main" xmlns:m="http://schemas.openxmlformats.org/officeDocument/2006/math" xmlns:a14="http://schemas.microsoft.com/office/drawing/2010/main" type="title" showMasterSp="1" showMasterPhAnim="1">
+<p:sldLayout xmlns:a="http://schemas.openxmlformats.org/drawingml/2006/main" xmlns:r="http://schemas.openxmlformats.org/officeDocument/2006/relationships" xmlns:p="http://schemas.openxmlformats.org/presentationml/2006/main" type="title">
   <p:cSld name="Title Slide">
     <p:spTree>
       <p:nvGrpSpPr>
@@ -500,7 +571,9 @@
       <p:sp>
         <p:nvSpPr>
           <p:cNvPr id="14" name="Title Text"/>
-          <p:cNvSpPr txBox="1"/>
+          <p:cNvSpPr txBox="1">
+            <a:spLocks noGrp="1"/>
+          </p:cNvSpPr>
           <p:nvPr>
             <p:ph type="title"/>
           </p:nvPr>
@@ -526,7 +599,6 @@
             </a:lvl1pPr>
           </a:lstStyle>
           <a:p>
-            <a:pPr/>
             <a:r>
               <a:t>Title Text</a:t>
             </a:r>
@@ -536,7 +608,9 @@
       <p:sp>
         <p:nvSpPr>
           <p:cNvPr id="15" name="Body Level One…"/>
-          <p:cNvSpPr txBox="1"/>
+          <p:cNvSpPr txBox="1">
+            <a:spLocks noGrp="1"/>
+          </p:cNvSpPr>
           <p:nvPr>
             <p:ph type="body" sz="quarter" idx="1"/>
           </p:nvPr>
@@ -557,7 +631,7 @@
               <a:buSzTx/>
               <a:buFontTx/>
               <a:buNone/>
-              <a:defRPr b="1" sz="2200">
+              <a:defRPr sz="2200" b="1">
                 <a:solidFill>
                   <a:srgbClr val="FFFFFF"/>
                 </a:solidFill>
@@ -571,7 +645,7 @@
               <a:buSzTx/>
               <a:buFontTx/>
               <a:buNone/>
-              <a:defRPr b="1" sz="2200">
+              <a:defRPr sz="2200" b="1">
                 <a:solidFill>
                   <a:srgbClr val="FFFFFF"/>
                 </a:solidFill>
@@ -585,7 +659,7 @@
               <a:buSzTx/>
               <a:buFontTx/>
               <a:buNone/>
-              <a:defRPr b="1" sz="2200">
+              <a:defRPr sz="2200" b="1">
                 <a:solidFill>
                   <a:srgbClr val="FFFFFF"/>
                 </a:solidFill>
@@ -599,7 +673,7 @@
               <a:buSzTx/>
               <a:buFontTx/>
               <a:buNone/>
-              <a:defRPr b="1" sz="2200">
+              <a:defRPr sz="2200" b="1">
                 <a:solidFill>
                   <a:srgbClr val="FFFFFF"/>
                 </a:solidFill>
@@ -613,7 +687,7 @@
               <a:buSzTx/>
               <a:buFontTx/>
               <a:buNone/>
-              <a:defRPr b="1" sz="2200">
+              <a:defRPr sz="2200" b="1">
                 <a:solidFill>
                   <a:srgbClr val="FFFFFF"/>
                 </a:solidFill>
@@ -625,7 +699,6 @@
             </a:lvl5pPr>
           </a:lstStyle>
           <a:p>
-            <a:pPr/>
             <a:r>
               <a:t>Body Level One</a:t>
             </a:r>
@@ -659,7 +732,9 @@
       <p:sp>
         <p:nvSpPr>
           <p:cNvPr id="16" name="Slide Number"/>
-          <p:cNvSpPr txBox="1"/>
+          <p:cNvSpPr txBox="1">
+            <a:spLocks noGrp="1"/>
+          </p:cNvSpPr>
           <p:nvPr>
             <p:ph type="sldNum" sz="quarter" idx="2"/>
           </p:nvPr>
@@ -677,8 +752,10 @@
           <a:bodyPr/>
           <a:lstStyle/>
           <a:p>
-            <a:pPr/>
-            <a:fld id="{86CB4B4D-7CA3-9044-876B-883B54F8677D}" type="slidenum"/>
+            <a:fld id="{86CB4B4D-7CA3-9044-876B-883B54F8677D}" type="slidenum">
+              <a:t>‹#›</a:t>
+            </a:fld>
+            <a:endParaRPr/>
           </a:p>
         </p:txBody>
       </p:sp>
@@ -687,12 +764,12 @@
   <p:clrMapOvr>
     <a:masterClrMapping/>
   </p:clrMapOvr>
-  <p:transition xmlns:p14="http://schemas.microsoft.com/office/powerpoint/2010/main" spd="med" advClick="1"/>
+  <p:transition spd="med"/>
 </p:sldLayout>
 </file>
 
 <file path=ppt/slideLayouts/slideLayout10.xml><?xml version="1.0" encoding="utf-8"?>
-<p:sldLayout xmlns:a="http://schemas.openxmlformats.org/drawingml/2006/main" xmlns:r="http://schemas.openxmlformats.org/officeDocument/2006/relationships" xmlns:p="http://schemas.openxmlformats.org/presentationml/2006/main" xmlns:m="http://schemas.openxmlformats.org/officeDocument/2006/math" xmlns:a14="http://schemas.microsoft.com/office/drawing/2010/main" type="tx" showMasterSp="0" showMasterPhAnim="1">
+<p:sldLayout xmlns:a="http://schemas.openxmlformats.org/drawingml/2006/main" xmlns:r="http://schemas.openxmlformats.org/officeDocument/2006/relationships" xmlns:p="http://schemas.openxmlformats.org/presentationml/2006/main" showMasterSp="0" type="tx">
   <p:cSld name="Content with Caption">
     <p:spTree>
       <p:nvGrpSpPr>
@@ -731,7 +808,7 @@
             </a:solidFill>
           </a:ln>
           <a:effectLst>
-            <a:outerShdw sx="100000" sy="100000" kx="0" ky="0" algn="b" rotWithShape="0" blurRad="38100" dist="23000" dir="5400000">
+            <a:outerShdw blurRad="38100" dist="23000" dir="5400000" rotWithShape="0">
               <a:srgbClr val="000000">
                 <a:alpha val="35000"/>
               </a:srgbClr>
@@ -749,6 +826,7 @@
                 </a:solidFill>
               </a:defRPr>
             </a:pPr>
+            <a:endParaRPr/>
           </a:p>
         </p:txBody>
       </p:sp>
@@ -761,9 +839,7 @@
           <p:nvPr/>
         </p:nvPicPr>
         <p:blipFill>
-          <a:blip r:embed="rId2">
-            <a:extLst/>
-          </a:blip>
+          <a:blip r:embed="rId2"/>
           <a:stretch>
             <a:fillRect/>
           </a:stretch>
@@ -802,7 +878,7 @@
             <a:miter lim="400000"/>
           </a:ln>
           <a:effectLst>
-            <a:outerShdw sx="100000" sy="100000" kx="0" ky="0" algn="b" rotWithShape="0" blurRad="38100" dist="23000" dir="5400000">
+            <a:outerShdw blurRad="38100" dist="23000" dir="5400000" rotWithShape="0">
               <a:srgbClr val="000000">
                 <a:alpha val="35000"/>
               </a:srgbClr>
@@ -820,13 +896,16 @@
                 </a:solidFill>
               </a:defRPr>
             </a:pPr>
+            <a:endParaRPr/>
           </a:p>
         </p:txBody>
       </p:sp>
       <p:sp>
         <p:nvSpPr>
           <p:cNvPr id="112" name="Title Text"/>
-          <p:cNvSpPr txBox="1"/>
+          <p:cNvSpPr txBox="1">
+            <a:spLocks noGrp="1"/>
+          </p:cNvSpPr>
           <p:nvPr>
             <p:ph type="title"/>
           </p:nvPr>
@@ -848,7 +927,6 @@
             </a:lvl1pPr>
           </a:lstStyle>
           <a:p>
-            <a:pPr/>
             <a:r>
               <a:t>Title Text</a:t>
             </a:r>
@@ -858,7 +936,9 @@
       <p:sp>
         <p:nvSpPr>
           <p:cNvPr id="113" name="Body Level One…"/>
-          <p:cNvSpPr txBox="1"/>
+          <p:cNvSpPr txBox="1">
+            <a:spLocks noGrp="1"/>
+          </p:cNvSpPr>
           <p:nvPr>
             <p:ph type="body" idx="1"/>
           </p:nvPr>
@@ -876,7 +956,6 @@
           <a:bodyPr/>
           <a:lstStyle/>
           <a:p>
-            <a:pPr/>
             <a:r>
               <a:t>Body Level One</a:t>
             </a:r>
@@ -910,7 +989,9 @@
       <p:sp>
         <p:nvSpPr>
           <p:cNvPr id="114" name="Text Placeholder 3"/>
-          <p:cNvSpPr/>
+          <p:cNvSpPr>
+            <a:spLocks noGrp="1"/>
+          </p:cNvSpPr>
           <p:nvPr>
             <p:ph type="body" sz="half" idx="21"/>
           </p:nvPr>
@@ -937,13 +1018,16 @@
               <a:buNone/>
               <a:defRPr sz="1000"/>
             </a:pPr>
+            <a:endParaRPr/>
           </a:p>
         </p:txBody>
       </p:sp>
       <p:sp>
         <p:nvSpPr>
           <p:cNvPr id="115" name="Slide Number"/>
-          <p:cNvSpPr txBox="1"/>
+          <p:cNvSpPr txBox="1">
+            <a:spLocks noGrp="1"/>
+          </p:cNvSpPr>
           <p:nvPr>
             <p:ph type="sldNum" sz="quarter" idx="2"/>
           </p:nvPr>
@@ -961,8 +1045,10 @@
           <a:bodyPr/>
           <a:lstStyle/>
           <a:p>
-            <a:pPr/>
-            <a:fld id="{86CB4B4D-7CA3-9044-876B-883B54F8677D}" type="slidenum"/>
+            <a:fld id="{86CB4B4D-7CA3-9044-876B-883B54F8677D}" type="slidenum">
+              <a:t>‹#›</a:t>
+            </a:fld>
+            <a:endParaRPr/>
           </a:p>
         </p:txBody>
       </p:sp>
@@ -971,12 +1057,12 @@
   <p:clrMapOvr>
     <a:masterClrMapping/>
   </p:clrMapOvr>
-  <p:transition xmlns:p14="http://schemas.microsoft.com/office/powerpoint/2010/main" spd="med" advClick="1"/>
+  <p:transition spd="med"/>
 </p:sldLayout>
 </file>
 
 <file path=ppt/slideLayouts/slideLayout11.xml><?xml version="1.0" encoding="utf-8"?>
-<p:sldLayout xmlns:a="http://schemas.openxmlformats.org/drawingml/2006/main" xmlns:r="http://schemas.openxmlformats.org/officeDocument/2006/relationships" xmlns:p="http://schemas.openxmlformats.org/presentationml/2006/main" xmlns:m="http://schemas.openxmlformats.org/officeDocument/2006/math" xmlns:a14="http://schemas.microsoft.com/office/drawing/2010/main" type="tx" showMasterSp="0" showMasterPhAnim="1">
+<p:sldLayout xmlns:a="http://schemas.openxmlformats.org/drawingml/2006/main" xmlns:r="http://schemas.openxmlformats.org/officeDocument/2006/relationships" xmlns:p="http://schemas.openxmlformats.org/presentationml/2006/main" showMasterSp="0" type="tx">
   <p:cSld name="Picture with Caption">
     <p:spTree>
       <p:nvGrpSpPr>
@@ -1015,7 +1101,7 @@
             </a:solidFill>
           </a:ln>
           <a:effectLst>
-            <a:outerShdw sx="100000" sy="100000" kx="0" ky="0" algn="b" rotWithShape="0" blurRad="38100" dist="23000" dir="5400000">
+            <a:outerShdw blurRad="38100" dist="23000" dir="5400000" rotWithShape="0">
               <a:srgbClr val="000000">
                 <a:alpha val="35000"/>
               </a:srgbClr>
@@ -1033,6 +1119,7 @@
                 </a:solidFill>
               </a:defRPr>
             </a:pPr>
+            <a:endParaRPr/>
           </a:p>
         </p:txBody>
       </p:sp>
@@ -1045,9 +1132,7 @@
           <p:nvPr/>
         </p:nvPicPr>
         <p:blipFill>
-          <a:blip r:embed="rId2">
-            <a:extLst/>
-          </a:blip>
+          <a:blip r:embed="rId2"/>
           <a:stretch>
             <a:fillRect/>
           </a:stretch>
@@ -1086,7 +1171,7 @@
             <a:miter lim="400000"/>
           </a:ln>
           <a:effectLst>
-            <a:outerShdw sx="100000" sy="100000" kx="0" ky="0" algn="b" rotWithShape="0" blurRad="38100" dist="23000" dir="5400000">
+            <a:outerShdw blurRad="38100" dist="23000" dir="5400000" rotWithShape="0">
               <a:srgbClr val="000000">
                 <a:alpha val="35000"/>
               </a:srgbClr>
@@ -1104,13 +1189,16 @@
                 </a:solidFill>
               </a:defRPr>
             </a:pPr>
+            <a:endParaRPr/>
           </a:p>
         </p:txBody>
       </p:sp>
       <p:sp>
         <p:nvSpPr>
           <p:cNvPr id="125" name="Title Text"/>
-          <p:cNvSpPr txBox="1"/>
+          <p:cNvSpPr txBox="1">
+            <a:spLocks noGrp="1"/>
+          </p:cNvSpPr>
           <p:nvPr>
             <p:ph type="title"/>
           </p:nvPr>
@@ -1132,7 +1220,6 @@
             </a:lvl1pPr>
           </a:lstStyle>
           <a:p>
-            <a:pPr/>
             <a:r>
               <a:t>Title Text</a:t>
             </a:r>
@@ -1142,7 +1229,9 @@
       <p:sp>
         <p:nvSpPr>
           <p:cNvPr id="126" name="Picture Placeholder 2"/>
-          <p:cNvSpPr/>
+          <p:cNvSpPr>
+            <a:spLocks noGrp="1"/>
+          </p:cNvSpPr>
           <p:nvPr>
             <p:ph type="pic" sz="half" idx="21"/>
           </p:nvPr>
@@ -1162,14 +1251,16 @@
           </a:bodyPr>
           <a:lstStyle/>
           <a:p>
-            <a:pPr/>
+            <a:endParaRPr/>
           </a:p>
         </p:txBody>
       </p:sp>
       <p:sp>
         <p:nvSpPr>
           <p:cNvPr id="127" name="Body Level One…"/>
-          <p:cNvSpPr txBox="1"/>
+          <p:cNvSpPr txBox="1">
+            <a:spLocks noGrp="1"/>
+          </p:cNvSpPr>
           <p:nvPr>
             <p:ph type="body" sz="quarter" idx="1"/>
           </p:nvPr>
@@ -1233,7 +1324,6 @@
             </a:lvl5pPr>
           </a:lstStyle>
           <a:p>
-            <a:pPr/>
             <a:r>
               <a:t>Body Level One</a:t>
             </a:r>
@@ -1267,7 +1357,9 @@
       <p:sp>
         <p:nvSpPr>
           <p:cNvPr id="128" name="Slide Number"/>
-          <p:cNvSpPr txBox="1"/>
+          <p:cNvSpPr txBox="1">
+            <a:spLocks noGrp="1"/>
+          </p:cNvSpPr>
           <p:nvPr>
             <p:ph type="sldNum" sz="quarter" idx="2"/>
           </p:nvPr>
@@ -1285,8 +1377,10 @@
           <a:bodyPr/>
           <a:lstStyle/>
           <a:p>
-            <a:pPr/>
-            <a:fld id="{86CB4B4D-7CA3-9044-876B-883B54F8677D}" type="slidenum"/>
+            <a:fld id="{86CB4B4D-7CA3-9044-876B-883B54F8677D}" type="slidenum">
+              <a:t>‹#›</a:t>
+            </a:fld>
+            <a:endParaRPr/>
           </a:p>
         </p:txBody>
       </p:sp>
@@ -1295,12 +1389,12 @@
   <p:clrMapOvr>
     <a:masterClrMapping/>
   </p:clrMapOvr>
-  <p:transition xmlns:p14="http://schemas.microsoft.com/office/powerpoint/2010/main" spd="med" advClick="1"/>
+  <p:transition spd="med"/>
 </p:sldLayout>
 </file>
 
 <file path=ppt/slideLayouts/slideLayout2.xml><?xml version="1.0" encoding="utf-8"?>
-<p:sldLayout xmlns:a="http://schemas.openxmlformats.org/drawingml/2006/main" xmlns:r="http://schemas.openxmlformats.org/officeDocument/2006/relationships" xmlns:p="http://schemas.openxmlformats.org/presentationml/2006/main" xmlns:m="http://schemas.openxmlformats.org/officeDocument/2006/math" xmlns:a14="http://schemas.microsoft.com/office/drawing/2010/main" type="tx" showMasterSp="1" showMasterPhAnim="1">
+<p:sldLayout xmlns:a="http://schemas.openxmlformats.org/drawingml/2006/main" xmlns:r="http://schemas.openxmlformats.org/officeDocument/2006/relationships" xmlns:p="http://schemas.openxmlformats.org/presentationml/2006/main" type="tx">
   <p:cSld name="Title and Content">
     <p:spTree>
       <p:nvGrpSpPr>
@@ -1319,7 +1413,9 @@
       <p:sp>
         <p:nvSpPr>
           <p:cNvPr id="23" name="Title Text"/>
-          <p:cNvSpPr txBox="1"/>
+          <p:cNvSpPr txBox="1">
+            <a:spLocks noGrp="1"/>
+          </p:cNvSpPr>
           <p:nvPr>
             <p:ph type="title"/>
           </p:nvPr>
@@ -1333,7 +1429,6 @@
           <a:bodyPr/>
           <a:lstStyle/>
           <a:p>
-            <a:pPr/>
             <a:r>
               <a:t>Title Text</a:t>
             </a:r>
@@ -1343,7 +1438,9 @@
       <p:sp>
         <p:nvSpPr>
           <p:cNvPr id="24" name="Body Level One…"/>
-          <p:cNvSpPr txBox="1"/>
+          <p:cNvSpPr txBox="1">
+            <a:spLocks noGrp="1"/>
+          </p:cNvSpPr>
           <p:nvPr>
             <p:ph type="body" idx="1"/>
           </p:nvPr>
@@ -1357,7 +1454,6 @@
           <a:bodyPr/>
           <a:lstStyle/>
           <a:p>
-            <a:pPr/>
             <a:r>
               <a:t>Body Level One</a:t>
             </a:r>
@@ -1391,7 +1487,9 @@
       <p:sp>
         <p:nvSpPr>
           <p:cNvPr id="25" name="Slide Number"/>
-          <p:cNvSpPr txBox="1"/>
+          <p:cNvSpPr txBox="1">
+            <a:spLocks noGrp="1"/>
+          </p:cNvSpPr>
           <p:nvPr>
             <p:ph type="sldNum" sz="quarter" idx="2"/>
           </p:nvPr>
@@ -1405,8 +1503,10 @@
           <a:bodyPr/>
           <a:lstStyle/>
           <a:p>
-            <a:pPr/>
-            <a:fld id="{86CB4B4D-7CA3-9044-876B-883B54F8677D}" type="slidenum"/>
+            <a:fld id="{86CB4B4D-7CA3-9044-876B-883B54F8677D}" type="slidenum">
+              <a:t>‹#›</a:t>
+            </a:fld>
+            <a:endParaRPr/>
           </a:p>
         </p:txBody>
       </p:sp>
@@ -1415,12 +1515,12 @@
   <p:clrMapOvr>
     <a:masterClrMapping/>
   </p:clrMapOvr>
-  <p:transition xmlns:p14="http://schemas.microsoft.com/office/powerpoint/2010/main" spd="med" advClick="1"/>
+  <p:transition spd="med"/>
 </p:sldLayout>
 </file>
 
 <file path=ppt/slideLayouts/slideLayout3.xml><?xml version="1.0" encoding="utf-8"?>
-<p:sldLayout xmlns:a="http://schemas.openxmlformats.org/drawingml/2006/main" xmlns:r="http://schemas.openxmlformats.org/officeDocument/2006/relationships" xmlns:p="http://schemas.openxmlformats.org/presentationml/2006/main" xmlns:m="http://schemas.openxmlformats.org/officeDocument/2006/math" xmlns:a14="http://schemas.microsoft.com/office/drawing/2010/main" type="tx" showMasterSp="0" showMasterPhAnim="1">
+<p:sldLayout xmlns:a="http://schemas.openxmlformats.org/drawingml/2006/main" xmlns:r="http://schemas.openxmlformats.org/officeDocument/2006/relationships" xmlns:p="http://schemas.openxmlformats.org/presentationml/2006/main" showMasterSp="0" type="tx">
   <p:cSld name="Section Header">
     <p:spTree>
       <p:nvGrpSpPr>
@@ -1459,7 +1559,7 @@
             </a:solidFill>
           </a:ln>
           <a:effectLst>
-            <a:outerShdw sx="100000" sy="100000" kx="0" ky="0" algn="b" rotWithShape="0" blurRad="38100" dist="23000" dir="5400000">
+            <a:outerShdw blurRad="38100" dist="23000" dir="5400000" rotWithShape="0">
               <a:srgbClr val="000000">
                 <a:alpha val="35000"/>
               </a:srgbClr>
@@ -1477,6 +1577,7 @@
                 </a:solidFill>
               </a:defRPr>
             </a:pPr>
+            <a:endParaRPr/>
           </a:p>
         </p:txBody>
       </p:sp>
@@ -1489,9 +1590,7 @@
           <p:nvPr/>
         </p:nvPicPr>
         <p:blipFill>
-          <a:blip r:embed="rId2">
-            <a:extLst/>
-          </a:blip>
+          <a:blip r:embed="rId2"/>
           <a:stretch>
             <a:fillRect/>
           </a:stretch>
@@ -1530,7 +1629,7 @@
             <a:miter lim="400000"/>
           </a:ln>
           <a:effectLst>
-            <a:outerShdw sx="100000" sy="100000" kx="0" ky="0" algn="b" rotWithShape="0" blurRad="38100" dist="23000" dir="5400000">
+            <a:outerShdw blurRad="38100" dist="23000" dir="5400000" rotWithShape="0">
               <a:srgbClr val="000000">
                 <a:alpha val="35000"/>
               </a:srgbClr>
@@ -1548,13 +1647,16 @@
                 </a:solidFill>
               </a:defRPr>
             </a:pPr>
+            <a:endParaRPr/>
           </a:p>
         </p:txBody>
       </p:sp>
       <p:sp>
         <p:nvSpPr>
           <p:cNvPr id="35" name="Title Text"/>
-          <p:cNvSpPr txBox="1"/>
+          <p:cNvSpPr txBox="1">
+            <a:spLocks noGrp="1"/>
+          </p:cNvSpPr>
           <p:nvPr>
             <p:ph type="title"/>
           </p:nvPr>
@@ -1572,11 +1674,10 @@
           <a:bodyPr/>
           <a:lstStyle>
             <a:lvl1pPr>
-              <a:defRPr cap="all" sz="3000"/>
+              <a:defRPr sz="3000" cap="all"/>
             </a:lvl1pPr>
           </a:lstStyle>
           <a:p>
-            <a:pPr/>
             <a:r>
               <a:t>Title Text</a:t>
             </a:r>
@@ -1586,7 +1687,9 @@
       <p:sp>
         <p:nvSpPr>
           <p:cNvPr id="36" name="Body Level One…"/>
-          <p:cNvSpPr txBox="1"/>
+          <p:cNvSpPr txBox="1">
+            <a:spLocks noGrp="1"/>
+          </p:cNvSpPr>
           <p:nvPr>
             <p:ph type="body" sz="quarter" idx="1"/>
           </p:nvPr>
@@ -1670,7 +1773,6 @@
             </a:lvl5pPr>
           </a:lstStyle>
           <a:p>
-            <a:pPr/>
             <a:r>
               <a:t>Body Level One</a:t>
             </a:r>
@@ -1704,7 +1806,9 @@
       <p:sp>
         <p:nvSpPr>
           <p:cNvPr id="37" name="Slide Number"/>
-          <p:cNvSpPr txBox="1"/>
+          <p:cNvSpPr txBox="1">
+            <a:spLocks noGrp="1"/>
+          </p:cNvSpPr>
           <p:nvPr>
             <p:ph type="sldNum" sz="quarter" idx="2"/>
           </p:nvPr>
@@ -1718,8 +1822,10 @@
           <a:bodyPr/>
           <a:lstStyle/>
           <a:p>
-            <a:pPr/>
-            <a:fld id="{86CB4B4D-7CA3-9044-876B-883B54F8677D}" type="slidenum"/>
+            <a:fld id="{86CB4B4D-7CA3-9044-876B-883B54F8677D}" type="slidenum">
+              <a:t>‹#›</a:t>
+            </a:fld>
+            <a:endParaRPr/>
           </a:p>
         </p:txBody>
       </p:sp>
@@ -1728,12 +1834,12 @@
   <p:clrMapOvr>
     <a:masterClrMapping/>
   </p:clrMapOvr>
-  <p:transition xmlns:p14="http://schemas.microsoft.com/office/powerpoint/2010/main" spd="med" advClick="1"/>
+  <p:transition spd="med"/>
 </p:sldLayout>
 </file>
 
 <file path=ppt/slideLayouts/slideLayout4.xml><?xml version="1.0" encoding="utf-8"?>
-<p:sldLayout xmlns:a="http://schemas.openxmlformats.org/drawingml/2006/main" xmlns:r="http://schemas.openxmlformats.org/officeDocument/2006/relationships" xmlns:p="http://schemas.openxmlformats.org/presentationml/2006/main" xmlns:m="http://schemas.openxmlformats.org/officeDocument/2006/math" xmlns:a14="http://schemas.microsoft.com/office/drawing/2010/main" type="tx" showMasterSp="0" showMasterPhAnim="1">
+<p:sldLayout xmlns:a="http://schemas.openxmlformats.org/drawingml/2006/main" xmlns:r="http://schemas.openxmlformats.org/officeDocument/2006/relationships" xmlns:p="http://schemas.openxmlformats.org/presentationml/2006/main" showMasterSp="0" type="tx">
   <p:cSld name="1_Custom Layout">
     <p:spTree>
       <p:nvGrpSpPr>
@@ -1772,7 +1878,7 @@
             </a:solidFill>
           </a:ln>
           <a:effectLst>
-            <a:outerShdw sx="100000" sy="100000" kx="0" ky="0" algn="b" rotWithShape="0" blurRad="38100" dist="23000" dir="5400000">
+            <a:outerShdw blurRad="38100" dist="23000" dir="5400000" rotWithShape="0">
               <a:srgbClr val="000000">
                 <a:alpha val="35000"/>
               </a:srgbClr>
@@ -1790,6 +1896,7 @@
                 </a:solidFill>
               </a:defRPr>
             </a:pPr>
+            <a:endParaRPr/>
           </a:p>
         </p:txBody>
       </p:sp>
@@ -1802,9 +1909,7 @@
           <p:nvPr/>
         </p:nvPicPr>
         <p:blipFill>
-          <a:blip r:embed="rId2">
-            <a:extLst/>
-          </a:blip>
+          <a:blip r:embed="rId2"/>
           <a:stretch>
             <a:fillRect/>
           </a:stretch>
@@ -1843,7 +1948,7 @@
             <a:miter lim="400000"/>
           </a:ln>
           <a:effectLst>
-            <a:outerShdw sx="100000" sy="100000" kx="0" ky="0" algn="b" rotWithShape="0" blurRad="38100" dist="23000" dir="5400000">
+            <a:outerShdw blurRad="38100" dist="23000" dir="5400000" rotWithShape="0">
               <a:srgbClr val="000000">
                 <a:alpha val="35000"/>
               </a:srgbClr>
@@ -1861,13 +1966,16 @@
                 </a:solidFill>
               </a:defRPr>
             </a:pPr>
+            <a:endParaRPr/>
           </a:p>
         </p:txBody>
       </p:sp>
       <p:sp>
         <p:nvSpPr>
           <p:cNvPr id="47" name="Title Text"/>
-          <p:cNvSpPr txBox="1"/>
+          <p:cNvSpPr txBox="1">
+            <a:spLocks noGrp="1"/>
+          </p:cNvSpPr>
           <p:nvPr>
             <p:ph type="title"/>
           </p:nvPr>
@@ -1881,7 +1989,6 @@
           <a:bodyPr/>
           <a:lstStyle/>
           <a:p>
-            <a:pPr/>
             <a:r>
               <a:t>Title Text</a:t>
             </a:r>
@@ -1891,7 +1998,9 @@
       <p:sp>
         <p:nvSpPr>
           <p:cNvPr id="48" name="Slide Number"/>
-          <p:cNvSpPr txBox="1"/>
+          <p:cNvSpPr txBox="1">
+            <a:spLocks noGrp="1"/>
+          </p:cNvSpPr>
           <p:nvPr>
             <p:ph type="sldNum" sz="quarter" idx="2"/>
           </p:nvPr>
@@ -1909,8 +2018,10 @@
           <a:bodyPr/>
           <a:lstStyle/>
           <a:p>
-            <a:pPr/>
-            <a:fld id="{86CB4B4D-7CA3-9044-876B-883B54F8677D}" type="slidenum"/>
+            <a:fld id="{86CB4B4D-7CA3-9044-876B-883B54F8677D}" type="slidenum">
+              <a:t>‹#›</a:t>
+            </a:fld>
+            <a:endParaRPr/>
           </a:p>
         </p:txBody>
       </p:sp>
@@ -1919,12 +2030,12 @@
   <p:clrMapOvr>
     <a:masterClrMapping/>
   </p:clrMapOvr>
-  <p:transition xmlns:p14="http://schemas.microsoft.com/office/powerpoint/2010/main" spd="med" advClick="1"/>
+  <p:transition spd="med"/>
 </p:sldLayout>
 </file>
 
 <file path=ppt/slideLayouts/slideLayout5.xml><?xml version="1.0" encoding="utf-8"?>
-<p:sldLayout xmlns:a="http://schemas.openxmlformats.org/drawingml/2006/main" xmlns:r="http://schemas.openxmlformats.org/officeDocument/2006/relationships" xmlns:p="http://schemas.openxmlformats.org/presentationml/2006/main" xmlns:m="http://schemas.openxmlformats.org/officeDocument/2006/math" xmlns:a14="http://schemas.microsoft.com/office/drawing/2010/main" type="tx" showMasterSp="0" showMasterPhAnim="1">
+<p:sldLayout xmlns:a="http://schemas.openxmlformats.org/drawingml/2006/main" xmlns:r="http://schemas.openxmlformats.org/officeDocument/2006/relationships" xmlns:p="http://schemas.openxmlformats.org/presentationml/2006/main" showMasterSp="0" type="tx">
   <p:cSld name="Custom Layout">
     <p:spTree>
       <p:nvGrpSpPr>
@@ -1963,7 +2074,7 @@
             </a:solidFill>
           </a:ln>
           <a:effectLst>
-            <a:outerShdw sx="100000" sy="100000" kx="0" ky="0" algn="b" rotWithShape="0" blurRad="38100" dist="23000" dir="5400000">
+            <a:outerShdw blurRad="38100" dist="23000" dir="5400000" rotWithShape="0">
               <a:srgbClr val="000000">
                 <a:alpha val="35000"/>
               </a:srgbClr>
@@ -1981,6 +2092,7 @@
                 </a:solidFill>
               </a:defRPr>
             </a:pPr>
+            <a:endParaRPr/>
           </a:p>
         </p:txBody>
       </p:sp>
@@ -1993,9 +2105,7 @@
           <p:nvPr/>
         </p:nvPicPr>
         <p:blipFill>
-          <a:blip r:embed="rId2">
-            <a:extLst/>
-          </a:blip>
+          <a:blip r:embed="rId2"/>
           <a:stretch>
             <a:fillRect/>
           </a:stretch>
@@ -2034,7 +2144,7 @@
             <a:miter lim="400000"/>
           </a:ln>
           <a:effectLst>
-            <a:outerShdw sx="100000" sy="100000" kx="0" ky="0" algn="b" rotWithShape="0" blurRad="38100" dist="23000" dir="5400000">
+            <a:outerShdw blurRad="38100" dist="23000" dir="5400000" rotWithShape="0">
               <a:srgbClr val="000000">
                 <a:alpha val="35000"/>
               </a:srgbClr>
@@ -2052,13 +2162,16 @@
                 </a:solidFill>
               </a:defRPr>
             </a:pPr>
+            <a:endParaRPr/>
           </a:p>
         </p:txBody>
       </p:sp>
       <p:sp>
         <p:nvSpPr>
           <p:cNvPr id="58" name="Title Text"/>
-          <p:cNvSpPr txBox="1"/>
+          <p:cNvSpPr txBox="1">
+            <a:spLocks noGrp="1"/>
+          </p:cNvSpPr>
           <p:nvPr>
             <p:ph type="title"/>
           </p:nvPr>
@@ -2072,7 +2185,6 @@
           <a:bodyPr/>
           <a:lstStyle/>
           <a:p>
-            <a:pPr/>
             <a:r>
               <a:t>Title Text</a:t>
             </a:r>
@@ -2082,7 +2194,9 @@
       <p:sp>
         <p:nvSpPr>
           <p:cNvPr id="59" name="Slide Number"/>
-          <p:cNvSpPr txBox="1"/>
+          <p:cNvSpPr txBox="1">
+            <a:spLocks noGrp="1"/>
+          </p:cNvSpPr>
           <p:nvPr>
             <p:ph type="sldNum" sz="quarter" idx="2"/>
           </p:nvPr>
@@ -2100,8 +2214,10 @@
           <a:bodyPr/>
           <a:lstStyle/>
           <a:p>
-            <a:pPr/>
-            <a:fld id="{86CB4B4D-7CA3-9044-876B-883B54F8677D}" type="slidenum"/>
+            <a:fld id="{86CB4B4D-7CA3-9044-876B-883B54F8677D}" type="slidenum">
+              <a:t>‹#›</a:t>
+            </a:fld>
+            <a:endParaRPr/>
           </a:p>
         </p:txBody>
       </p:sp>
@@ -2110,12 +2226,12 @@
   <p:clrMapOvr>
     <a:masterClrMapping/>
   </p:clrMapOvr>
-  <p:transition xmlns:p14="http://schemas.microsoft.com/office/powerpoint/2010/main" spd="med" advClick="1"/>
+  <p:transition spd="med"/>
 </p:sldLayout>
 </file>
 
 <file path=ppt/slideLayouts/slideLayout6.xml><?xml version="1.0" encoding="utf-8"?>
-<p:sldLayout xmlns:a="http://schemas.openxmlformats.org/drawingml/2006/main" xmlns:r="http://schemas.openxmlformats.org/officeDocument/2006/relationships" xmlns:p="http://schemas.openxmlformats.org/presentationml/2006/main" xmlns:m="http://schemas.openxmlformats.org/officeDocument/2006/math" xmlns:a14="http://schemas.microsoft.com/office/drawing/2010/main" type="tx" showMasterSp="0" showMasterPhAnim="1">
+<p:sldLayout xmlns:a="http://schemas.openxmlformats.org/drawingml/2006/main" xmlns:r="http://schemas.openxmlformats.org/officeDocument/2006/relationships" xmlns:p="http://schemas.openxmlformats.org/presentationml/2006/main" showMasterSp="0" type="tx">
   <p:cSld name="Two Content">
     <p:spTree>
       <p:nvGrpSpPr>
@@ -2154,7 +2270,7 @@
             </a:solidFill>
           </a:ln>
           <a:effectLst>
-            <a:outerShdw sx="100000" sy="100000" kx="0" ky="0" algn="b" rotWithShape="0" blurRad="38100" dist="23000" dir="5400000">
+            <a:outerShdw blurRad="38100" dist="23000" dir="5400000" rotWithShape="0">
               <a:srgbClr val="000000">
                 <a:alpha val="35000"/>
               </a:srgbClr>
@@ -2172,6 +2288,7 @@
                 </a:solidFill>
               </a:defRPr>
             </a:pPr>
+            <a:endParaRPr/>
           </a:p>
         </p:txBody>
       </p:sp>
@@ -2184,9 +2301,7 @@
           <p:nvPr/>
         </p:nvPicPr>
         <p:blipFill>
-          <a:blip r:embed="rId2">
-            <a:extLst/>
-          </a:blip>
+          <a:blip r:embed="rId2"/>
           <a:stretch>
             <a:fillRect/>
           </a:stretch>
@@ -2225,7 +2340,7 @@
             <a:miter lim="400000"/>
           </a:ln>
           <a:effectLst>
-            <a:outerShdw sx="100000" sy="100000" kx="0" ky="0" algn="b" rotWithShape="0" blurRad="38100" dist="23000" dir="5400000">
+            <a:outerShdw blurRad="38100" dist="23000" dir="5400000" rotWithShape="0">
               <a:srgbClr val="000000">
                 <a:alpha val="35000"/>
               </a:srgbClr>
@@ -2243,13 +2358,16 @@
                 </a:solidFill>
               </a:defRPr>
             </a:pPr>
+            <a:endParaRPr/>
           </a:p>
         </p:txBody>
       </p:sp>
       <p:sp>
         <p:nvSpPr>
           <p:cNvPr id="69" name="Title Text"/>
-          <p:cNvSpPr txBox="1"/>
+          <p:cNvSpPr txBox="1">
+            <a:spLocks noGrp="1"/>
+          </p:cNvSpPr>
           <p:nvPr>
             <p:ph type="title"/>
           </p:nvPr>
@@ -2263,7 +2381,6 @@
           <a:bodyPr/>
           <a:lstStyle/>
           <a:p>
-            <a:pPr/>
             <a:r>
               <a:t>Title Text</a:t>
             </a:r>
@@ -2273,7 +2390,9 @@
       <p:sp>
         <p:nvSpPr>
           <p:cNvPr id="70" name="Body Level One…"/>
-          <p:cNvSpPr txBox="1"/>
+          <p:cNvSpPr txBox="1">
+            <a:spLocks noGrp="1"/>
+          </p:cNvSpPr>
           <p:nvPr>
             <p:ph type="body" sz="half" idx="1"/>
           </p:nvPr>
@@ -2307,7 +2426,6 @@
             </a:lvl5pPr>
           </a:lstStyle>
           <a:p>
-            <a:pPr/>
             <a:r>
               <a:t>Body Level One</a:t>
             </a:r>
@@ -2341,7 +2459,9 @@
       <p:sp>
         <p:nvSpPr>
           <p:cNvPr id="71" name="Slide Number"/>
-          <p:cNvSpPr txBox="1"/>
+          <p:cNvSpPr txBox="1">
+            <a:spLocks noGrp="1"/>
+          </p:cNvSpPr>
           <p:nvPr>
             <p:ph type="sldNum" sz="quarter" idx="2"/>
           </p:nvPr>
@@ -2359,8 +2479,10 @@
           <a:bodyPr/>
           <a:lstStyle/>
           <a:p>
-            <a:pPr/>
-            <a:fld id="{86CB4B4D-7CA3-9044-876B-883B54F8677D}" type="slidenum"/>
+            <a:fld id="{86CB4B4D-7CA3-9044-876B-883B54F8677D}" type="slidenum">
+              <a:t>‹#›</a:t>
+            </a:fld>
+            <a:endParaRPr/>
           </a:p>
         </p:txBody>
       </p:sp>
@@ -2369,12 +2491,12 @@
   <p:clrMapOvr>
     <a:masterClrMapping/>
   </p:clrMapOvr>
-  <p:transition xmlns:p14="http://schemas.microsoft.com/office/powerpoint/2010/main" spd="med" advClick="1"/>
+  <p:transition spd="med"/>
 </p:sldLayout>
 </file>
 
 <file path=ppt/slideLayouts/slideLayout7.xml><?xml version="1.0" encoding="utf-8"?>
-<p:sldLayout xmlns:a="http://schemas.openxmlformats.org/drawingml/2006/main" xmlns:r="http://schemas.openxmlformats.org/officeDocument/2006/relationships" xmlns:p="http://schemas.openxmlformats.org/presentationml/2006/main" xmlns:m="http://schemas.openxmlformats.org/officeDocument/2006/math" xmlns:a14="http://schemas.microsoft.com/office/drawing/2010/main" type="tx" showMasterSp="1" showMasterPhAnim="1">
+<p:sldLayout xmlns:a="http://schemas.openxmlformats.org/drawingml/2006/main" xmlns:r="http://schemas.openxmlformats.org/officeDocument/2006/relationships" xmlns:p="http://schemas.openxmlformats.org/presentationml/2006/main" type="tx">
   <p:cSld name="Comparison">
     <p:spTree>
       <p:nvGrpSpPr>
@@ -2393,7 +2515,9 @@
       <p:sp>
         <p:nvSpPr>
           <p:cNvPr id="78" name="Title Text"/>
-          <p:cNvSpPr txBox="1"/>
+          <p:cNvSpPr txBox="1">
+            <a:spLocks noGrp="1"/>
+          </p:cNvSpPr>
           <p:nvPr>
             <p:ph type="title"/>
           </p:nvPr>
@@ -2407,7 +2531,6 @@
           <a:bodyPr/>
           <a:lstStyle/>
           <a:p>
-            <a:pPr/>
             <a:r>
               <a:t>Title Text</a:t>
             </a:r>
@@ -2417,7 +2540,9 @@
       <p:sp>
         <p:nvSpPr>
           <p:cNvPr id="79" name="Body Level One…"/>
-          <p:cNvSpPr txBox="1"/>
+          <p:cNvSpPr txBox="1">
+            <a:spLocks noGrp="1"/>
+          </p:cNvSpPr>
           <p:nvPr>
             <p:ph type="body" sz="quarter" idx="1"/>
           </p:nvPr>
@@ -2441,7 +2566,7 @@
               <a:buSzTx/>
               <a:buFontTx/>
               <a:buNone/>
-              <a:defRPr b="1" sz="1800"/>
+              <a:defRPr sz="1800" b="1"/>
             </a:lvl1pPr>
             <a:lvl2pPr marL="0" indent="342991">
               <a:spcBef>
@@ -2450,7 +2575,7 @@
               <a:buSzTx/>
               <a:buFontTx/>
               <a:buNone/>
-              <a:defRPr b="1" sz="1800"/>
+              <a:defRPr sz="1800" b="1"/>
             </a:lvl2pPr>
             <a:lvl3pPr marL="0" indent="685982">
               <a:spcBef>
@@ -2459,7 +2584,7 @@
               <a:buSzTx/>
               <a:buFontTx/>
               <a:buNone/>
-              <a:defRPr b="1" sz="1800"/>
+              <a:defRPr sz="1800" b="1"/>
             </a:lvl3pPr>
             <a:lvl4pPr marL="0" indent="1028974">
               <a:spcBef>
@@ -2468,7 +2593,7 @@
               <a:buSzTx/>
               <a:buFontTx/>
               <a:buNone/>
-              <a:defRPr b="1" sz="1800"/>
+              <a:defRPr sz="1800" b="1"/>
             </a:lvl4pPr>
             <a:lvl5pPr marL="0" indent="1371965">
               <a:spcBef>
@@ -2477,11 +2602,10 @@
               <a:buSzTx/>
               <a:buFontTx/>
               <a:buNone/>
-              <a:defRPr b="1" sz="1800"/>
+              <a:defRPr sz="1800" b="1"/>
             </a:lvl5pPr>
           </a:lstStyle>
           <a:p>
-            <a:pPr/>
             <a:r>
               <a:t>Body Level One</a:t>
             </a:r>
@@ -2515,7 +2639,9 @@
       <p:sp>
         <p:nvSpPr>
           <p:cNvPr id="80" name="Text Placeholder 4"/>
-          <p:cNvSpPr/>
+          <p:cNvSpPr>
+            <a:spLocks noGrp="1"/>
+          </p:cNvSpPr>
           <p:nvPr>
             <p:ph type="body" sz="quarter" idx="21"/>
           </p:nvPr>
@@ -2540,15 +2666,18 @@
               <a:buSzTx/>
               <a:buFontTx/>
               <a:buNone/>
-              <a:defRPr b="1" sz="1800"/>
-            </a:pPr>
+              <a:defRPr sz="1800" b="1"/>
+            </a:pPr>
+            <a:endParaRPr/>
           </a:p>
         </p:txBody>
       </p:sp>
       <p:sp>
         <p:nvSpPr>
           <p:cNvPr id="81" name="Slide Number"/>
-          <p:cNvSpPr txBox="1"/>
+          <p:cNvSpPr txBox="1">
+            <a:spLocks noGrp="1"/>
+          </p:cNvSpPr>
           <p:nvPr>
             <p:ph type="sldNum" sz="quarter" idx="2"/>
           </p:nvPr>
@@ -2566,8 +2695,10 @@
           <a:bodyPr/>
           <a:lstStyle/>
           <a:p>
-            <a:pPr/>
-            <a:fld id="{86CB4B4D-7CA3-9044-876B-883B54F8677D}" type="slidenum"/>
+            <a:fld id="{86CB4B4D-7CA3-9044-876B-883B54F8677D}" type="slidenum">
+              <a:t>‹#›</a:t>
+            </a:fld>
+            <a:endParaRPr/>
           </a:p>
         </p:txBody>
       </p:sp>
@@ -2576,12 +2707,12 @@
   <p:clrMapOvr>
     <a:masterClrMapping/>
   </p:clrMapOvr>
-  <p:transition xmlns:p14="http://schemas.microsoft.com/office/powerpoint/2010/main" spd="med" advClick="1"/>
+  <p:transition spd="med"/>
 </p:sldLayout>
 </file>
 
 <file path=ppt/slideLayouts/slideLayout8.xml><?xml version="1.0" encoding="utf-8"?>
-<p:sldLayout xmlns:a="http://schemas.openxmlformats.org/drawingml/2006/main" xmlns:r="http://schemas.openxmlformats.org/officeDocument/2006/relationships" xmlns:p="http://schemas.openxmlformats.org/presentationml/2006/main" xmlns:m="http://schemas.openxmlformats.org/officeDocument/2006/math" xmlns:a14="http://schemas.microsoft.com/office/drawing/2010/main" type="tx" showMasterSp="0" showMasterPhAnim="1">
+<p:sldLayout xmlns:a="http://schemas.openxmlformats.org/drawingml/2006/main" xmlns:r="http://schemas.openxmlformats.org/officeDocument/2006/relationships" xmlns:p="http://schemas.openxmlformats.org/presentationml/2006/main" showMasterSp="0" type="tx">
   <p:cSld name="Title Only">
     <p:spTree>
       <p:nvGrpSpPr>
@@ -2620,7 +2751,7 @@
             </a:solidFill>
           </a:ln>
           <a:effectLst>
-            <a:outerShdw sx="100000" sy="100000" kx="0" ky="0" algn="b" rotWithShape="0" blurRad="38100" dist="23000" dir="5400000">
+            <a:outerShdw blurRad="38100" dist="23000" dir="5400000" rotWithShape="0">
               <a:srgbClr val="000000">
                 <a:alpha val="35000"/>
               </a:srgbClr>
@@ -2638,6 +2769,7 @@
                 </a:solidFill>
               </a:defRPr>
             </a:pPr>
+            <a:endParaRPr/>
           </a:p>
         </p:txBody>
       </p:sp>
@@ -2650,9 +2782,7 @@
           <p:nvPr/>
         </p:nvPicPr>
         <p:blipFill>
-          <a:blip r:embed="rId2">
-            <a:extLst/>
-          </a:blip>
+          <a:blip r:embed="rId2"/>
           <a:stretch>
             <a:fillRect/>
           </a:stretch>
@@ -2691,7 +2821,7 @@
             <a:miter lim="400000"/>
           </a:ln>
           <a:effectLst>
-            <a:outerShdw sx="100000" sy="100000" kx="0" ky="0" algn="b" rotWithShape="0" blurRad="38100" dist="23000" dir="5400000">
+            <a:outerShdw blurRad="38100" dist="23000" dir="5400000" rotWithShape="0">
               <a:srgbClr val="000000">
                 <a:alpha val="35000"/>
               </a:srgbClr>
@@ -2709,13 +2839,16 @@
                 </a:solidFill>
               </a:defRPr>
             </a:pPr>
+            <a:endParaRPr/>
           </a:p>
         </p:txBody>
       </p:sp>
       <p:sp>
         <p:nvSpPr>
           <p:cNvPr id="91" name="Title Text"/>
-          <p:cNvSpPr txBox="1"/>
+          <p:cNvSpPr txBox="1">
+            <a:spLocks noGrp="1"/>
+          </p:cNvSpPr>
           <p:nvPr>
             <p:ph type="title"/>
           </p:nvPr>
@@ -2729,7 +2862,6 @@
           <a:bodyPr/>
           <a:lstStyle/>
           <a:p>
-            <a:pPr/>
             <a:r>
               <a:t>Title Text</a:t>
             </a:r>
@@ -2739,7 +2871,9 @@
       <p:sp>
         <p:nvSpPr>
           <p:cNvPr id="92" name="Slide Number"/>
-          <p:cNvSpPr txBox="1"/>
+          <p:cNvSpPr txBox="1">
+            <a:spLocks noGrp="1"/>
+          </p:cNvSpPr>
           <p:nvPr>
             <p:ph type="sldNum" sz="quarter" idx="2"/>
           </p:nvPr>
@@ -2757,8 +2891,10 @@
           <a:bodyPr/>
           <a:lstStyle/>
           <a:p>
-            <a:pPr/>
-            <a:fld id="{86CB4B4D-7CA3-9044-876B-883B54F8677D}" type="slidenum"/>
+            <a:fld id="{86CB4B4D-7CA3-9044-876B-883B54F8677D}" type="slidenum">
+              <a:t>‹#›</a:t>
+            </a:fld>
+            <a:endParaRPr/>
           </a:p>
         </p:txBody>
       </p:sp>
@@ -2767,12 +2903,12 @@
   <p:clrMapOvr>
     <a:masterClrMapping/>
   </p:clrMapOvr>
-  <p:transition xmlns:p14="http://schemas.microsoft.com/office/powerpoint/2010/main" spd="med" advClick="1"/>
+  <p:transition spd="med"/>
 </p:sldLayout>
 </file>
 
 <file path=ppt/slideLayouts/slideLayout9.xml><?xml version="1.0" encoding="utf-8"?>
-<p:sldLayout xmlns:a="http://schemas.openxmlformats.org/drawingml/2006/main" xmlns:r="http://schemas.openxmlformats.org/officeDocument/2006/relationships" xmlns:p="http://schemas.openxmlformats.org/presentationml/2006/main" xmlns:m="http://schemas.openxmlformats.org/officeDocument/2006/math" xmlns:a14="http://schemas.microsoft.com/office/drawing/2010/main" type="tx" showMasterSp="0" showMasterPhAnim="1">
+<p:sldLayout xmlns:a="http://schemas.openxmlformats.org/drawingml/2006/main" xmlns:r="http://schemas.openxmlformats.org/officeDocument/2006/relationships" xmlns:p="http://schemas.openxmlformats.org/presentationml/2006/main" showMasterSp="0" type="tx">
   <p:cSld name="Blank">
     <p:spTree>
       <p:nvGrpSpPr>
@@ -2811,7 +2947,7 @@
             </a:solidFill>
           </a:ln>
           <a:effectLst>
-            <a:outerShdw sx="100000" sy="100000" kx="0" ky="0" algn="b" rotWithShape="0" blurRad="38100" dist="23000" dir="5400000">
+            <a:outerShdw blurRad="38100" dist="23000" dir="5400000" rotWithShape="0">
               <a:srgbClr val="000000">
                 <a:alpha val="35000"/>
               </a:srgbClr>
@@ -2829,6 +2965,7 @@
                 </a:solidFill>
               </a:defRPr>
             </a:pPr>
+            <a:endParaRPr/>
           </a:p>
         </p:txBody>
       </p:sp>
@@ -2841,9 +2978,7 @@
           <p:nvPr/>
         </p:nvPicPr>
         <p:blipFill>
-          <a:blip r:embed="rId2">
-            <a:extLst/>
-          </a:blip>
+          <a:blip r:embed="rId2"/>
           <a:stretch>
             <a:fillRect/>
           </a:stretch>
@@ -2882,7 +3017,7 @@
             <a:miter lim="400000"/>
           </a:ln>
           <a:effectLst>
-            <a:outerShdw sx="100000" sy="100000" kx="0" ky="0" algn="b" rotWithShape="0" blurRad="38100" dist="23000" dir="5400000">
+            <a:outerShdw blurRad="38100" dist="23000" dir="5400000" rotWithShape="0">
               <a:srgbClr val="000000">
                 <a:alpha val="35000"/>
               </a:srgbClr>
@@ -2900,13 +3035,16 @@
                 </a:solidFill>
               </a:defRPr>
             </a:pPr>
+            <a:endParaRPr/>
           </a:p>
         </p:txBody>
       </p:sp>
       <p:sp>
         <p:nvSpPr>
           <p:cNvPr id="102" name="Slide Number"/>
-          <p:cNvSpPr txBox="1"/>
+          <p:cNvSpPr txBox="1">
+            <a:spLocks noGrp="1"/>
+          </p:cNvSpPr>
           <p:nvPr>
             <p:ph type="sldNum" sz="quarter" idx="2"/>
           </p:nvPr>
@@ -2924,8 +3062,10 @@
           <a:bodyPr/>
           <a:lstStyle/>
           <a:p>
-            <a:pPr/>
-            <a:fld id="{86CB4B4D-7CA3-9044-876B-883B54F8677D}" type="slidenum"/>
+            <a:fld id="{86CB4B4D-7CA3-9044-876B-883B54F8677D}" type="slidenum">
+              <a:t>‹#›</a:t>
+            </a:fld>
+            <a:endParaRPr/>
           </a:p>
         </p:txBody>
       </p:sp>
@@ -2934,18 +3074,19 @@
   <p:clrMapOvr>
     <a:masterClrMapping/>
   </p:clrMapOvr>
-  <p:transition xmlns:p14="http://schemas.microsoft.com/office/powerpoint/2010/main" spd="med" advClick="1"/>
+  <p:transition spd="med"/>
 </p:sldLayout>
 </file>
 
 <file path=ppt/slideMasters/slideMaster1.xml><?xml version="1.0" encoding="utf-8"?>
-<p:sldMaster xmlns:a="http://schemas.openxmlformats.org/drawingml/2006/main" xmlns:r="http://schemas.openxmlformats.org/officeDocument/2006/relationships" xmlns:p="http://schemas.openxmlformats.org/presentationml/2006/main" xmlns:m="http://schemas.openxmlformats.org/officeDocument/2006/math" xmlns:a14="http://schemas.microsoft.com/office/drawing/2010/main">
+<p:sldMaster xmlns:a="http://schemas.openxmlformats.org/drawingml/2006/main" xmlns:r="http://schemas.openxmlformats.org/officeDocument/2006/relationships" xmlns:p="http://schemas.openxmlformats.org/presentationml/2006/main">
   <p:cSld>
     <p:bg>
       <p:bgPr>
         <a:solidFill>
           <a:srgbClr val="FFFFFF"/>
         </a:solidFill>
+        <a:effectLst/>
       </p:bgPr>
     </p:bg>
     <p:spTree>
@@ -2985,7 +3126,7 @@
             </a:solidFill>
           </a:ln>
           <a:effectLst>
-            <a:outerShdw sx="100000" sy="100000" kx="0" ky="0" algn="b" rotWithShape="0" blurRad="38100" dist="23000" dir="5400000">
+            <a:outerShdw blurRad="38100" dist="23000" dir="5400000" rotWithShape="0">
               <a:srgbClr val="000000">
                 <a:alpha val="35000"/>
               </a:srgbClr>
@@ -3003,6 +3144,7 @@
                 </a:solidFill>
               </a:defRPr>
             </a:pPr>
+            <a:endParaRPr/>
           </a:p>
         </p:txBody>
       </p:sp>
@@ -3015,9 +3157,7 @@
           <p:nvPr/>
         </p:nvPicPr>
         <p:blipFill>
-          <a:blip r:embed="rId2">
-            <a:extLst/>
-          </a:blip>
+          <a:blip r:embed="rId13"/>
           <a:stretch>
             <a:fillRect/>
           </a:stretch>
@@ -3056,7 +3196,7 @@
             <a:miter lim="400000"/>
           </a:ln>
           <a:effectLst>
-            <a:outerShdw sx="100000" sy="100000" kx="0" ky="0" algn="b" rotWithShape="0" blurRad="38100" dist="23000" dir="5400000">
+            <a:outerShdw blurRad="38100" dist="23000" dir="5400000" rotWithShape="0">
               <a:srgbClr val="000000">
                 <a:alpha val="35000"/>
               </a:srgbClr>
@@ -3074,13 +3214,16 @@
                 </a:solidFill>
               </a:defRPr>
             </a:pPr>
+            <a:endParaRPr/>
           </a:p>
         </p:txBody>
       </p:sp>
       <p:sp>
         <p:nvSpPr>
           <p:cNvPr id="5" name="Title Text"/>
-          <p:cNvSpPr txBox="1"/>
+          <p:cNvSpPr txBox="1">
+            <a:spLocks noGrp="1"/>
+          </p:cNvSpPr>
           <p:nvPr>
             <p:ph type="title"/>
           </p:nvPr>
@@ -3098,17 +3241,16 @@
           </a:ln>
           <a:extLst>
             <a:ext uri="{C572A759-6A51-4108-AA02-DFA0A04FC94B}">
-              <ma14:wrappingTextBoxFlag xmlns:ma14="http://schemas.microsoft.com/office/mac/drawingml/2011/main" val="1"/>
+              <ma14:wrappingTextBoxFlag xmlns="" xmlns:m="http://schemas.openxmlformats.org/officeDocument/2006/math" xmlns:a14="http://schemas.microsoft.com/office/drawing/2010/main" xmlns:ma14="http://schemas.microsoft.com/office/mac/drawingml/2011/main" val="1"/>
             </a:ext>
           </a:extLst>
         </p:spPr>
         <p:txBody>
           <a:bodyPr lIns="45719" rIns="45719">
-            <a:normAutofit fontScale="100000" lnSpcReduction="0"/>
+            <a:normAutofit/>
           </a:bodyPr>
           <a:lstStyle/>
           <a:p>
-            <a:pPr/>
             <a:r>
               <a:t>Title Text</a:t>
             </a:r>
@@ -3118,7 +3260,9 @@
       <p:sp>
         <p:nvSpPr>
           <p:cNvPr id="6" name="Body Level One…"/>
-          <p:cNvSpPr txBox="1"/>
+          <p:cNvSpPr txBox="1">
+            <a:spLocks noGrp="1"/>
+          </p:cNvSpPr>
           <p:nvPr>
             <p:ph type="body" idx="1"/>
           </p:nvPr>
@@ -3136,17 +3280,16 @@
           </a:ln>
           <a:extLst>
             <a:ext uri="{C572A759-6A51-4108-AA02-DFA0A04FC94B}">
-              <ma14:wrappingTextBoxFlag xmlns:ma14="http://schemas.microsoft.com/office/mac/drawingml/2011/main" val="1"/>
+              <ma14:wrappingTextBoxFlag xmlns="" xmlns:m="http://schemas.openxmlformats.org/officeDocument/2006/math" xmlns:a14="http://schemas.microsoft.com/office/drawing/2010/main" xmlns:ma14="http://schemas.microsoft.com/office/mac/drawingml/2011/main" val="1"/>
             </a:ext>
           </a:extLst>
         </p:spPr>
         <p:txBody>
           <a:bodyPr lIns="45719" rIns="45719">
-            <a:normAutofit fontScale="100000" lnSpcReduction="0"/>
+            <a:normAutofit/>
           </a:bodyPr>
           <a:lstStyle/>
           <a:p>
-            <a:pPr/>
             <a:r>
               <a:t>Body Level One</a:t>
             </a:r>
@@ -3180,7 +3323,9 @@
       <p:sp>
         <p:nvSpPr>
           <p:cNvPr id="7" name="Slide Number"/>
-          <p:cNvSpPr txBox="1"/>
+          <p:cNvSpPr txBox="1">
+            <a:spLocks noGrp="1"/>
+          </p:cNvSpPr>
           <p:nvPr>
             <p:ph type="sldNum" sz="quarter" idx="2"/>
           </p:nvPr>
@@ -3215,8 +3360,10 @@
             </a:lvl1pPr>
           </a:lstStyle>
           <a:p>
-            <a:pPr/>
-            <a:fld id="{86CB4B4D-7CA3-9044-876B-883B54F8677D}" type="slidenum"/>
+            <a:fld id="{86CB4B4D-7CA3-9044-876B-883B54F8677D}" type="slidenum">
+              <a:t>‹#›</a:t>
+            </a:fld>
+            <a:endParaRPr/>
           </a:p>
         </p:txBody>
       </p:sp>
@@ -3224,19 +3371,19 @@
   </p:cSld>
   <p:clrMap bg1="lt1" tx1="dk1" bg2="lt2" tx2="dk2" accent1="accent1" accent2="accent2" accent3="accent3" accent4="accent4" accent5="accent5" accent6="accent6" hlink="hlink" folHlink="folHlink"/>
   <p:sldLayoutIdLst>
-    <p:sldLayoutId id="2147483649" r:id="rId3"/>
-    <p:sldLayoutId id="2147483650" r:id="rId4"/>
-    <p:sldLayoutId id="2147483651" r:id="rId5"/>
-    <p:sldLayoutId id="2147483652" r:id="rId6"/>
-    <p:sldLayoutId id="2147483653" r:id="rId7"/>
-    <p:sldLayoutId id="2147483654" r:id="rId8"/>
-    <p:sldLayoutId id="2147483655" r:id="rId9"/>
-    <p:sldLayoutId id="2147483656" r:id="rId10"/>
-    <p:sldLayoutId id="2147483657" r:id="rId11"/>
-    <p:sldLayoutId id="2147483658" r:id="rId12"/>
-    <p:sldLayoutId id="2147483659" r:id="rId13"/>
+    <p:sldLayoutId id="2147483649" r:id="rId1"/>
+    <p:sldLayoutId id="2147483650" r:id="rId2"/>
+    <p:sldLayoutId id="2147483651" r:id="rId3"/>
+    <p:sldLayoutId id="2147483652" r:id="rId4"/>
+    <p:sldLayoutId id="2147483653" r:id="rId5"/>
+    <p:sldLayoutId id="2147483654" r:id="rId6"/>
+    <p:sldLayoutId id="2147483655" r:id="rId7"/>
+    <p:sldLayoutId id="2147483656" r:id="rId8"/>
+    <p:sldLayoutId id="2147483657" r:id="rId9"/>
+    <p:sldLayoutId id="2147483658" r:id="rId10"/>
+    <p:sldLayoutId id="2147483659" r:id="rId11"/>
   </p:sldLayoutIdLst>
-  <p:transition xmlns:p14="http://schemas.microsoft.com/office/powerpoint/2010/main" spd="med" advClick="1"/>
+  <p:transition spd="med"/>
   <p:txStyles>
     <p:titleStyle>
       <a:lvl1pPr marL="0" marR="0" indent="0" algn="l" defTabSz="342991" rtl="0" latinLnBrk="0">
@@ -3254,7 +3401,7 @@
         <a:buFontTx/>
         <a:buNone/>
         <a:tabLst/>
-        <a:defRPr b="1" baseline="0" cap="none" i="0" spc="0" strike="noStrike" sz="2700" u="none">
+        <a:defRPr sz="2700" b="1" i="0" u="none" strike="noStrike" cap="none" spc="0" baseline="0">
           <a:solidFill>
             <a:srgbClr val="002D50"/>
           </a:solidFill>
@@ -3280,7 +3427,7 @@
         <a:buFontTx/>
         <a:buNone/>
         <a:tabLst/>
-        <a:defRPr b="1" baseline="0" cap="none" i="0" spc="0" strike="noStrike" sz="2700" u="none">
+        <a:defRPr sz="2700" b="1" i="0" u="none" strike="noStrike" cap="none" spc="0" baseline="0">
           <a:solidFill>
             <a:srgbClr val="002D50"/>
           </a:solidFill>
@@ -3306,7 +3453,7 @@
         <a:buFontTx/>
         <a:buNone/>
         <a:tabLst/>
-        <a:defRPr b="1" baseline="0" cap="none" i="0" spc="0" strike="noStrike" sz="2700" u="none">
+        <a:defRPr sz="2700" b="1" i="0" u="none" strike="noStrike" cap="none" spc="0" baseline="0">
           <a:solidFill>
             <a:srgbClr val="002D50"/>
           </a:solidFill>
@@ -3332,7 +3479,7 @@
         <a:buFontTx/>
         <a:buNone/>
         <a:tabLst/>
-        <a:defRPr b="1" baseline="0" cap="none" i="0" spc="0" strike="noStrike" sz="2700" u="none">
+        <a:defRPr sz="2700" b="1" i="0" u="none" strike="noStrike" cap="none" spc="0" baseline="0">
           <a:solidFill>
             <a:srgbClr val="002D50"/>
           </a:solidFill>
@@ -3358,7 +3505,7 @@
         <a:buFontTx/>
         <a:buNone/>
         <a:tabLst/>
-        <a:defRPr b="1" baseline="0" cap="none" i="0" spc="0" strike="noStrike" sz="2700" u="none">
+        <a:defRPr sz="2700" b="1" i="0" u="none" strike="noStrike" cap="none" spc="0" baseline="0">
           <a:solidFill>
             <a:srgbClr val="002D50"/>
           </a:solidFill>
@@ -3384,7 +3531,7 @@
         <a:buFontTx/>
         <a:buNone/>
         <a:tabLst/>
-        <a:defRPr b="1" baseline="0" cap="none" i="0" spc="0" strike="noStrike" sz="2700" u="none">
+        <a:defRPr sz="2700" b="1" i="0" u="none" strike="noStrike" cap="none" spc="0" baseline="0">
           <a:solidFill>
             <a:srgbClr val="002D50"/>
           </a:solidFill>
@@ -3410,7 +3557,7 @@
         <a:buFontTx/>
         <a:buNone/>
         <a:tabLst/>
-        <a:defRPr b="1" baseline="0" cap="none" i="0" spc="0" strike="noStrike" sz="2700" u="none">
+        <a:defRPr sz="2700" b="1" i="0" u="none" strike="noStrike" cap="none" spc="0" baseline="0">
           <a:solidFill>
             <a:srgbClr val="002D50"/>
           </a:solidFill>
@@ -3436,7 +3583,7 @@
         <a:buFontTx/>
         <a:buNone/>
         <a:tabLst/>
-        <a:defRPr b="1" baseline="0" cap="none" i="0" spc="0" strike="noStrike" sz="2700" u="none">
+        <a:defRPr sz="2700" b="1" i="0" u="none" strike="noStrike" cap="none" spc="0" baseline="0">
           <a:solidFill>
             <a:srgbClr val="002D50"/>
           </a:solidFill>
@@ -3462,7 +3609,7 @@
         <a:buFontTx/>
         <a:buNone/>
         <a:tabLst/>
-        <a:defRPr b="1" baseline="0" cap="none" i="0" spc="0" strike="noStrike" sz="2700" u="none">
+        <a:defRPr sz="2700" b="1" i="0" u="none" strike="noStrike" cap="none" spc="0" baseline="0">
           <a:solidFill>
             <a:srgbClr val="002D50"/>
           </a:solidFill>
@@ -3490,7 +3637,7 @@
         <a:buFont typeface="Arial"/>
         <a:buChar char="•"/>
         <a:tabLst/>
-        <a:defRPr b="0" baseline="0" cap="none" i="0" spc="0" strike="noStrike" sz="2400" u="none">
+        <a:defRPr sz="2400" b="0" i="0" u="none" strike="noStrike" cap="none" spc="0" baseline="0">
           <a:solidFill>
             <a:srgbClr val="000000"/>
           </a:solidFill>
@@ -3516,7 +3663,7 @@
         <a:buFont typeface="Arial"/>
         <a:buChar char="–"/>
         <a:tabLst/>
-        <a:defRPr b="0" baseline="0" cap="none" i="0" spc="0" strike="noStrike" sz="2400" u="none">
+        <a:defRPr sz="2400" b="0" i="0" u="none" strike="noStrike" cap="none" spc="0" baseline="0">
           <a:solidFill>
             <a:srgbClr val="000000"/>
           </a:solidFill>
@@ -3542,7 +3689,7 @@
         <a:buFont typeface="Arial"/>
         <a:buChar char="•"/>
         <a:tabLst/>
-        <a:defRPr b="0" baseline="0" cap="none" i="0" spc="0" strike="noStrike" sz="2400" u="none">
+        <a:defRPr sz="2400" b="0" i="0" u="none" strike="noStrike" cap="none" spc="0" baseline="0">
           <a:solidFill>
             <a:srgbClr val="000000"/>
           </a:solidFill>
@@ -3568,7 +3715,7 @@
         <a:buFont typeface="Arial"/>
         <a:buChar char="–"/>
         <a:tabLst/>
-        <a:defRPr b="0" baseline="0" cap="none" i="0" spc="0" strike="noStrike" sz="2400" u="none">
+        <a:defRPr sz="2400" b="0" i="0" u="none" strike="noStrike" cap="none" spc="0" baseline="0">
           <a:solidFill>
             <a:srgbClr val="000000"/>
           </a:solidFill>
@@ -3594,7 +3741,7 @@
         <a:buFont typeface="Arial"/>
         <a:buChar char="»"/>
         <a:tabLst/>
-        <a:defRPr b="0" baseline="0" cap="none" i="0" spc="0" strike="noStrike" sz="2400" u="none">
+        <a:defRPr sz="2400" b="0" i="0" u="none" strike="noStrike" cap="none" spc="0" baseline="0">
           <a:solidFill>
             <a:srgbClr val="000000"/>
           </a:solidFill>
@@ -3620,7 +3767,7 @@
         <a:buFont typeface="Arial"/>
         <a:buChar char="•"/>
         <a:tabLst/>
-        <a:defRPr b="0" baseline="0" cap="none" i="0" spc="0" strike="noStrike" sz="2400" u="none">
+        <a:defRPr sz="2400" b="0" i="0" u="none" strike="noStrike" cap="none" spc="0" baseline="0">
           <a:solidFill>
             <a:srgbClr val="000000"/>
           </a:solidFill>
@@ -3646,7 +3793,7 @@
         <a:buFont typeface="Arial"/>
         <a:buChar char="•"/>
         <a:tabLst/>
-        <a:defRPr b="0" baseline="0" cap="none" i="0" spc="0" strike="noStrike" sz="2400" u="none">
+        <a:defRPr sz="2400" b="0" i="0" u="none" strike="noStrike" cap="none" spc="0" baseline="0">
           <a:solidFill>
             <a:srgbClr val="000000"/>
           </a:solidFill>
@@ -3672,7 +3819,7 @@
         <a:buFont typeface="Arial"/>
         <a:buChar char="•"/>
         <a:tabLst/>
-        <a:defRPr b="0" baseline="0" cap="none" i="0" spc="0" strike="noStrike" sz="2400" u="none">
+        <a:defRPr sz="2400" b="0" i="0" u="none" strike="noStrike" cap="none" spc="0" baseline="0">
           <a:solidFill>
             <a:srgbClr val="000000"/>
           </a:solidFill>
@@ -3698,7 +3845,7 @@
         <a:buFont typeface="Arial"/>
         <a:buChar char="•"/>
         <a:tabLst/>
-        <a:defRPr b="0" baseline="0" cap="none" i="0" spc="0" strike="noStrike" sz="2400" u="none">
+        <a:defRPr sz="2400" b="0" i="0" u="none" strike="noStrike" cap="none" spc="0" baseline="0">
           <a:solidFill>
             <a:srgbClr val="000000"/>
           </a:solidFill>
@@ -3726,7 +3873,7 @@
         <a:buFontTx/>
         <a:buNone/>
         <a:tabLst/>
-        <a:defRPr b="0" baseline="0" cap="none" i="0" spc="0" strike="noStrike" sz="700" u="none">
+        <a:defRPr sz="700" b="0" i="0" u="none" strike="noStrike" cap="none" spc="0" baseline="0">
           <a:solidFill>
             <a:schemeClr val="tx1"/>
           </a:solidFill>
@@ -3752,7 +3899,7 @@
         <a:buFontTx/>
         <a:buNone/>
         <a:tabLst/>
-        <a:defRPr b="0" baseline="0" cap="none" i="0" spc="0" strike="noStrike" sz="700" u="none">
+        <a:defRPr sz="700" b="0" i="0" u="none" strike="noStrike" cap="none" spc="0" baseline="0">
           <a:solidFill>
             <a:schemeClr val="tx1"/>
           </a:solidFill>
@@ -3778,7 +3925,7 @@
         <a:buFontTx/>
         <a:buNone/>
         <a:tabLst/>
-        <a:defRPr b="0" baseline="0" cap="none" i="0" spc="0" strike="noStrike" sz="700" u="none">
+        <a:defRPr sz="700" b="0" i="0" u="none" strike="noStrike" cap="none" spc="0" baseline="0">
           <a:solidFill>
             <a:schemeClr val="tx1"/>
           </a:solidFill>
@@ -3804,7 +3951,7 @@
         <a:buFontTx/>
         <a:buNone/>
         <a:tabLst/>
-        <a:defRPr b="0" baseline="0" cap="none" i="0" spc="0" strike="noStrike" sz="700" u="none">
+        <a:defRPr sz="700" b="0" i="0" u="none" strike="noStrike" cap="none" spc="0" baseline="0">
           <a:solidFill>
             <a:schemeClr val="tx1"/>
           </a:solidFill>
@@ -3830,7 +3977,7 @@
         <a:buFontTx/>
         <a:buNone/>
         <a:tabLst/>
-        <a:defRPr b="0" baseline="0" cap="none" i="0" spc="0" strike="noStrike" sz="700" u="none">
+        <a:defRPr sz="700" b="0" i="0" u="none" strike="noStrike" cap="none" spc="0" baseline="0">
           <a:solidFill>
             <a:schemeClr val="tx1"/>
           </a:solidFill>
@@ -3856,7 +4003,7 @@
         <a:buFontTx/>
         <a:buNone/>
         <a:tabLst/>
-        <a:defRPr b="0" baseline="0" cap="none" i="0" spc="0" strike="noStrike" sz="700" u="none">
+        <a:defRPr sz="700" b="0" i="0" u="none" strike="noStrike" cap="none" spc="0" baseline="0">
           <a:solidFill>
             <a:schemeClr val="tx1"/>
           </a:solidFill>
@@ -3882,7 +4029,7 @@
         <a:buFontTx/>
         <a:buNone/>
         <a:tabLst/>
-        <a:defRPr b="0" baseline="0" cap="none" i="0" spc="0" strike="noStrike" sz="700" u="none">
+        <a:defRPr sz="700" b="0" i="0" u="none" strike="noStrike" cap="none" spc="0" baseline="0">
           <a:solidFill>
             <a:schemeClr val="tx1"/>
           </a:solidFill>
@@ -3908,7 +4055,7 @@
         <a:buFontTx/>
         <a:buNone/>
         <a:tabLst/>
-        <a:defRPr b="0" baseline="0" cap="none" i="0" spc="0" strike="noStrike" sz="700" u="none">
+        <a:defRPr sz="700" b="0" i="0" u="none" strike="noStrike" cap="none" spc="0" baseline="0">
           <a:solidFill>
             <a:schemeClr val="tx1"/>
           </a:solidFill>
@@ -3934,7 +4081,7 @@
         <a:buFontTx/>
         <a:buNone/>
         <a:tabLst/>
-        <a:defRPr b="0" baseline="0" cap="none" i="0" spc="0" strike="noStrike" sz="700" u="none">
+        <a:defRPr sz="700" b="0" i="0" u="none" strike="noStrike" cap="none" spc="0" baseline="0">
           <a:solidFill>
             <a:schemeClr val="tx1"/>
           </a:solidFill>
@@ -3951,7 +4098,7 @@
 </file>
 
 <file path=ppt/slides/slide1.xml><?xml version="1.0" encoding="utf-8"?>
-<p:sld xmlns:a="http://schemas.openxmlformats.org/drawingml/2006/main" xmlns:r="http://schemas.openxmlformats.org/officeDocument/2006/relationships" xmlns:p="http://schemas.openxmlformats.org/presentationml/2006/main" xmlns:m="http://schemas.openxmlformats.org/officeDocument/2006/math" xmlns:a14="http://schemas.microsoft.com/office/drawing/2010/main" showMasterSp="1" showMasterPhAnim="1">
+<p:sld xmlns:a="http://schemas.openxmlformats.org/drawingml/2006/main" xmlns:r="http://schemas.openxmlformats.org/officeDocument/2006/relationships" xmlns:p="http://schemas.openxmlformats.org/presentationml/2006/main">
   <p:cSld>
     <p:spTree>
       <p:nvGrpSpPr>
@@ -3999,13 +4146,16 @@
                 </a:solidFill>
               </a:defRPr>
             </a:pPr>
+            <a:endParaRPr/>
           </a:p>
         </p:txBody>
       </p:sp>
       <p:sp>
         <p:nvSpPr>
           <p:cNvPr id="138" name="Title 5"/>
-          <p:cNvSpPr txBox="1"/>
+          <p:cNvSpPr txBox="1">
+            <a:spLocks noGrp="1"/>
+          </p:cNvSpPr>
           <p:nvPr>
             <p:ph type="ctrTitle"/>
           </p:nvPr>
@@ -4031,7 +4181,6 @@
             </a:lvl1pPr>
           </a:lstStyle>
           <a:p>
-            <a:pPr/>
             <a:r>
               <a:t>Yelp Dataset Sentiment Analysis</a:t>
             </a:r>
@@ -4041,7 +4190,9 @@
       <p:sp>
         <p:nvSpPr>
           <p:cNvPr id="139" name="Subtitle 6"/>
-          <p:cNvSpPr txBox="1"/>
+          <p:cNvSpPr txBox="1">
+            <a:spLocks noGrp="1"/>
+          </p:cNvSpPr>
           <p:nvPr>
             <p:ph type="subTitle" sz="quarter" idx="1"/>
           </p:nvPr>
@@ -4062,7 +4213,7 @@
               <a:spcBef>
                 <a:spcPts val="400"/>
               </a:spcBef>
-              <a:defRPr b="0" sz="1800">
+              <a:defRPr sz="1800" b="0">
                 <a:latin typeface="Helvetica Neue Medium"/>
                 <a:ea typeface="Helvetica Neue Medium"/>
                 <a:cs typeface="Helvetica Neue Medium"/>
@@ -4071,7 +4222,6 @@
             </a:lvl1pPr>
           </a:lstStyle>
           <a:p>
-            <a:pPr/>
             <a:r>
               <a:t>Literature Review Survey</a:t>
             </a:r>
@@ -4087,9 +4237,7 @@
           <p:nvPr/>
         </p:nvPicPr>
         <p:blipFill>
-          <a:blip r:embed="rId2">
-            <a:extLst/>
-          </a:blip>
+          <a:blip r:embed="rId2"/>
           <a:stretch>
             <a:fillRect/>
           </a:stretch>
@@ -4126,13 +4274,13 @@
           </a:ln>
           <a:extLst>
             <a:ext uri="{C572A759-6A51-4108-AA02-DFA0A04FC94B}">
-              <ma14:wrappingTextBoxFlag xmlns:ma14="http://schemas.microsoft.com/office/mac/drawingml/2011/main" val="1"/>
+              <ma14:wrappingTextBoxFlag xmlns="" xmlns:m="http://schemas.openxmlformats.org/officeDocument/2006/math" xmlns:a14="http://schemas.microsoft.com/office/drawing/2010/main" xmlns:ma14="http://schemas.microsoft.com/office/mac/drawingml/2011/main" val="1"/>
             </a:ext>
           </a:extLst>
         </p:spPr>
         <p:txBody>
           <a:bodyPr lIns="45719" rIns="45719">
-            <a:normAutofit fontScale="100000" lnSpcReduction="0"/>
+            <a:normAutofit/>
           </a:bodyPr>
           <a:lstStyle/>
           <a:p>
@@ -4226,12 +4374,12 @@
   <p:clrMapOvr>
     <a:masterClrMapping/>
   </p:clrMapOvr>
-  <p:transition xmlns:p14="http://schemas.microsoft.com/office/powerpoint/2010/main" spd="med" advClick="1"/>
+  <p:transition spd="med"/>
 </p:sld>
 </file>
 
 <file path=ppt/slides/slide10.xml><?xml version="1.0" encoding="utf-8"?>
-<p:sld xmlns:a="http://schemas.openxmlformats.org/drawingml/2006/main" xmlns:r="http://schemas.openxmlformats.org/officeDocument/2006/relationships" xmlns:p="http://schemas.openxmlformats.org/presentationml/2006/main" xmlns:m="http://schemas.openxmlformats.org/officeDocument/2006/math" xmlns:a14="http://schemas.microsoft.com/office/drawing/2010/main" showMasterSp="1" showMasterPhAnim="1">
+<p:sld xmlns:a="http://schemas.openxmlformats.org/drawingml/2006/main" xmlns:r="http://schemas.openxmlformats.org/officeDocument/2006/relationships" xmlns:p="http://schemas.openxmlformats.org/presentationml/2006/main">
   <p:cSld>
     <p:spTree>
       <p:nvGrpSpPr>
@@ -4250,7 +4398,9 @@
       <p:sp>
         <p:nvSpPr>
           <p:cNvPr id="172" name="Ensemble Sentiment Analysis Using Bi-LSTM and CNN; Puneet Singh Lamba et al. (2024)"/>
-          <p:cNvSpPr txBox="1"/>
+          <p:cNvSpPr txBox="1">
+            <a:spLocks noGrp="1"/>
+          </p:cNvSpPr>
           <p:nvPr>
             <p:ph type="title"/>
           </p:nvPr>
@@ -4280,7 +4430,9 @@
       <p:sp>
         <p:nvSpPr>
           <p:cNvPr id="173" name="Dataset: IMDB movie reviews and Yelp (separate models)…"/>
-          <p:cNvSpPr txBox="1"/>
+          <p:cNvSpPr txBox="1">
+            <a:spLocks noGrp="1"/>
+          </p:cNvSpPr>
           <p:nvPr>
             <p:ph type="body" sz="half" idx="1"/>
           </p:nvPr>
@@ -4358,7 +4510,7 @@
             </a:r>
           </a:p>
           <a:p>
-            <a:pPr lvl="1" marL="378148" indent="-162063" defTabSz="216084">
+            <a:pPr marL="378148" lvl="1" indent="-162063" defTabSz="216084">
               <a:spcBef>
                 <a:spcPts val="300"/>
               </a:spcBef>
@@ -4377,7 +4529,7 @@
             </a:r>
           </a:p>
           <a:p>
-            <a:pPr lvl="1" marL="378148" indent="-162063" defTabSz="216084">
+            <a:pPr marL="378148" lvl="1" indent="-162063" defTabSz="216084">
               <a:spcBef>
                 <a:spcPts val="300"/>
               </a:spcBef>
@@ -4396,7 +4548,7 @@
             </a:r>
           </a:p>
           <a:p>
-            <a:pPr lvl="1" marL="378148" indent="-162063" defTabSz="216084">
+            <a:pPr marL="378148" lvl="1" indent="-162063" defTabSz="216084">
               <a:spcBef>
                 <a:spcPts val="300"/>
               </a:spcBef>
@@ -4412,7 +4564,7 @@
             </a:r>
           </a:p>
           <a:p>
-            <a:pPr lvl="2" marL="594232" indent="-162063" defTabSz="216084">
+            <a:pPr marL="594232" lvl="2" indent="-162063" defTabSz="216084">
               <a:spcBef>
                 <a:spcPts val="300"/>
               </a:spcBef>
@@ -4423,7 +4575,7 @@
             </a:r>
           </a:p>
           <a:p>
-            <a:pPr lvl="2" marL="594232" indent="-162063" defTabSz="216084">
+            <a:pPr marL="594232" lvl="2" indent="-162063" defTabSz="216084">
               <a:spcBef>
                 <a:spcPts val="300"/>
               </a:spcBef>
@@ -4444,9 +4596,7 @@
           <p:nvPr/>
         </p:nvPicPr>
         <p:blipFill>
-          <a:blip r:embed="rId2">
-            <a:extLst/>
-          </a:blip>
+          <a:blip r:embed="rId2"/>
           <a:stretch>
             <a:fillRect/>
           </a:stretch>
@@ -4473,9 +4623,7 @@
           <p:nvPr/>
         </p:nvPicPr>
         <p:blipFill>
-          <a:blip r:embed="rId3">
-            <a:extLst/>
-          </a:blip>
+          <a:blip r:embed="rId3"/>
           <a:stretch>
             <a:fillRect/>
           </a:stretch>
@@ -4498,12 +4646,12 @@
   <p:clrMapOvr>
     <a:masterClrMapping/>
   </p:clrMapOvr>
-  <p:transition xmlns:p14="http://schemas.microsoft.com/office/powerpoint/2010/main" spd="med" advClick="1"/>
+  <p:transition spd="med"/>
 </p:sld>
 </file>
 
 <file path=ppt/slides/slide11.xml><?xml version="1.0" encoding="utf-8"?>
-<p:sld xmlns:a="http://schemas.openxmlformats.org/drawingml/2006/main" xmlns:r="http://schemas.openxmlformats.org/officeDocument/2006/relationships" xmlns:p="http://schemas.openxmlformats.org/presentationml/2006/main" xmlns:m="http://schemas.openxmlformats.org/officeDocument/2006/math" xmlns:a14="http://schemas.microsoft.com/office/drawing/2010/main" showMasterSp="1" showMasterPhAnim="1">
+<p:sld xmlns:a="http://schemas.openxmlformats.org/drawingml/2006/main" xmlns:r="http://schemas.openxmlformats.org/officeDocument/2006/relationships" xmlns:p="http://schemas.openxmlformats.org/presentationml/2006/main">
   <p:cSld>
     <p:spTree>
       <p:nvGrpSpPr>
@@ -4522,7 +4670,9 @@
       <p:sp>
         <p:nvSpPr>
           <p:cNvPr id="177" name="Predicting a Business’ Star in Yelp from Its Reviews’ Text Alone; Mingming Fan &amp; Maryam Khademi (2014)"/>
-          <p:cNvSpPr txBox="1"/>
+          <p:cNvSpPr txBox="1">
+            <a:spLocks noGrp="1"/>
+          </p:cNvSpPr>
           <p:nvPr>
             <p:ph type="title"/>
           </p:nvPr>
@@ -4556,7 +4706,9 @@
       <p:sp>
         <p:nvSpPr>
           <p:cNvPr id="178" name="Feature Selection:…"/>
-          <p:cNvSpPr txBox="1"/>
+          <p:cNvSpPr txBox="1">
+            <a:spLocks noGrp="1"/>
+          </p:cNvSpPr>
           <p:nvPr>
             <p:ph type="body" sz="quarter" idx="1"/>
           </p:nvPr>
@@ -4581,15 +4733,16 @@
               <a:defRPr sz="1104"/>
             </a:pPr>
             <a:r>
-              <a:rPr b="1"/>
+              <a:rPr b="1" dirty="0"/>
               <a:t>Feature Selection:</a:t>
             </a:r>
             <a:r>
+              <a:rPr dirty="0"/>
               <a:t> </a:t>
             </a:r>
           </a:p>
           <a:p>
-            <a:pPr lvl="1" marL="276108" indent="-118332" defTabSz="157775">
+            <a:pPr marL="276108" lvl="1" indent="-118332" defTabSz="157775">
               <a:spcBef>
                 <a:spcPts val="200"/>
               </a:spcBef>
@@ -4597,11 +4750,12 @@
               <a:defRPr sz="1104"/>
             </a:pPr>
             <a:r>
+              <a:rPr dirty="0"/>
               <a:t>BOW — top K frequency words</a:t>
             </a:r>
           </a:p>
           <a:p>
-            <a:pPr lvl="1" marL="276108" indent="-118332" defTabSz="157775">
+            <a:pPr marL="276108" lvl="1" indent="-118332" defTabSz="157775">
               <a:spcBef>
                 <a:spcPts val="200"/>
               </a:spcBef>
@@ -4609,51 +4763,55 @@
               <a:defRPr sz="1104"/>
             </a:pPr>
             <a:r>
+              <a:rPr dirty="0"/>
               <a:t>3 feature vectors: </a:t>
             </a:r>
           </a:p>
           <a:p>
-            <a:pPr lvl="2" marL="433884" indent="-118332" defTabSz="157775">
+            <a:pPr marL="433884" lvl="2" indent="-118332" defTabSz="157775">
               <a:spcBef>
                 <a:spcPts val="200"/>
               </a:spcBef>
               <a:defRPr sz="1104"/>
             </a:pPr>
             <a:r>
-              <a:rPr b="1"/>
+              <a:rPr b="1" dirty="0"/>
               <a:t>baseline:</a:t>
             </a:r>
             <a:r>
+              <a:rPr dirty="0"/>
               <a:t> raw data of the top K frequent words in all the reviews</a:t>
             </a:r>
           </a:p>
           <a:p>
-            <a:pPr lvl="2" marL="433884" indent="-118332" defTabSz="157775">
+            <a:pPr marL="433884" lvl="2" indent="-118332" defTabSz="157775">
               <a:spcBef>
                 <a:spcPts val="200"/>
               </a:spcBef>
               <a:defRPr sz="1104"/>
             </a:pPr>
             <a:r>
-              <a:rPr b="1"/>
+              <a:rPr b="1" dirty="0"/>
               <a:t>feature engineering I:</a:t>
             </a:r>
             <a:r>
+              <a:rPr dirty="0"/>
               <a:t> POS analysis per sentence, top K words</a:t>
             </a:r>
           </a:p>
           <a:p>
-            <a:pPr lvl="2" marL="433884" indent="-118332" defTabSz="157775">
+            <a:pPr marL="433884" lvl="2" indent="-118332" defTabSz="157775">
               <a:spcBef>
                 <a:spcPts val="200"/>
               </a:spcBef>
               <a:defRPr sz="1104"/>
             </a:pPr>
             <a:r>
-              <a:rPr b="1"/>
+              <a:rPr b="1" dirty="0"/>
               <a:t>feature engineering II: </a:t>
             </a:r>
             <a:r>
+              <a:rPr dirty="0"/>
               <a:t>K frequent adjectives</a:t>
             </a:r>
           </a:p>
@@ -4665,13 +4823,15 @@
               <a:defRPr sz="1104"/>
             </a:pPr>
             <a:r>
+              <a:rPr dirty="0"/>
               <a:t>Predicting star rating as a </a:t>
             </a:r>
             <a:r>
-              <a:rPr b="1"/>
+              <a:rPr b="1" dirty="0"/>
               <a:t>regression</a:t>
             </a:r>
             <a:r>
+              <a:rPr dirty="0"/>
               <a:t> task </a:t>
             </a:r>
           </a:p>
@@ -4683,6 +4843,7 @@
               <a:defRPr sz="1104"/>
             </a:pPr>
             <a:r>
+              <a:rPr dirty="0"/>
               <a:t>Would try to generalize the model in the future by using other business categories (e.g., fashion, beauty) that are not restaurants.</a:t>
             </a:r>
           </a:p>
@@ -4697,9 +4858,7 @@
           <p:nvPr/>
         </p:nvPicPr>
         <p:blipFill>
-          <a:blip r:embed="rId2">
-            <a:extLst/>
-          </a:blip>
+          <a:blip r:embed="rId2"/>
           <a:stretch>
             <a:fillRect/>
           </a:stretch>
@@ -4726,9 +4885,7 @@
           <p:nvPr/>
         </p:nvPicPr>
         <p:blipFill>
-          <a:blip r:embed="rId3">
-            <a:extLst/>
-          </a:blip>
+          <a:blip r:embed="rId3"/>
           <a:stretch>
             <a:fillRect/>
           </a:stretch>
@@ -4755,9 +4912,7 @@
           <p:nvPr/>
         </p:nvPicPr>
         <p:blipFill>
-          <a:blip r:embed="rId4">
-            <a:extLst/>
-          </a:blip>
+          <a:blip r:embed="rId4"/>
           <a:stretch>
             <a:fillRect/>
           </a:stretch>
@@ -4784,9 +4939,7 @@
           <p:nvPr/>
         </p:nvPicPr>
         <p:blipFill>
-          <a:blip r:embed="rId5">
-            <a:extLst/>
-          </a:blip>
+          <a:blip r:embed="rId5"/>
           <a:stretch>
             <a:fillRect/>
           </a:stretch>
@@ -4809,12 +4962,12 @@
   <p:clrMapOvr>
     <a:masterClrMapping/>
   </p:clrMapOvr>
-  <p:transition xmlns:p14="http://schemas.microsoft.com/office/powerpoint/2010/main" spd="med" advClick="1"/>
+  <p:transition spd="med"/>
 </p:sld>
 </file>
 
 <file path=ppt/slides/slide12.xml><?xml version="1.0" encoding="utf-8"?>
-<p:sld xmlns:a="http://schemas.openxmlformats.org/drawingml/2006/main" xmlns:r="http://schemas.openxmlformats.org/officeDocument/2006/relationships" xmlns:p="http://schemas.openxmlformats.org/presentationml/2006/main" xmlns:m="http://schemas.openxmlformats.org/officeDocument/2006/math" xmlns:a14="http://schemas.microsoft.com/office/drawing/2010/main" showMasterSp="1" showMasterPhAnim="1">
+<p:sld xmlns:a="http://schemas.openxmlformats.org/drawingml/2006/main" xmlns:r="http://schemas.openxmlformats.org/officeDocument/2006/relationships" xmlns:p="http://schemas.openxmlformats.org/presentationml/2006/main">
   <p:cSld>
     <p:spTree>
       <p:nvGrpSpPr>
@@ -4833,7 +4986,9 @@
       <p:sp>
         <p:nvSpPr>
           <p:cNvPr id="184" name="Yelp Dataset Challenge: Review Rating Prediction; Nabiha Asghar (2016)"/>
-          <p:cNvSpPr txBox="1"/>
+          <p:cNvSpPr txBox="1">
+            <a:spLocks noGrp="1"/>
+          </p:cNvSpPr>
           <p:nvPr>
             <p:ph type="title"/>
           </p:nvPr>
@@ -4851,10 +5006,11 @@
               <a:defRPr sz="2565"/>
             </a:pPr>
             <a:r>
+              <a:rPr dirty="0"/>
               <a:t>Yelp Dataset Challenge: Review Rating Prediction; </a:t>
             </a:r>
             <a:r>
-              <a:rPr b="0"/>
+              <a:rPr b="0" dirty="0"/>
               <a:t>Nabiha Asghar (2016)</a:t>
             </a:r>
           </a:p>
@@ -4863,7 +5019,9 @@
       <p:sp>
         <p:nvSpPr>
           <p:cNvPr id="185" name="Preprocessing: removed capitalizations, stop words and punctuations…"/>
-          <p:cNvSpPr txBox="1"/>
+          <p:cNvSpPr txBox="1">
+            <a:spLocks noGrp="1"/>
+          </p:cNvSpPr>
           <p:nvPr>
             <p:ph type="body" sz="half" idx="1"/>
           </p:nvPr>
@@ -4888,10 +5046,11 @@
               <a:defRPr sz="1200"/>
             </a:pPr>
             <a:r>
-              <a:rPr b="1"/>
+              <a:rPr b="1" dirty="0"/>
               <a:t>Preprocessing</a:t>
             </a:r>
             <a:r>
+              <a:rPr dirty="0"/>
               <a:t>: removed capitalizations, stop words and punctuations </a:t>
             </a:r>
           </a:p>
@@ -4903,15 +5062,16 @@
               <a:defRPr sz="1200"/>
             </a:pPr>
             <a:r>
-              <a:rPr b="1"/>
+              <a:rPr b="1" dirty="0"/>
               <a:t>Feature Extraction</a:t>
             </a:r>
             <a:r>
+              <a:rPr dirty="0"/>
               <a:t>: feature vector for each review from four different methods:</a:t>
             </a:r>
           </a:p>
           <a:p>
-            <a:pPr lvl="1" marL="300117" indent="-128621" defTabSz="171495">
+            <a:pPr marL="300117" lvl="1" indent="-128621" defTabSz="171495">
               <a:spcBef>
                 <a:spcPts val="200"/>
               </a:spcBef>
@@ -4919,11 +5079,12 @@
               <a:defRPr sz="1200"/>
             </a:pPr>
             <a:r>
+              <a:rPr dirty="0"/>
               <a:t>Unigrams (BOW)</a:t>
             </a:r>
           </a:p>
           <a:p>
-            <a:pPr lvl="1" marL="300117" indent="-128621" defTabSz="171495">
+            <a:pPr marL="300117" lvl="1" indent="-128621" defTabSz="171495">
               <a:spcBef>
                 <a:spcPts val="200"/>
               </a:spcBef>
@@ -4931,11 +5092,12 @@
               <a:defRPr sz="1200"/>
             </a:pPr>
             <a:r>
+              <a:rPr dirty="0"/>
               <a:t>Unigrams &amp; Bigrams</a:t>
             </a:r>
           </a:p>
           <a:p>
-            <a:pPr lvl="1" marL="300117" indent="-128621" defTabSz="171495">
+            <a:pPr marL="300117" lvl="1" indent="-128621" defTabSz="171495">
               <a:spcBef>
                 <a:spcPts val="200"/>
               </a:spcBef>
@@ -4943,11 +5105,12 @@
               <a:defRPr sz="1200"/>
             </a:pPr>
             <a:r>
+              <a:rPr dirty="0"/>
               <a:t>Unigrams, Bigrams, &amp; Trigrams</a:t>
             </a:r>
           </a:p>
           <a:p>
-            <a:pPr lvl="1" marL="300117" indent="-128621" defTabSz="171495">
+            <a:pPr marL="300117" lvl="1" indent="-128621" defTabSz="171495">
               <a:spcBef>
                 <a:spcPts val="200"/>
               </a:spcBef>
@@ -4955,28 +5118,31 @@
               <a:defRPr sz="1200"/>
             </a:pPr>
             <a:r>
+              <a:rPr dirty="0"/>
               <a:t>LSI </a:t>
             </a:r>
           </a:p>
           <a:p>
-            <a:pPr lvl="2" marL="471613" indent="-128621" defTabSz="171495">
+            <a:pPr marL="471613" lvl="2" indent="-128621" defTabSz="171495">
               <a:spcBef>
                 <a:spcPts val="200"/>
               </a:spcBef>
               <a:defRPr sz="1200"/>
             </a:pPr>
             <a:r>
+              <a:rPr dirty="0"/>
               <a:t>By default, t = the size of vocabulary </a:t>
             </a:r>
           </a:p>
           <a:p>
-            <a:pPr lvl="2" marL="471613" indent="-128621" defTabSz="171495">
+            <a:pPr marL="471613" lvl="2" indent="-128621" defTabSz="171495">
               <a:spcBef>
                 <a:spcPts val="200"/>
               </a:spcBef>
               <a:defRPr sz="1200"/>
             </a:pPr>
             <a:r>
+              <a:rPr dirty="0"/>
               <a:t>first t*  topics can be chosen as the most important ones, and thus the top t* rows of V can be used as the feature matrix</a:t>
             </a:r>
           </a:p>
@@ -4985,81 +5151,87 @@
               <a:spcBef>
                 <a:spcPts val="200"/>
               </a:spcBef>
-              <a:defRPr b="1" sz="1200"/>
-            </a:pPr>
-            <a:r>
+              <a:defRPr sz="1200" b="1"/>
+            </a:pPr>
+            <a:r>
+              <a:rPr dirty="0"/>
               <a:t>ML Models: </a:t>
             </a:r>
-            <a:endParaRPr b="0"/>
-          </a:p>
-          <a:p>
-            <a:pPr lvl="1" marL="300117" indent="-128621" defTabSz="171495">
+            <a:endParaRPr b="0" dirty="0"/>
+          </a:p>
+          <a:p>
+            <a:pPr marL="300117" lvl="1" indent="-128621" defTabSz="171495">
               <a:spcBef>
                 <a:spcPts val="200"/>
               </a:spcBef>
               <a:buChar char="•"/>
-              <a:defRPr b="1" sz="1200"/>
-            </a:pPr>
-            <a:r>
-              <a:rPr b="0"/>
+              <a:defRPr sz="1200" b="1"/>
+            </a:pPr>
+            <a:r>
+              <a:rPr b="0" dirty="0"/>
               <a:t>Logistic Regression</a:t>
             </a:r>
-            <a:endParaRPr b="0"/>
-          </a:p>
-          <a:p>
-            <a:pPr lvl="1" marL="300117" indent="-128621" defTabSz="171495">
+          </a:p>
+          <a:p>
+            <a:pPr marL="300117" lvl="1" indent="-128621" defTabSz="171495">
               <a:spcBef>
                 <a:spcPts val="200"/>
               </a:spcBef>
               <a:buChar char="•"/>
-              <a:defRPr b="1" sz="1200"/>
-            </a:pPr>
-            <a:r>
-              <a:rPr b="0"/>
+              <a:defRPr sz="1200" b="1"/>
+            </a:pPr>
+            <a:r>
+              <a:rPr b="0" dirty="0"/>
               <a:t>Multinomial Naive Bayes </a:t>
             </a:r>
-            <a:endParaRPr b="0"/>
-          </a:p>
-          <a:p>
-            <a:pPr lvl="1" marL="300117" indent="-128621" defTabSz="171495">
+          </a:p>
+          <a:p>
+            <a:pPr marL="300117" lvl="1" indent="-128621" defTabSz="171495">
               <a:spcBef>
                 <a:spcPts val="200"/>
               </a:spcBef>
               <a:buChar char="•"/>
-              <a:defRPr b="1" sz="1200"/>
-            </a:pPr>
-            <a:r>
-              <a:rPr b="0"/>
-              <a:t>Perceptron (n_iterations = 50) </a:t>
-            </a:r>
-            <a:endParaRPr b="0"/>
-          </a:p>
-          <a:p>
-            <a:pPr lvl="1" marL="300117" indent="-128621" defTabSz="171495">
+              <a:defRPr sz="1200" b="1"/>
+            </a:pPr>
+            <a:r>
+              <a:rPr b="0" dirty="0"/>
+              <a:t>Perceptron (</a:t>
+            </a:r>
+            <a:r>
+              <a:rPr b="0" dirty="0" err="1"/>
+              <a:t>n_iterations</a:t>
+            </a:r>
+            <a:r>
+              <a:rPr b="0" dirty="0"/>
+              <a:t> = 50) </a:t>
+            </a:r>
+          </a:p>
+          <a:p>
+            <a:pPr marL="300117" lvl="1" indent="-128621" defTabSz="171495">
               <a:spcBef>
                 <a:spcPts val="200"/>
               </a:spcBef>
               <a:buChar char="•"/>
-              <a:defRPr b="1" sz="1200"/>
-            </a:pPr>
-            <a:r>
-              <a:rPr b="0"/>
+              <a:defRPr sz="1200" b="1"/>
+            </a:pPr>
+            <a:r>
+              <a:rPr b="0" dirty="0"/>
               <a:t>SVM (linear, tolerance = 0.001) </a:t>
             </a:r>
-            <a:endParaRPr b="0"/>
           </a:p>
           <a:p>
             <a:pPr marL="128621" indent="-128621" defTabSz="171495">
               <a:spcBef>
                 <a:spcPts val="200"/>
               </a:spcBef>
-              <a:defRPr b="1" sz="1200"/>
-            </a:pPr>
-            <a:r>
+              <a:defRPr sz="1200" b="1"/>
+            </a:pPr>
+            <a:r>
+              <a:rPr dirty="0"/>
               <a:t>Results:</a:t>
             </a:r>
             <a:r>
-              <a:rPr b="0"/>
+              <a:rPr b="0" dirty="0"/>
               <a:t> Logistic Regression achieved the highest accuracy of 64% using the top 10,000 Unigrams &amp; Bigrams as features, followed very closely by Linear SVC which achieved 63% accuracy using the top 10,000 Unigrams &amp; Bigrams.</a:t>
             </a:r>
           </a:p>
@@ -5074,17 +5246,15 @@
           <p:nvPr/>
         </p:nvPicPr>
         <p:blipFill>
-          <a:blip r:embed="rId2">
-            <a:extLst/>
-          </a:blip>
+          <a:blip r:embed="rId2"/>
           <a:stretch>
             <a:fillRect/>
           </a:stretch>
         </p:blipFill>
         <p:spPr>
           <a:xfrm>
-            <a:off x="5763510" y="1103823"/>
-            <a:ext cx="2479882" cy="2254438"/>
+            <a:off x="6055610" y="781252"/>
+            <a:ext cx="2311813" cy="2101648"/>
           </a:xfrm>
           <a:prstGeom prst="rect">
             <a:avLst/>
@@ -5103,8 +5273,45 @@
           <p:nvPr/>
         </p:nvPicPr>
         <p:blipFill>
-          <a:blip r:embed="rId3">
-            <a:extLst/>
+          <a:blip r:embed="rId3"/>
+          <a:stretch>
+            <a:fillRect/>
+          </a:stretch>
+        </p:blipFill>
+        <p:spPr>
+          <a:xfrm>
+            <a:off x="5254726" y="3578509"/>
+            <a:ext cx="3497451" cy="1976821"/>
+          </a:xfrm>
+          <a:prstGeom prst="rect">
+            <a:avLst/>
+          </a:prstGeom>
+          <a:ln w="12700">
+            <a:miter lim="400000"/>
+          </a:ln>
+        </p:spPr>
+      </p:pic>
+      <p:pic>
+        <p:nvPicPr>
+          <p:cNvPr id="5" name="Picture 4" descr="A graph of different colored lines&#10;&#10;AI-generated content may be incorrect.">
+            <a:extLst>
+              <a:ext uri="{FF2B5EF4-FFF2-40B4-BE49-F238E27FC236}">
+                <a16:creationId xmlns:a16="http://schemas.microsoft.com/office/drawing/2014/main" id="{A13CFE93-BEA9-57EA-D5C4-1E45F745D5B6}"/>
+              </a:ext>
+            </a:extLst>
+          </p:cNvPr>
+          <p:cNvPicPr>
+            <a:picLocks noChangeAspect="1"/>
+          </p:cNvPicPr>
+          <p:nvPr/>
+        </p:nvPicPr>
+        <p:blipFill>
+          <a:blip r:embed="rId4">
+            <a:extLst>
+              <a:ext uri="{28A0092B-C50C-407E-A947-70E740481C1C}">
+                <a14:useLocalDpi xmlns:a14="http://schemas.microsoft.com/office/drawing/2010/main" val="0"/>
+              </a:ext>
+            </a:extLst>
           </a:blip>
           <a:stretch>
             <a:fillRect/>
@@ -5112,15 +5319,12 @@
         </p:blipFill>
         <p:spPr>
           <a:xfrm>
-            <a:off x="5254726" y="3578509"/>
-            <a:ext cx="3497451" cy="1976821"/>
+            <a:off x="5343684" y="2814379"/>
+            <a:ext cx="3319533" cy="2939848"/>
           </a:xfrm>
           <a:prstGeom prst="rect">
             <a:avLst/>
           </a:prstGeom>
-          <a:ln w="12700">
-            <a:miter lim="400000"/>
-          </a:ln>
         </p:spPr>
       </p:pic>
     </p:spTree>
@@ -5128,12 +5332,12 @@
   <p:clrMapOvr>
     <a:masterClrMapping/>
   </p:clrMapOvr>
-  <p:transition xmlns:p14="http://schemas.microsoft.com/office/powerpoint/2010/main" spd="med" advClick="1"/>
+  <p:transition spd="med"/>
 </p:sld>
 </file>
 
 <file path=ppt/slides/slide13.xml><?xml version="1.0" encoding="utf-8"?>
-<p:sld xmlns:a="http://schemas.openxmlformats.org/drawingml/2006/main" xmlns:r="http://schemas.openxmlformats.org/officeDocument/2006/relationships" xmlns:p="http://schemas.openxmlformats.org/presentationml/2006/main" xmlns:m="http://schemas.openxmlformats.org/officeDocument/2006/math" xmlns:a14="http://schemas.microsoft.com/office/drawing/2010/main" showMasterSp="1" showMasterPhAnim="1">
+<p:sld xmlns:a="http://schemas.openxmlformats.org/drawingml/2006/main" xmlns:r="http://schemas.openxmlformats.org/officeDocument/2006/relationships" xmlns:p="http://schemas.openxmlformats.org/presentationml/2006/main">
   <p:cSld>
     <p:spTree>
       <p:nvGrpSpPr>
@@ -5152,7 +5356,9 @@
       <p:sp>
         <p:nvSpPr>
           <p:cNvPr id="189" name="Sentiment Analysis: A Systematic Case Study with Yelp Scores; Wenping Wang et al. (2023)"/>
-          <p:cNvSpPr txBox="1"/>
+          <p:cNvSpPr txBox="1">
+            <a:spLocks noGrp="1"/>
+          </p:cNvSpPr>
           <p:nvPr>
             <p:ph type="title"/>
           </p:nvPr>
@@ -5186,7 +5392,9 @@
       <p:sp>
         <p:nvSpPr>
           <p:cNvPr id="190" name="Feature Extraction/Engineering:…"/>
-          <p:cNvSpPr txBox="1"/>
+          <p:cNvSpPr txBox="1">
+            <a:spLocks noGrp="1"/>
+          </p:cNvSpPr>
           <p:nvPr>
             <p:ph type="body" sz="half" idx="1"/>
           </p:nvPr>
@@ -5208,14 +5416,14 @@
               <a:spcBef>
                 <a:spcPts val="200"/>
               </a:spcBef>
-              <a:defRPr b="1" sz="1079"/>
+              <a:defRPr sz="1079" b="1"/>
             </a:pPr>
             <a:r>
               <a:t>Feature Extraction/Engineering:</a:t>
             </a:r>
           </a:p>
           <a:p>
-            <a:pPr lvl="1" marL="270105" indent="-115759" defTabSz="154345">
+            <a:pPr marL="270105" lvl="1" indent="-115759" defTabSz="154345">
               <a:spcBef>
                 <a:spcPts val="200"/>
               </a:spcBef>
@@ -5227,7 +5435,7 @@
             </a:r>
           </a:p>
           <a:p>
-            <a:pPr lvl="1" marL="270105" indent="-115759" defTabSz="154345">
+            <a:pPr marL="270105" lvl="1" indent="-115759" defTabSz="154345">
               <a:spcBef>
                 <a:spcPts val="200"/>
               </a:spcBef>
@@ -5243,19 +5451,19 @@
               <a:spcBef>
                 <a:spcPts val="200"/>
               </a:spcBef>
-              <a:defRPr b="1" sz="1079"/>
+              <a:defRPr sz="1079" b="1"/>
             </a:pPr>
             <a:r>
               <a:t>ML Models: </a:t>
             </a:r>
           </a:p>
           <a:p>
-            <a:pPr lvl="1" marL="270105" indent="-115759" defTabSz="154345">
+            <a:pPr marL="270105" lvl="1" indent="-115759" defTabSz="154345">
               <a:spcBef>
                 <a:spcPts val="200"/>
               </a:spcBef>
               <a:buChar char="•"/>
-              <a:defRPr b="1" sz="1079"/>
+              <a:defRPr sz="1079" b="1"/>
             </a:pPr>
             <a:r>
               <a:t>Logistic Regression</a:t>
@@ -5264,53 +5472,51 @@
               <a:rPr b="0"/>
               <a:t> with SGD I and SGD II</a:t>
             </a:r>
+          </a:p>
+          <a:p>
+            <a:pPr marL="270105" lvl="1" indent="-115759" defTabSz="154345">
+              <a:spcBef>
+                <a:spcPts val="200"/>
+              </a:spcBef>
+              <a:buChar char="•"/>
+              <a:defRPr sz="1079" b="1"/>
+            </a:pPr>
+            <a:r>
+              <a:t>Multinomial Naive Bayes</a:t>
+            </a:r>
             <a:endParaRPr b="0"/>
           </a:p>
           <a:p>
-            <a:pPr lvl="1" marL="270105" indent="-115759" defTabSz="154345">
+            <a:pPr marL="270105" lvl="1" indent="-115759" defTabSz="154345">
               <a:spcBef>
                 <a:spcPts val="200"/>
               </a:spcBef>
               <a:buChar char="•"/>
-              <a:defRPr b="1" sz="1079"/>
-            </a:pPr>
-            <a:r>
-              <a:t>Multinomial Naive Bayes</a:t>
-            </a:r>
-            <a:endParaRPr b="0"/>
-          </a:p>
-          <a:p>
-            <a:pPr lvl="1" marL="270105" indent="-115759" defTabSz="154345">
+              <a:defRPr sz="1079" b="1"/>
+            </a:pPr>
+            <a:r>
+              <a:t>Passive Aggressive </a:t>
+            </a:r>
+          </a:p>
+          <a:p>
+            <a:pPr marL="424452" lvl="2" indent="-115759" defTabSz="154345">
               <a:spcBef>
                 <a:spcPts val="200"/>
               </a:spcBef>
-              <a:buChar char="•"/>
-              <a:defRPr b="1" sz="1079"/>
-            </a:pPr>
-            <a:r>
-              <a:t>Passive Aggressive </a:t>
-            </a:r>
-          </a:p>
-          <a:p>
-            <a:pPr lvl="2" marL="424452" indent="-115759" defTabSz="154345">
-              <a:spcBef>
-                <a:spcPts val="200"/>
-              </a:spcBef>
-              <a:defRPr b="1" sz="1079"/>
+              <a:defRPr sz="1079" b="1"/>
             </a:pPr>
             <a:r>
               <a:rPr b="0"/>
               <a:t>Similar to SVM (maximizing the margin of the separating planes between the data points)</a:t>
             </a:r>
-            <a:endParaRPr b="0"/>
-          </a:p>
-          <a:p>
-            <a:pPr lvl="1" marL="270105" indent="-115759" defTabSz="154345">
+          </a:p>
+          <a:p>
+            <a:pPr marL="270105" lvl="1" indent="-115759" defTabSz="154345">
               <a:spcBef>
                 <a:spcPts val="200"/>
               </a:spcBef>
               <a:buChar char="•"/>
-              <a:defRPr b="1" sz="1079"/>
+              <a:defRPr sz="1079" b="1"/>
             </a:pPr>
             <a:r>
               <a:rPr b="0"/>
@@ -5330,28 +5536,26 @@
               <a:rPr b="0"/>
               <a:t>) with BERT </a:t>
             </a:r>
-            <a:endParaRPr b="0"/>
-          </a:p>
-          <a:p>
-            <a:pPr lvl="2" marL="424452" indent="-115759" defTabSz="154345">
+          </a:p>
+          <a:p>
+            <a:pPr marL="424452" lvl="2" indent="-115759" defTabSz="154345">
               <a:spcBef>
                 <a:spcPts val="200"/>
               </a:spcBef>
-              <a:defRPr b="1" sz="1079"/>
+              <a:defRPr sz="1079" b="1"/>
             </a:pPr>
             <a:r>
               <a:rPr b="0"/>
               <a:t>7 fully connected layers (768, 1024, 512, 512, 256, 64, 32, 5) </a:t>
             </a:r>
-            <a:endParaRPr b="0"/>
-          </a:p>
-          <a:p>
-            <a:pPr lvl="1" marL="270105" indent="-115759" defTabSz="154345">
+          </a:p>
+          <a:p>
+            <a:pPr marL="270105" lvl="1" indent="-115759" defTabSz="154345">
               <a:spcBef>
                 <a:spcPts val="200"/>
               </a:spcBef>
               <a:buChar char="•"/>
-              <a:defRPr b="1" sz="1079"/>
+              <a:defRPr sz="1079" b="1"/>
             </a:pPr>
             <a:r>
               <a:rPr b="0"/>
@@ -5371,28 +5575,26 @@
               <a:rPr b="0"/>
               <a:t> with BERT (+ other features)</a:t>
             </a:r>
-            <a:endParaRPr b="0"/>
-          </a:p>
-          <a:p>
-            <a:pPr lvl="2" marL="424452" indent="-115759" defTabSz="154345">
+          </a:p>
+          <a:p>
+            <a:pPr marL="424452" lvl="2" indent="-115759" defTabSz="154345">
               <a:spcBef>
                 <a:spcPts val="200"/>
               </a:spcBef>
-              <a:defRPr b="1" sz="1079"/>
+              <a:defRPr sz="1079" b="1"/>
             </a:pPr>
             <a:r>
               <a:rPr b="0"/>
               <a:t>Useful, funny, cool, positive, negative, nchars, nwords, sentiment score </a:t>
             </a:r>
-            <a:endParaRPr b="0"/>
-          </a:p>
-          <a:p>
-            <a:pPr lvl="1" marL="270105" indent="-115759" defTabSz="154345">
+          </a:p>
+          <a:p>
+            <a:pPr marL="270105" lvl="1" indent="-115759" defTabSz="154345">
               <a:spcBef>
                 <a:spcPts val="200"/>
               </a:spcBef>
               <a:buChar char="•"/>
-              <a:defRPr b="1" sz="1079"/>
+              <a:defRPr sz="1079" b="1"/>
             </a:pPr>
             <a:r>
               <a:rPr b="0"/>
@@ -5405,67 +5607,62 @@
               <a:rPr b="0"/>
               <a:t>) classifiers (combined using weighted voting):</a:t>
             </a:r>
-            <a:endParaRPr b="0"/>
-          </a:p>
-          <a:p>
-            <a:pPr lvl="2" marL="424452" indent="-115759" defTabSz="154345">
+          </a:p>
+          <a:p>
+            <a:pPr marL="424452" lvl="2" indent="-115759" defTabSz="154345">
               <a:spcBef>
                 <a:spcPts val="200"/>
               </a:spcBef>
-              <a:defRPr b="1" sz="1079"/>
+              <a:defRPr sz="1079" b="1"/>
             </a:pPr>
             <a:r>
               <a:rPr b="0"/>
               <a:t>Baseline models ensemble</a:t>
             </a:r>
-            <a:endParaRPr b="0"/>
-          </a:p>
-          <a:p>
-            <a:pPr lvl="2" marL="424452" indent="-115759" defTabSz="154345">
+          </a:p>
+          <a:p>
+            <a:pPr marL="424452" lvl="2" indent="-115759" defTabSz="154345">
               <a:spcBef>
                 <a:spcPts val="200"/>
               </a:spcBef>
-              <a:defRPr b="1" sz="1079"/>
+              <a:defRPr sz="1079" b="1"/>
             </a:pPr>
             <a:r>
               <a:rPr b="0"/>
               <a:t>Baseline models and shallow MLP </a:t>
             </a:r>
-            <a:endParaRPr b="0"/>
-          </a:p>
-          <a:p>
-            <a:pPr lvl="2" marL="424452" indent="-115759" defTabSz="154345">
+          </a:p>
+          <a:p>
+            <a:pPr marL="424452" lvl="2" indent="-115759" defTabSz="154345">
               <a:spcBef>
                 <a:spcPts val="200"/>
               </a:spcBef>
-              <a:defRPr b="1" sz="1079"/>
+              <a:defRPr sz="1079" b="1"/>
             </a:pPr>
             <a:r>
               <a:rPr b="0"/>
               <a:t>Baseline models and deep MLP</a:t>
             </a:r>
-            <a:endParaRPr b="0"/>
-          </a:p>
-          <a:p>
-            <a:pPr lvl="1" marL="270105" indent="-115759" defTabSz="154345">
+          </a:p>
+          <a:p>
+            <a:pPr marL="270105" lvl="1" indent="-115759" defTabSz="154345">
               <a:spcBef>
                 <a:spcPts val="200"/>
               </a:spcBef>
               <a:buChar char="•"/>
-              <a:defRPr b="1" sz="1079"/>
+              <a:defRPr sz="1079" b="1"/>
             </a:pPr>
             <a:r>
               <a:rPr b="0"/>
               <a:t>AdaBoost </a:t>
             </a:r>
-            <a:endParaRPr b="0"/>
           </a:p>
           <a:p>
             <a:pPr marL="115759" indent="-115759" defTabSz="154345">
               <a:spcBef>
                 <a:spcPts val="200"/>
               </a:spcBef>
-              <a:defRPr b="1" sz="1079"/>
+              <a:defRPr sz="1079" b="1"/>
             </a:pPr>
             <a:r>
               <a:rPr b="0"/>
@@ -5478,14 +5675,13 @@
               <a:rPr b="0"/>
               <a:t>.</a:t>
             </a:r>
-            <a:endParaRPr b="0"/>
           </a:p>
           <a:p>
             <a:pPr marL="115759" indent="-115759" defTabSz="154345">
               <a:spcBef>
                 <a:spcPts val="200"/>
               </a:spcBef>
-              <a:defRPr b="1" sz="1079"/>
+              <a:defRPr sz="1079" b="1"/>
             </a:pPr>
             <a:r>
               <a:rPr b="0"/>
@@ -5503,9 +5699,7 @@
           <p:nvPr/>
         </p:nvPicPr>
         <p:blipFill>
-          <a:blip r:embed="rId2">
-            <a:extLst/>
-          </a:blip>
+          <a:blip r:embed="rId2"/>
           <a:stretch>
             <a:fillRect/>
           </a:stretch>
@@ -5532,9 +5726,7 @@
           <p:nvPr/>
         </p:nvPicPr>
         <p:blipFill>
-          <a:blip r:embed="rId3">
-            <a:extLst/>
-          </a:blip>
+          <a:blip r:embed="rId3"/>
           <a:stretch>
             <a:fillRect/>
           </a:stretch>
@@ -5557,12 +5749,12 @@
   <p:clrMapOvr>
     <a:masterClrMapping/>
   </p:clrMapOvr>
-  <p:transition xmlns:p14="http://schemas.microsoft.com/office/powerpoint/2010/main" spd="med" advClick="1"/>
+  <p:transition spd="med"/>
 </p:sld>
 </file>
 
 <file path=ppt/slides/slide14.xml><?xml version="1.0" encoding="utf-8"?>
-<p:sld xmlns:a="http://schemas.openxmlformats.org/drawingml/2006/main" xmlns:r="http://schemas.openxmlformats.org/officeDocument/2006/relationships" xmlns:p="http://schemas.openxmlformats.org/presentationml/2006/main" xmlns:m="http://schemas.openxmlformats.org/officeDocument/2006/math" xmlns:a14="http://schemas.microsoft.com/office/drawing/2010/main" showMasterSp="1" showMasterPhAnim="1">
+<p:sld xmlns:a="http://schemas.openxmlformats.org/drawingml/2006/main" xmlns:r="http://schemas.openxmlformats.org/officeDocument/2006/relationships" xmlns:p="http://schemas.openxmlformats.org/presentationml/2006/main">
   <p:cSld>
     <p:spTree>
       <p:nvGrpSpPr>
@@ -5581,7 +5773,9 @@
       <p:sp>
         <p:nvSpPr>
           <p:cNvPr id="194" name="Title 1"/>
-          <p:cNvSpPr txBox="1"/>
+          <p:cNvSpPr txBox="1">
+            <a:spLocks noGrp="1"/>
+          </p:cNvSpPr>
           <p:nvPr>
             <p:ph type="title"/>
           </p:nvPr>
@@ -5599,7 +5793,6 @@
           <a:bodyPr/>
           <a:lstStyle/>
           <a:p>
-            <a:pPr/>
             <a:r>
               <a:t>Review of Findings</a:t>
             </a:r>
@@ -5609,7 +5802,9 @@
       <p:sp>
         <p:nvSpPr>
           <p:cNvPr id="195" name="Content Placeholder 2"/>
-          <p:cNvSpPr txBox="1"/>
+          <p:cNvSpPr txBox="1">
+            <a:spLocks noGrp="1"/>
+          </p:cNvSpPr>
           <p:nvPr>
             <p:ph type="body" idx="1"/>
           </p:nvPr>
@@ -5634,13 +5829,15 @@
               <a:defRPr sz="1871"/>
             </a:pPr>
             <a:r>
+              <a:rPr dirty="0"/>
               <a:t>Binary sentiment models (Naive Bayes, Random Forest) good at </a:t>
             </a:r>
             <a:r>
-              <a:rPr b="1"/>
+              <a:rPr b="1" dirty="0"/>
               <a:t>positive/negative</a:t>
             </a:r>
             <a:r>
+              <a:rPr dirty="0"/>
               <a:t> </a:t>
             </a:r>
           </a:p>
@@ -5652,13 +5849,15 @@
               <a:defRPr sz="1871"/>
             </a:pPr>
             <a:r>
+              <a:rPr dirty="0"/>
               <a:t>Multi-class and regression models (Logistic/SVM, Linear Regression) weaker for all 5 star ratings (</a:t>
             </a:r>
             <a:r>
-              <a:rPr b="1"/>
+              <a:rPr b="1" dirty="0"/>
               <a:t>accuracy ≤ 65%</a:t>
             </a:r>
             <a:r>
+              <a:rPr dirty="0"/>
               <a:t>). </a:t>
             </a:r>
           </a:p>
@@ -5670,10 +5869,11 @@
               <a:defRPr sz="1871"/>
             </a:pPr>
             <a:r>
-              <a:rPr b="1"/>
+              <a:rPr b="1" dirty="0"/>
               <a:t>TF-IDF and n-gram</a:t>
             </a:r>
             <a:r>
+              <a:rPr dirty="0"/>
               <a:t> features are standard; context-sensitive embeddings (BERT) have emerged for fine-grained results. </a:t>
             </a:r>
           </a:p>
@@ -5685,13 +5885,15 @@
               <a:defRPr sz="1871"/>
             </a:pPr>
             <a:r>
+              <a:rPr dirty="0"/>
               <a:t>Lexicons help but struggle with </a:t>
             </a:r>
             <a:r>
-              <a:rPr b="1"/>
+              <a:rPr b="1" dirty="0"/>
               <a:t>slang, typos, noisy data; sarcasm</a:t>
             </a:r>
             <a:r>
+              <a:rPr dirty="0"/>
               <a:t> and nuanced language largely unsolved. </a:t>
             </a:r>
           </a:p>
@@ -5703,10 +5905,11 @@
               <a:defRPr sz="1871"/>
             </a:pPr>
             <a:r>
-              <a:rPr b="1"/>
+              <a:rPr b="1" dirty="0"/>
               <a:t>Ensemble methods</a:t>
             </a:r>
             <a:r>
+              <a:rPr dirty="0"/>
               <a:t> sometimes improve results; deep learning gaining ground, especially for multi-aspect analysis and context.</a:t>
             </a:r>
           </a:p>
@@ -5715,32 +5918,35 @@
               <a:spcBef>
                 <a:spcPts val="400"/>
               </a:spcBef>
-              <a:defRPr b="1" sz="1871"/>
-            </a:pPr>
-            <a:r>
+              <a:defRPr sz="1871" b="1"/>
+            </a:pPr>
+            <a:r>
+              <a:rPr dirty="0"/>
               <a:t>Trends observed:</a:t>
             </a:r>
           </a:p>
           <a:p>
-            <a:pPr lvl="1" marL="434741" indent="-167208" defTabSz="267532">
+            <a:pPr marL="434741" lvl="1" indent="-167208" defTabSz="267532">
               <a:spcBef>
                 <a:spcPts val="400"/>
               </a:spcBef>
               <a:defRPr sz="1871"/>
             </a:pPr>
             <a:r>
+              <a:rPr dirty="0"/>
               <a:t>More features ≠ better performance (can cause overfitting).</a:t>
             </a:r>
-            <a:endParaRPr sz="1637"/>
-          </a:p>
-          <a:p>
-            <a:pPr lvl="1" marL="434741" indent="-167208" defTabSz="267532">
+            <a:endParaRPr sz="1637" dirty="0"/>
+          </a:p>
+          <a:p>
+            <a:pPr marL="434741" lvl="1" indent="-167208" defTabSz="267532">
               <a:spcBef>
                 <a:spcPts val="400"/>
               </a:spcBef>
               <a:defRPr sz="1871"/>
             </a:pPr>
             <a:r>
+              <a:rPr dirty="0"/>
               <a:t>Simple &gt; Complex Models</a:t>
             </a:r>
           </a:p>
@@ -5751,12 +5957,12 @@
   <p:clrMapOvr>
     <a:masterClrMapping/>
   </p:clrMapOvr>
-  <p:transition xmlns:p14="http://schemas.microsoft.com/office/powerpoint/2010/main" spd="med" advClick="1"/>
+  <p:transition spd="med"/>
 </p:sld>
 </file>
 
 <file path=ppt/slides/slide15.xml><?xml version="1.0" encoding="utf-8"?>
-<p:sld xmlns:a="http://schemas.openxmlformats.org/drawingml/2006/main" xmlns:r="http://schemas.openxmlformats.org/officeDocument/2006/relationships" xmlns:p="http://schemas.openxmlformats.org/presentationml/2006/main" xmlns:m="http://schemas.openxmlformats.org/officeDocument/2006/math" xmlns:a14="http://schemas.microsoft.com/office/drawing/2010/main" showMasterSp="1" showMasterPhAnim="1">
+<p:sld xmlns:a="http://schemas.openxmlformats.org/drawingml/2006/main" xmlns:r="http://schemas.openxmlformats.org/officeDocument/2006/relationships" xmlns:p="http://schemas.openxmlformats.org/presentationml/2006/main">
   <p:cSld>
     <p:spTree>
       <p:nvGrpSpPr>
@@ -5775,7 +5981,9 @@
       <p:sp>
         <p:nvSpPr>
           <p:cNvPr id="197" name="Title 1"/>
-          <p:cNvSpPr txBox="1"/>
+          <p:cNvSpPr txBox="1">
+            <a:spLocks noGrp="1"/>
+          </p:cNvSpPr>
           <p:nvPr>
             <p:ph type="title"/>
           </p:nvPr>
@@ -5793,7 +6001,6 @@
           <a:bodyPr/>
           <a:lstStyle/>
           <a:p>
-            <a:pPr/>
             <a:r>
               <a:t>Interesting Findings</a:t>
             </a:r>
@@ -5803,7 +6010,9 @@
       <p:sp>
         <p:nvSpPr>
           <p:cNvPr id="198" name="Content Placeholder 2"/>
-          <p:cNvSpPr txBox="1"/>
+          <p:cNvSpPr txBox="1">
+            <a:spLocks noGrp="1"/>
+          </p:cNvSpPr>
           <p:nvPr>
             <p:ph type="body" idx="1"/>
           </p:nvPr>
@@ -5821,14 +6030,14 @@
           <a:bodyPr/>
           <a:lstStyle/>
           <a:p>
-            <a:pPr/>
-            <a:r>
+            <a:r>
+              <a:rPr dirty="0"/>
               <a:t>Standard preprocessing and Bag of Words are still strong baselines.</a:t>
             </a:r>
           </a:p>
           <a:p>
-            <a:pPr/>
-            <a:r>
+            <a:r>
+              <a:rPr dirty="0"/>
               <a:t>Too many features can hurt linear regression results; keep it simple when possible.</a:t>
             </a:r>
           </a:p>
@@ -5837,17 +6046,16 @@
               <a:defRPr b="1"/>
             </a:pPr>
             <a:r>
-              <a:rPr b="0"/>
+              <a:rPr b="0" dirty="0"/>
               <a:t>Context-aware models (e.g., BERT) for sarcasm, multi-aspect sentiment are promising.</a:t>
             </a:r>
-            <a:endParaRPr b="0"/>
           </a:p>
           <a:p>
             <a:pPr>
               <a:defRPr b="1"/>
             </a:pPr>
             <a:r>
-              <a:rPr b="0"/>
+              <a:rPr b="0" dirty="0"/>
               <a:t>Aspect-Based Sentiment Analysis worth trying.</a:t>
             </a:r>
           </a:p>
@@ -5858,12 +6066,12 @@
   <p:clrMapOvr>
     <a:masterClrMapping/>
   </p:clrMapOvr>
-  <p:transition xmlns:p14="http://schemas.microsoft.com/office/powerpoint/2010/main" spd="med" advClick="1"/>
+  <p:transition spd="med"/>
 </p:sld>
 </file>
 
 <file path=ppt/slides/slide16.xml><?xml version="1.0" encoding="utf-8"?>
-<p:sld xmlns:a="http://schemas.openxmlformats.org/drawingml/2006/main" xmlns:r="http://schemas.openxmlformats.org/officeDocument/2006/relationships" xmlns:p="http://schemas.openxmlformats.org/presentationml/2006/main" xmlns:m="http://schemas.openxmlformats.org/officeDocument/2006/math" xmlns:a14="http://schemas.microsoft.com/office/drawing/2010/main" showMasterSp="1" showMasterPhAnim="1">
+<p:sld xmlns:a="http://schemas.openxmlformats.org/drawingml/2006/main" xmlns:r="http://schemas.openxmlformats.org/officeDocument/2006/relationships" xmlns:p="http://schemas.openxmlformats.org/presentationml/2006/main">
   <p:cSld>
     <p:spTree>
       <p:nvGrpSpPr>
@@ -5882,7 +6090,9 @@
       <p:sp>
         <p:nvSpPr>
           <p:cNvPr id="200" name="Title 1"/>
-          <p:cNvSpPr txBox="1"/>
+          <p:cNvSpPr txBox="1">
+            <a:spLocks noGrp="1"/>
+          </p:cNvSpPr>
           <p:nvPr>
             <p:ph type="title"/>
           </p:nvPr>
@@ -5900,7 +6110,6 @@
           <a:bodyPr/>
           <a:lstStyle/>
           <a:p>
-            <a:pPr/>
             <a:r>
               <a:t>Challenges and Gaps</a:t>
             </a:r>
@@ -5910,7 +6119,9 @@
       <p:sp>
         <p:nvSpPr>
           <p:cNvPr id="201" name="Content Placeholder 2"/>
-          <p:cNvSpPr txBox="1"/>
+          <p:cNvSpPr txBox="1">
+            <a:spLocks noGrp="1"/>
+          </p:cNvSpPr>
           <p:nvPr>
             <p:ph type="body" idx="1"/>
           </p:nvPr>
@@ -5932,52 +6143,50 @@
               <a:defRPr b="1"/>
             </a:pPr>
             <a:r>
+              <a:rPr dirty="0"/>
               <a:t>Context &amp; Sarcasm:</a:t>
             </a:r>
             <a:r>
-              <a:rPr b="0"/>
+              <a:rPr b="0" dirty="0"/>
               <a:t> “Great job burning my pizza!” — an unsolved problem</a:t>
             </a:r>
-            <a:endParaRPr b="0"/>
           </a:p>
           <a:p>
             <a:pPr>
               <a:defRPr b="1"/>
             </a:pPr>
             <a:r>
+              <a:rPr dirty="0"/>
               <a:t>Lexicon mismatch:</a:t>
             </a:r>
             <a:r>
-              <a:rPr b="0"/>
+              <a:rPr b="0" dirty="0"/>
               <a:t> limited by real-world data noise, slang, and sarcasm</a:t>
             </a:r>
-            <a:endParaRPr b="0"/>
           </a:p>
           <a:p>
             <a:pPr>
               <a:defRPr b="1"/>
             </a:pPr>
             <a:r>
-              <a:t>***</a:t>
-            </a:r>
-            <a:r>
-              <a:t>Imbalanced data***:</a:t>
-            </a:r>
-            <a:r>
-              <a:rPr b="0"/>
+              <a:rPr dirty="0"/>
+              <a:t>***Imbalanced data***:</a:t>
+            </a:r>
+            <a:r>
+              <a:rPr b="0" dirty="0"/>
               <a:t> most reviews are 4 or 5 stars </a:t>
             </a:r>
-            <a:endParaRPr b="0"/>
           </a:p>
           <a:p>
             <a:pPr>
               <a:defRPr b="1"/>
             </a:pPr>
             <a:r>
+              <a:rPr dirty="0"/>
               <a:t>Explaining middle ratings: </a:t>
             </a:r>
             <a:r>
-              <a:rPr b="0"/>
+              <a:rPr b="0" dirty="0"/>
               <a:t>very difficult to discern between 2 &amp; 3 star ratings</a:t>
             </a:r>
           </a:p>
@@ -5988,12 +6197,12 @@
   <p:clrMapOvr>
     <a:masterClrMapping/>
   </p:clrMapOvr>
-  <p:transition xmlns:p14="http://schemas.microsoft.com/office/powerpoint/2010/main" spd="med" advClick="1"/>
+  <p:transition spd="med"/>
 </p:sld>
 </file>
 
 <file path=ppt/slides/slide17.xml><?xml version="1.0" encoding="utf-8"?>
-<p:sld xmlns:a="http://schemas.openxmlformats.org/drawingml/2006/main" xmlns:r="http://schemas.openxmlformats.org/officeDocument/2006/relationships" xmlns:p="http://schemas.openxmlformats.org/presentationml/2006/main" xmlns:m="http://schemas.openxmlformats.org/officeDocument/2006/math" xmlns:a14="http://schemas.microsoft.com/office/drawing/2010/main" showMasterSp="1" showMasterPhAnim="1">
+<p:sld xmlns:a="http://schemas.openxmlformats.org/drawingml/2006/main" xmlns:r="http://schemas.openxmlformats.org/officeDocument/2006/relationships" xmlns:p="http://schemas.openxmlformats.org/presentationml/2006/main">
   <p:cSld>
     <p:spTree>
       <p:nvGrpSpPr>
@@ -6012,7 +6221,9 @@
       <p:sp>
         <p:nvSpPr>
           <p:cNvPr id="203" name="Papers Read"/>
-          <p:cNvSpPr txBox="1"/>
+          <p:cNvSpPr txBox="1">
+            <a:spLocks noGrp="1"/>
+          </p:cNvSpPr>
           <p:nvPr>
             <p:ph type="title"/>
           </p:nvPr>
@@ -6026,7 +6237,6 @@
           <a:bodyPr/>
           <a:lstStyle/>
           <a:p>
-            <a:pPr/>
             <a:r>
               <a:t>Papers Read</a:t>
             </a:r>
@@ -6036,7 +6246,9 @@
       <p:sp>
         <p:nvSpPr>
           <p:cNvPr id="204" name="Sentiment Analysis on Product Reviews Using Machine Learning Techniques; Rajkumar S. Jagdale, Vishal S. Shirsat and Sachin N. Deshmuk…"/>
-          <p:cNvSpPr txBox="1"/>
+          <p:cNvSpPr txBox="1">
+            <a:spLocks noGrp="1"/>
+          </p:cNvSpPr>
           <p:nvPr>
             <p:ph type="body" idx="1"/>
           </p:nvPr>
@@ -6286,12 +6498,132 @@
   <p:clrMapOvr>
     <a:masterClrMapping/>
   </p:clrMapOvr>
-  <p:transition xmlns:p14="http://schemas.microsoft.com/office/powerpoint/2010/main" spd="med" advClick="1"/>
+  <p:transition spd="med"/>
 </p:sld>
 </file>
 
 <file path=ppt/slides/slide2.xml><?xml version="1.0" encoding="utf-8"?>
-<p:sld xmlns:a="http://schemas.openxmlformats.org/drawingml/2006/main" xmlns:r="http://schemas.openxmlformats.org/officeDocument/2006/relationships" xmlns:p="http://schemas.openxmlformats.org/presentationml/2006/main" xmlns:m="http://schemas.openxmlformats.org/officeDocument/2006/math" xmlns:a14="http://schemas.microsoft.com/office/drawing/2010/main" showMasterSp="1" showMasterPhAnim="1">
+<p:sld xmlns:a="http://schemas.openxmlformats.org/drawingml/2006/main" xmlns:r="http://schemas.openxmlformats.org/officeDocument/2006/relationships" xmlns:p="http://schemas.openxmlformats.org/presentationml/2006/main">
+  <p:cSld>
+    <p:spTree>
+      <p:nvGrpSpPr>
+        <p:cNvPr id="1" name=""/>
+        <p:cNvGrpSpPr/>
+        <p:nvPr/>
+      </p:nvGrpSpPr>
+      <p:grpSpPr>
+        <a:xfrm>
+          <a:off x="0" y="0"/>
+          <a:ext cx="0" cy="0"/>
+          <a:chOff x="0" y="0"/>
+          <a:chExt cx="0" cy="0"/>
+        </a:xfrm>
+      </p:grpSpPr>
+      <p:sp>
+        <p:nvSpPr>
+          <p:cNvPr id="2" name="Title 1">
+            <a:extLst>
+              <a:ext uri="{FF2B5EF4-FFF2-40B4-BE49-F238E27FC236}">
+                <a16:creationId xmlns:a16="http://schemas.microsoft.com/office/drawing/2014/main" id="{B39C8230-4EBB-92EE-B786-7745E3C1582B}"/>
+              </a:ext>
+            </a:extLst>
+          </p:cNvPr>
+          <p:cNvSpPr>
+            <a:spLocks noGrp="1"/>
+          </p:cNvSpPr>
+          <p:nvPr>
+            <p:ph type="title"/>
+          </p:nvPr>
+        </p:nvSpPr>
+        <p:spPr/>
+        <p:txBody>
+          <a:bodyPr/>
+          <a:lstStyle/>
+          <a:p>
+            <a:r>
+              <a:rPr lang="en-US" dirty="0"/>
+              <a:t>Outline</a:t>
+            </a:r>
+          </a:p>
+        </p:txBody>
+      </p:sp>
+      <p:sp>
+        <p:nvSpPr>
+          <p:cNvPr id="3" name="Text Placeholder 2">
+            <a:extLst>
+              <a:ext uri="{FF2B5EF4-FFF2-40B4-BE49-F238E27FC236}">
+                <a16:creationId xmlns:a16="http://schemas.microsoft.com/office/drawing/2014/main" id="{C6DA7F1A-EACD-226A-CA3C-9885974ACAA9}"/>
+              </a:ext>
+            </a:extLst>
+          </p:cNvPr>
+          <p:cNvSpPr>
+            <a:spLocks noGrp="1"/>
+          </p:cNvSpPr>
+          <p:nvPr>
+            <p:ph type="body" idx="1"/>
+          </p:nvPr>
+        </p:nvSpPr>
+        <p:spPr/>
+        <p:txBody>
+          <a:bodyPr/>
+          <a:lstStyle/>
+          <a:p>
+            <a:r>
+              <a:rPr lang="en-US" dirty="0"/>
+              <a:t>Background</a:t>
+            </a:r>
+          </a:p>
+          <a:p>
+            <a:pPr lvl="1"/>
+            <a:r>
+              <a:rPr lang="en-US" dirty="0"/>
+              <a:t>Research Directions</a:t>
+            </a:r>
+          </a:p>
+          <a:p>
+            <a:pPr lvl="1"/>
+            <a:r>
+              <a:rPr lang="en-US" dirty="0"/>
+              <a:t>Dataset</a:t>
+            </a:r>
+          </a:p>
+          <a:p>
+            <a:pPr lvl="1"/>
+            <a:r>
+              <a:rPr lang="en-US" dirty="0"/>
+              <a:t>Approaches</a:t>
+            </a:r>
+          </a:p>
+          <a:p>
+            <a:r>
+              <a:rPr lang="en-US" dirty="0"/>
+              <a:t>Selected Papers</a:t>
+            </a:r>
+          </a:p>
+          <a:p>
+            <a:r>
+              <a:rPr lang="en-US" dirty="0"/>
+              <a:t>Overall Summary</a:t>
+            </a:r>
+          </a:p>
+        </p:txBody>
+      </p:sp>
+    </p:spTree>
+    <p:extLst>
+      <p:ext uri="{BB962C8B-B14F-4D97-AF65-F5344CB8AC3E}">
+        <p14:creationId xmlns:p14="http://schemas.microsoft.com/office/powerpoint/2010/main" val="788509113"/>
+      </p:ext>
+    </p:extLst>
+  </p:cSld>
+  <p:clrMapOvr>
+    <a:masterClrMapping/>
+  </p:clrMapOvr>
+  <p:transition spd="med"/>
+</p:sld>
+</file>
+
+<file path=ppt/slides/slide3.xml><?xml version="1.0" encoding="utf-8"?>
+<p:sld xmlns:a="http://schemas.openxmlformats.org/drawingml/2006/main" xmlns:r="http://schemas.openxmlformats.org/officeDocument/2006/relationships" xmlns:p="http://schemas.openxmlformats.org/presentationml/2006/main">
   <p:cSld>
     <p:spTree>
       <p:nvGrpSpPr>
@@ -6310,7 +6642,9 @@
       <p:sp>
         <p:nvSpPr>
           <p:cNvPr id="143" name="Title 1"/>
-          <p:cNvSpPr txBox="1"/>
+          <p:cNvSpPr txBox="1">
+            <a:spLocks noGrp="1"/>
+          </p:cNvSpPr>
           <p:nvPr>
             <p:ph type="title"/>
           </p:nvPr>
@@ -6328,7 +6662,6 @@
           <a:bodyPr/>
           <a:lstStyle/>
           <a:p>
-            <a:pPr/>
             <a:r>
               <a:t>Background and Motivation</a:t>
             </a:r>
@@ -6338,7 +6671,9 @@
       <p:sp>
         <p:nvSpPr>
           <p:cNvPr id="144" name="Content Placeholder 2"/>
-          <p:cNvSpPr txBox="1"/>
+          <p:cNvSpPr txBox="1">
+            <a:spLocks noGrp="1"/>
+          </p:cNvSpPr>
           <p:nvPr>
             <p:ph type="body" sz="half" idx="1"/>
           </p:nvPr>
@@ -6360,6 +6695,7 @@
               <a:defRPr sz="1914"/>
             </a:pPr>
             <a:r>
+              <a:rPr dirty="0"/>
               <a:t>Online platforms like Yelp contain millions of reviews, but the link between text and star ratings is not straightforward. </a:t>
             </a:r>
           </a:p>
@@ -6368,14 +6704,17 @@
               <a:defRPr sz="1914"/>
             </a:pPr>
             <a:r>
-              <a:t>Automating star prediction helps users and businesses understand sentiment quickly, and researchers analyze which aspects most affect ratings. </a:t>
-            </a:r>
+              <a:rPr dirty="0"/>
+              <a:t>Automating star prediction helps users and businesses understand sentiment quickly</a:t>
+            </a:r>
+            <a:endParaRPr lang="en-US" dirty="0"/>
           </a:p>
           <a:p>
             <a:pPr marL="223802" indent="-223802" defTabSz="298402">
               <a:defRPr sz="1914"/>
             </a:pPr>
             <a:r>
+              <a:rPr dirty="0"/>
               <a:t>Literature shows high accuracy for binary sentiment, but more nuanced star prediction is difficult due to imbalanced data, reviewer subjectivity, and noisy language.</a:t>
             </a:r>
           </a:p>
@@ -6390,9 +6729,7 @@
           <p:nvPr/>
         </p:nvPicPr>
         <p:blipFill>
-          <a:blip r:embed="rId2">
-            <a:extLst/>
-          </a:blip>
+          <a:blip r:embed="rId2"/>
           <a:stretch>
             <a:fillRect/>
           </a:stretch>
@@ -6429,7 +6766,7 @@
           </a:ln>
           <a:extLst>
             <a:ext uri="{C572A759-6A51-4108-AA02-DFA0A04FC94B}">
-              <ma14:wrappingTextBoxFlag xmlns:ma14="http://schemas.microsoft.com/office/mac/drawingml/2011/main" val="1"/>
+              <ma14:wrappingTextBoxFlag xmlns="" xmlns:m="http://schemas.openxmlformats.org/officeDocument/2006/math" xmlns:a14="http://schemas.microsoft.com/office/drawing/2010/main" xmlns:ma14="http://schemas.microsoft.com/office/mac/drawingml/2011/main" val="1"/>
             </a:ext>
           </a:extLst>
         </p:spPr>
@@ -6448,7 +6785,6 @@
             </a:lvl1pPr>
           </a:lstStyle>
           <a:p>
-            <a:pPr/>
             <a:r>
               <a:t>Source: Yelp Dataset Challenge: Review Rating Prediction, Nabiha Asghar </a:t>
             </a:r>
@@ -6460,12 +6796,12 @@
   <p:clrMapOvr>
     <a:masterClrMapping/>
   </p:clrMapOvr>
-  <p:transition xmlns:p14="http://schemas.microsoft.com/office/powerpoint/2010/main" spd="med" advClick="1"/>
+  <p:transition spd="med"/>
 </p:sld>
 </file>
 
-<file path=ppt/slides/slide3.xml><?xml version="1.0" encoding="utf-8"?>
-<p:sld xmlns:a="http://schemas.openxmlformats.org/drawingml/2006/main" xmlns:r="http://schemas.openxmlformats.org/officeDocument/2006/relationships" xmlns:p="http://schemas.openxmlformats.org/presentationml/2006/main" xmlns:m="http://schemas.openxmlformats.org/officeDocument/2006/math" xmlns:a14="http://schemas.microsoft.com/office/drawing/2010/main" showMasterSp="1" showMasterPhAnim="1">
+<file path=ppt/slides/slide4.xml><?xml version="1.0" encoding="utf-8"?>
+<p:sld xmlns:a="http://schemas.openxmlformats.org/drawingml/2006/main" xmlns:r="http://schemas.openxmlformats.org/officeDocument/2006/relationships" xmlns:p="http://schemas.openxmlformats.org/presentationml/2006/main">
   <p:cSld>
     <p:spTree>
       <p:nvGrpSpPr>
@@ -6484,7 +6820,9 @@
       <p:sp>
         <p:nvSpPr>
           <p:cNvPr id="148" name="Title 1"/>
-          <p:cNvSpPr txBox="1"/>
+          <p:cNvSpPr txBox="1">
+            <a:spLocks noGrp="1"/>
+          </p:cNvSpPr>
           <p:nvPr>
             <p:ph type="title"/>
           </p:nvPr>
@@ -6502,7 +6840,6 @@
           <a:bodyPr/>
           <a:lstStyle/>
           <a:p>
-            <a:pPr/>
             <a:r>
               <a:t>Research Directions in Literature</a:t>
             </a:r>
@@ -6512,7 +6849,9 @@
       <p:sp>
         <p:nvSpPr>
           <p:cNvPr id="149" name="Content Placeholder 2"/>
-          <p:cNvSpPr txBox="1"/>
+          <p:cNvSpPr txBox="1">
+            <a:spLocks noGrp="1"/>
+          </p:cNvSpPr>
           <p:nvPr>
             <p:ph type="body" idx="1"/>
           </p:nvPr>
@@ -6530,62 +6869,50 @@
           <a:bodyPr/>
           <a:lstStyle/>
           <a:p>
-            <a:pPr lvl="1" marL="828842" indent="-320842">
+            <a:pPr marL="828842" lvl="1" indent="-320842">
               <a:buFontTx/>
-              <a:buAutoNum type="arabicPeriod" startAt="1"/>
+              <a:buAutoNum type="arabicPeriod"/>
               <a:defRPr b="1"/>
             </a:pPr>
             <a:r>
+              <a:rPr dirty="0"/>
               <a:t>Binary Sentiment Classification</a:t>
             </a:r>
             <a:r>
-              <a:rPr b="0"/>
+              <a:rPr b="0" dirty="0"/>
               <a:t> – positive vs. negative reviews.</a:t>
             </a:r>
-            <a:endParaRPr sz="2100"/>
-          </a:p>
-          <a:p>
-            <a:pPr lvl="1" marL="828842" indent="-320842">
+            <a:endParaRPr sz="2100" dirty="0"/>
+          </a:p>
+          <a:p>
+            <a:pPr marL="828842" lvl="1" indent="-320842">
               <a:buFontTx/>
-              <a:buAutoNum type="arabicPeriod" startAt="1"/>
+              <a:buAutoNum type="arabicPeriod"/>
               <a:defRPr b="1"/>
             </a:pPr>
             <a:r>
+              <a:rPr dirty="0"/>
               <a:t>Star Rating Prediction</a:t>
             </a:r>
             <a:r>
-              <a:rPr b="0"/>
+              <a:rPr b="0" dirty="0"/>
               <a:t> – predict 1–5 stars from text.</a:t>
             </a:r>
-            <a:endParaRPr sz="2100"/>
-          </a:p>
-          <a:p>
-            <a:pPr lvl="1" marL="828842" indent="-320842">
+            <a:endParaRPr sz="2100" dirty="0"/>
+          </a:p>
+          <a:p>
+            <a:pPr marL="828842" lvl="1" indent="-320842">
               <a:buFontTx/>
-              <a:buAutoNum type="arabicPeriod" startAt="1"/>
+              <a:buAutoNum type="arabicPeriod"/>
               <a:defRPr b="1"/>
             </a:pPr>
             <a:r>
+              <a:rPr dirty="0"/>
               <a:t>Bias Analysis</a:t>
             </a:r>
             <a:r>
-              <a:rPr b="0"/>
+              <a:rPr b="0" dirty="0"/>
               <a:t> – explore inconsistencies between text and rating.</a:t>
-            </a:r>
-            <a:endParaRPr b="0"/>
-          </a:p>
-          <a:p>
-            <a:pPr lvl="1" marL="828842" indent="-320842">
-              <a:buFontTx/>
-              <a:buAutoNum type="arabicPeriod" startAt="1"/>
-              <a:defRPr b="1"/>
-            </a:pPr>
-            <a:r>
-              <a:t>Aspect-based sentiment analysis (ABSA)</a:t>
-            </a:r>
-            <a:r>
-              <a:rPr b="0"/>
-              <a:t> — how does the reviewer feel about certain “aspects” of the product/restaurant (e.g. good food, bad service). Can we use these extracted opinions in our model?</a:t>
             </a:r>
           </a:p>
         </p:txBody>
@@ -6595,129 +6922,12 @@
   <p:clrMapOvr>
     <a:masterClrMapping/>
   </p:clrMapOvr>
-  <p:transition xmlns:p14="http://schemas.microsoft.com/office/powerpoint/2010/main" spd="med" advClick="1"/>
-</p:sld>
-</file>
-
-<file path=ppt/slides/slide4.xml><?xml version="1.0" encoding="utf-8"?>
-<p:sld xmlns:a="http://schemas.openxmlformats.org/drawingml/2006/main" xmlns:r="http://schemas.openxmlformats.org/officeDocument/2006/relationships" xmlns:p="http://schemas.openxmlformats.org/presentationml/2006/main" xmlns:m="http://schemas.openxmlformats.org/officeDocument/2006/math" xmlns:a14="http://schemas.microsoft.com/office/drawing/2010/main" showMasterSp="1" showMasterPhAnim="1">
-  <p:cSld>
-    <p:spTree>
-      <p:nvGrpSpPr>
-        <p:cNvPr id="1" name=""/>
-        <p:cNvGrpSpPr/>
-        <p:nvPr/>
-      </p:nvGrpSpPr>
-      <p:grpSpPr>
-        <a:xfrm>
-          <a:off x="0" y="0"/>
-          <a:ext cx="0" cy="0"/>
-          <a:chOff x="0" y="0"/>
-          <a:chExt cx="0" cy="0"/>
-        </a:xfrm>
-      </p:grpSpPr>
-      <p:sp>
-        <p:nvSpPr>
-          <p:cNvPr id="151" name="Objectives"/>
-          <p:cNvSpPr txBox="1"/>
-          <p:nvPr>
-            <p:ph type="title"/>
-          </p:nvPr>
-        </p:nvSpPr>
-        <p:spPr>
-          <a:prstGeom prst="rect">
-            <a:avLst/>
-          </a:prstGeom>
-        </p:spPr>
-        <p:txBody>
-          <a:bodyPr/>
-          <a:lstStyle/>
-          <a:p>
-            <a:pPr/>
-            <a:r>
-              <a:t>Objectives</a:t>
-            </a:r>
-          </a:p>
-        </p:txBody>
-      </p:sp>
-      <p:sp>
-        <p:nvSpPr>
-          <p:cNvPr id="152" name="Accurately predict a restaurant’s star rating (1–5) from review text alone.…"/>
-          <p:cNvSpPr txBox="1"/>
-          <p:nvPr>
-            <p:ph type="body" idx="1"/>
-          </p:nvPr>
-        </p:nvSpPr>
-        <p:spPr>
-          <a:prstGeom prst="rect">
-            <a:avLst/>
-          </a:prstGeom>
-        </p:spPr>
-        <p:txBody>
-          <a:bodyPr/>
-          <a:lstStyle/>
-          <a:p>
-            <a:pPr/>
-            <a:r>
-              <a:t>Accurately predict a restaurant’s star rating (1–5) from </a:t>
-            </a:r>
-            <a:r>
-              <a:rPr b="1"/>
-              <a:t>review text alone</a:t>
-            </a:r>
-            <a:r>
-              <a:t>. </a:t>
-            </a:r>
-          </a:p>
-          <a:p>
-            <a:pPr/>
-            <a:r>
-              <a:rPr b="1"/>
-              <a:t>Compare multiple feature extraction methods</a:t>
-            </a:r>
-            <a:r>
-              <a:t> (n-grams, TF-IDF, sentiment lexicons, embeddings). </a:t>
-            </a:r>
-          </a:p>
-          <a:p>
-            <a:pPr/>
-            <a:r>
-              <a:t>Explore </a:t>
-            </a:r>
-            <a:r>
-              <a:rPr b="1"/>
-              <a:t>supplemental features</a:t>
-            </a:r>
-            <a:r>
-              <a:t> (review length, punctuation usage) and </a:t>
-            </a:r>
-            <a:r>
-              <a:rPr b="1"/>
-              <a:t>address class imbalance</a:t>
-            </a:r>
-            <a:r>
-              <a:t> </a:t>
-            </a:r>
-          </a:p>
-          <a:p>
-            <a:pPr/>
-            <a:r>
-              <a:t>Benchmark baseline ML models against deep neural networks and ensemble approaches.</a:t>
-            </a:r>
-          </a:p>
-        </p:txBody>
-      </p:sp>
-    </p:spTree>
-  </p:cSld>
-  <p:clrMapOvr>
-    <a:masterClrMapping/>
-  </p:clrMapOvr>
-  <p:transition xmlns:p14="http://schemas.microsoft.com/office/powerpoint/2010/main" spd="med" advClick="1"/>
+  <p:transition spd="med"/>
 </p:sld>
 </file>
 
 <file path=ppt/slides/slide5.xml><?xml version="1.0" encoding="utf-8"?>
-<p:sld xmlns:a="http://schemas.openxmlformats.org/drawingml/2006/main" xmlns:r="http://schemas.openxmlformats.org/officeDocument/2006/relationships" xmlns:p="http://schemas.openxmlformats.org/presentationml/2006/main" xmlns:m="http://schemas.openxmlformats.org/officeDocument/2006/math" xmlns:a14="http://schemas.microsoft.com/office/drawing/2010/main" showMasterSp="1" showMasterPhAnim="1">
+<p:sld xmlns:a="http://schemas.openxmlformats.org/drawingml/2006/main" xmlns:r="http://schemas.openxmlformats.org/officeDocument/2006/relationships" xmlns:p="http://schemas.openxmlformats.org/presentationml/2006/main">
   <p:cSld>
     <p:spTree>
       <p:nvGrpSpPr>
@@ -6736,7 +6946,9 @@
       <p:sp>
         <p:nvSpPr>
           <p:cNvPr id="154" name="Dataset"/>
-          <p:cNvSpPr txBox="1"/>
+          <p:cNvSpPr txBox="1">
+            <a:spLocks noGrp="1"/>
+          </p:cNvSpPr>
           <p:nvPr>
             <p:ph type="title"/>
           </p:nvPr>
@@ -6750,8 +6962,8 @@
           <a:bodyPr/>
           <a:lstStyle/>
           <a:p>
-            <a:pPr/>
-            <a:r>
+            <a:r>
+              <a:rPr dirty="0"/>
               <a:t>Dataset</a:t>
             </a:r>
           </a:p>
@@ -6760,7 +6972,9 @@
       <p:sp>
         <p:nvSpPr>
           <p:cNvPr id="155" name="Yelp Dataset Challenge (~7–8 million reviews).…"/>
-          <p:cNvSpPr txBox="1"/>
+          <p:cNvSpPr txBox="1">
+            <a:spLocks noGrp="1"/>
+          </p:cNvSpPr>
           <p:nvPr>
             <p:ph type="body" idx="1"/>
           </p:nvPr>
@@ -6774,28 +6988,29 @@
           <a:bodyPr/>
           <a:lstStyle/>
           <a:p>
-            <a:pPr/>
-            <a:r>
+            <a:r>
+              <a:rPr dirty="0"/>
               <a:t>Yelp Dataset Challenge (~7–8 million reviews). </a:t>
             </a:r>
           </a:p>
           <a:p>
-            <a:pPr/>
-            <a:r>
+            <a:r>
+              <a:rPr dirty="0"/>
               <a:t>Each review includes text and star rating (+ many more features); known imbalance with most ratings ≥4 stars. </a:t>
             </a:r>
           </a:p>
           <a:p>
-            <a:pPr/>
-            <a:r>
+            <a:r>
+              <a:rPr dirty="0"/>
               <a:t>Similar datasets in research: Amazon, Twitter, IMDB for method comparison.</a:t>
             </a:r>
           </a:p>
           <a:p>
-            <a:pPr lvl="1" marL="600234" indent="-257243">
+            <a:pPr marL="600234" lvl="1" indent="-257243">
               <a:buChar char="•"/>
             </a:pPr>
             <a:r>
+              <a:rPr dirty="0"/>
               <a:t>Some papers used these</a:t>
             </a:r>
           </a:p>
@@ -6806,12 +7021,12 @@
   <p:clrMapOvr>
     <a:masterClrMapping/>
   </p:clrMapOvr>
-  <p:transition xmlns:p14="http://schemas.microsoft.com/office/powerpoint/2010/main" spd="med" advClick="1"/>
+  <p:transition spd="med"/>
 </p:sld>
 </file>
 
 <file path=ppt/slides/slide6.xml><?xml version="1.0" encoding="utf-8"?>
-<p:sld xmlns:a="http://schemas.openxmlformats.org/drawingml/2006/main" xmlns:r="http://schemas.openxmlformats.org/officeDocument/2006/relationships" xmlns:p="http://schemas.openxmlformats.org/presentationml/2006/main" xmlns:m="http://schemas.openxmlformats.org/officeDocument/2006/math" xmlns:a14="http://schemas.microsoft.com/office/drawing/2010/main" showMasterSp="1" showMasterPhAnim="1">
+<p:sld xmlns:a="http://schemas.openxmlformats.org/drawingml/2006/main" xmlns:r="http://schemas.openxmlformats.org/officeDocument/2006/relationships" xmlns:p="http://schemas.openxmlformats.org/presentationml/2006/main">
   <p:cSld>
     <p:spTree>
       <p:nvGrpSpPr>
@@ -6830,7 +7045,9 @@
       <p:sp>
         <p:nvSpPr>
           <p:cNvPr id="157" name="Title 1"/>
-          <p:cNvSpPr txBox="1"/>
+          <p:cNvSpPr txBox="1">
+            <a:spLocks noGrp="1"/>
+          </p:cNvSpPr>
           <p:nvPr>
             <p:ph type="title"/>
           </p:nvPr>
@@ -6848,7 +7065,6 @@
           <a:bodyPr/>
           <a:lstStyle/>
           <a:p>
-            <a:pPr/>
             <a:r>
               <a:t>Preprocessing Methods</a:t>
             </a:r>
@@ -6858,7 +7074,9 @@
       <p:sp>
         <p:nvSpPr>
           <p:cNvPr id="158" name="Content Placeholder 2"/>
-          <p:cNvSpPr txBox="1"/>
+          <p:cNvSpPr txBox="1">
+            <a:spLocks noGrp="1"/>
+          </p:cNvSpPr>
           <p:nvPr>
             <p:ph type="body" idx="1"/>
           </p:nvPr>
@@ -6882,6 +7100,7 @@
               </a:lnSpc>
             </a:pPr>
             <a:r>
+              <a:rPr dirty="0"/>
               <a:t>Lowercase conversion, punctuation/special character removal, stop word elimination. </a:t>
             </a:r>
           </a:p>
@@ -6892,6 +7111,7 @@
               </a:lnSpc>
             </a:pPr>
             <a:r>
+              <a:rPr dirty="0"/>
               <a:t>Extract features (length, punctuation) before cleaning. </a:t>
             </a:r>
           </a:p>
@@ -6902,7 +7122,16 @@
               </a:lnSpc>
             </a:pPr>
             <a:r>
-              <a:t>Negation handling (“not good” → “not_good”), optional stemming.</a:t>
+              <a:rPr dirty="0"/>
+              <a:t>Negation handling (“not good” → “</a:t>
+            </a:r>
+            <a:r>
+              <a:rPr dirty="0" err="1"/>
+              <a:t>not_good</a:t>
+            </a:r>
+            <a:r>
+              <a:rPr dirty="0"/>
+              <a:t>”), optional stemming.</a:t>
             </a:r>
           </a:p>
           <a:p>
@@ -6912,6 +7141,7 @@
               </a:lnSpc>
             </a:pPr>
             <a:r>
+              <a:rPr dirty="0"/>
               <a:t>Part of Speech tagging</a:t>
             </a:r>
           </a:p>
@@ -6922,12 +7152,12 @@
   <p:clrMapOvr>
     <a:masterClrMapping/>
   </p:clrMapOvr>
-  <p:transition xmlns:p14="http://schemas.microsoft.com/office/powerpoint/2010/main" spd="med" advClick="1"/>
+  <p:transition spd="med"/>
 </p:sld>
 </file>
 
 <file path=ppt/slides/slide7.xml><?xml version="1.0" encoding="utf-8"?>
-<p:sld xmlns:a="http://schemas.openxmlformats.org/drawingml/2006/main" xmlns:r="http://schemas.openxmlformats.org/officeDocument/2006/relationships" xmlns:p="http://schemas.openxmlformats.org/presentationml/2006/main" xmlns:m="http://schemas.openxmlformats.org/officeDocument/2006/math" xmlns:a14="http://schemas.microsoft.com/office/drawing/2010/main" showMasterSp="1" showMasterPhAnim="1">
+<p:sld xmlns:a="http://schemas.openxmlformats.org/drawingml/2006/main" xmlns:r="http://schemas.openxmlformats.org/officeDocument/2006/relationships" xmlns:p="http://schemas.openxmlformats.org/presentationml/2006/main">
   <p:cSld>
     <p:spTree>
       <p:nvGrpSpPr>
@@ -6946,7 +7176,9 @@
       <p:sp>
         <p:nvSpPr>
           <p:cNvPr id="160" name="Title 1"/>
-          <p:cNvSpPr txBox="1"/>
+          <p:cNvSpPr txBox="1">
+            <a:spLocks noGrp="1"/>
+          </p:cNvSpPr>
           <p:nvPr>
             <p:ph type="title"/>
           </p:nvPr>
@@ -6964,7 +7196,6 @@
           <a:bodyPr/>
           <a:lstStyle/>
           <a:p>
-            <a:pPr/>
             <a:r>
               <a:t>Feature Engineering Approaches</a:t>
             </a:r>
@@ -6974,7 +7205,9 @@
       <p:sp>
         <p:nvSpPr>
           <p:cNvPr id="161" name="Content Placeholder 2"/>
-          <p:cNvSpPr txBox="1"/>
+          <p:cNvSpPr txBox="1">
+            <a:spLocks noGrp="1"/>
+          </p:cNvSpPr>
           <p:nvPr>
             <p:ph type="body" idx="1"/>
           </p:nvPr>
@@ -6989,21 +7222,32 @@
           </a:prstGeom>
         </p:spPr>
         <p:txBody>
-          <a:bodyPr/>
+          <a:bodyPr>
+            <a:normAutofit lnSpcReduction="10000"/>
+          </a:bodyPr>
           <a:lstStyle/>
           <a:p>
             <a:pPr marL="182643" indent="-182643" defTabSz="243523">
               <a:spcBef>
                 <a:spcPts val="400"/>
               </a:spcBef>
-              <a:defRPr b="1" sz="1703"/>
-            </a:pPr>
-            <a:r>
-              <a:t>Bag of Words (BoW):</a:t>
-            </a:r>
-          </a:p>
-          <a:p>
-            <a:pPr lvl="1" marL="426166" indent="-182643" defTabSz="243523">
+              <a:defRPr sz="1703" b="1"/>
+            </a:pPr>
+            <a:r>
+              <a:rPr dirty="0"/>
+              <a:t>Bag of Words (</a:t>
+            </a:r>
+            <a:r>
+              <a:rPr dirty="0" err="1"/>
+              <a:t>BoW</a:t>
+            </a:r>
+            <a:r>
+              <a:rPr dirty="0"/>
+              <a:t>):</a:t>
+            </a:r>
+          </a:p>
+          <a:p>
+            <a:pPr marL="426166" lvl="1" indent="-182643" defTabSz="243523">
               <a:spcBef>
                 <a:spcPts val="400"/>
               </a:spcBef>
@@ -7011,6 +7255,7 @@
               <a:defRPr sz="1703"/>
             </a:pPr>
             <a:r>
+              <a:rPr dirty="0"/>
               <a:t>Baseline—simple but effective</a:t>
             </a:r>
           </a:p>
@@ -7022,22 +7267,24 @@
               <a:defRPr sz="1703"/>
             </a:pPr>
             <a:r>
-              <a:rPr b="1"/>
+              <a:rPr b="1" dirty="0"/>
               <a:t>TF-IDF</a:t>
             </a:r>
             <a:r>
+              <a:rPr dirty="0"/>
               <a:t> and </a:t>
             </a:r>
             <a:r>
-              <a:rPr b="1"/>
+              <a:rPr b="1" dirty="0"/>
               <a:t>n-grams</a:t>
             </a:r>
             <a:r>
+              <a:rPr dirty="0"/>
               <a:t> (unigrams, bigrams, trigrams):</a:t>
             </a:r>
           </a:p>
           <a:p>
-            <a:pPr lvl="1" marL="426166" indent="-182643" defTabSz="243523">
+            <a:pPr marL="426166" lvl="1" indent="-182643" defTabSz="243523">
               <a:spcBef>
                 <a:spcPts val="400"/>
               </a:spcBef>
@@ -7045,6 +7292,7 @@
               <a:defRPr sz="1703"/>
             </a:pPr>
             <a:r>
+              <a:rPr dirty="0"/>
               <a:t>Define rare/meaningful words/phrases</a:t>
             </a:r>
           </a:p>
@@ -7053,14 +7301,15 @@
               <a:spcBef>
                 <a:spcPts val="400"/>
               </a:spcBef>
-              <a:defRPr b="1" sz="1703"/>
-            </a:pPr>
-            <a:r>
+              <a:defRPr sz="1703" b="1"/>
+            </a:pPr>
+            <a:r>
+              <a:rPr dirty="0"/>
               <a:t>Sentiment Lexicons: </a:t>
             </a:r>
           </a:p>
           <a:p>
-            <a:pPr lvl="1" marL="426166" indent="-182643" defTabSz="243523">
+            <a:pPr marL="426166" lvl="1" indent="-182643" defTabSz="243523">
               <a:spcBef>
                 <a:spcPts val="400"/>
               </a:spcBef>
@@ -7068,11 +7317,12 @@
               <a:defRPr sz="1703"/>
             </a:pPr>
             <a:r>
+              <a:rPr dirty="0"/>
               <a:t>Compare text with predefined word lists (e.g., Bing Liu)</a:t>
             </a:r>
           </a:p>
           <a:p>
-            <a:pPr lvl="1" marL="426166" indent="-182643" defTabSz="243523">
+            <a:pPr marL="426166" lvl="1" indent="-182643" defTabSz="243523">
               <a:spcBef>
                 <a:spcPts val="400"/>
               </a:spcBef>
@@ -7080,6 +7330,7 @@
               <a:defRPr sz="1703"/>
             </a:pPr>
             <a:r>
+              <a:rPr dirty="0"/>
               <a:t>Struggle with slang/typos</a:t>
             </a:r>
           </a:p>
@@ -7088,29 +7339,29 @@
               <a:spcBef>
                 <a:spcPts val="400"/>
               </a:spcBef>
-              <a:defRPr b="1" sz="1703"/>
-            </a:pPr>
-            <a:r>
+              <a:defRPr sz="1703" b="1"/>
+            </a:pPr>
+            <a:r>
+              <a:rPr dirty="0"/>
               <a:t>Part-of-Speech Tagging:</a:t>
             </a:r>
-            <a:endParaRPr b="0"/>
-          </a:p>
-          <a:p>
-            <a:pPr lvl="1" marL="426166" indent="-182643" defTabSz="243523">
+            <a:endParaRPr b="0" dirty="0"/>
+          </a:p>
+          <a:p>
+            <a:pPr marL="426166" lvl="1" indent="-182643" defTabSz="243523">
               <a:spcBef>
                 <a:spcPts val="400"/>
               </a:spcBef>
               <a:buChar char="•"/>
-              <a:defRPr b="1" sz="1703"/>
-            </a:pPr>
-            <a:r>
-              <a:rPr b="0"/>
+              <a:defRPr sz="1703" b="1"/>
+            </a:pPr>
+            <a:r>
+              <a:rPr b="0" dirty="0"/>
               <a:t>e.g. use only adjectives</a:t>
             </a:r>
-            <a:endParaRPr b="0"/>
-          </a:p>
-          <a:p>
-            <a:pPr lvl="1" marL="426166" indent="-182643" defTabSz="243523">
+          </a:p>
+          <a:p>
+            <a:pPr marL="426166" lvl="1" indent="-182643" defTabSz="243523">
               <a:spcBef>
                 <a:spcPts val="400"/>
               </a:spcBef>
@@ -7118,7 +7369,12 @@
               <a:defRPr sz="1703"/>
             </a:pPr>
             <a:r>
-              <a:t>improves interpretability and model performance</a:t>
+              <a:rPr lang="en-US" dirty="0"/>
+              <a:t>Could </a:t>
+            </a:r>
+            <a:r>
+              <a:rPr dirty="0"/>
+              <a:t>improve interpretability and model performance</a:t>
             </a:r>
           </a:p>
           <a:p>
@@ -7126,15 +7382,16 @@
               <a:spcBef>
                 <a:spcPts val="400"/>
               </a:spcBef>
-              <a:defRPr b="1" sz="1703"/>
-            </a:pPr>
-            <a:r>
+              <a:defRPr sz="1703" b="1"/>
+            </a:pPr>
+            <a:r>
+              <a:rPr dirty="0"/>
               <a:t>Contextual Embeddings:</a:t>
             </a:r>
-            <a:endParaRPr b="0"/>
-          </a:p>
-          <a:p>
-            <a:pPr lvl="1" marL="426166" indent="-182643" defTabSz="243523">
+            <a:endParaRPr b="0" dirty="0"/>
+          </a:p>
+          <a:p>
+            <a:pPr marL="426166" lvl="1" indent="-182643" defTabSz="243523">
               <a:spcBef>
                 <a:spcPts val="400"/>
               </a:spcBef>
@@ -7142,18 +7399,26 @@
               <a:defRPr sz="1703"/>
             </a:pPr>
             <a:r>
+              <a:rPr dirty="0"/>
               <a:t>e.g. BERT</a:t>
             </a:r>
-          </a:p>
-          <a:p>
-            <a:pPr marL="182643" indent="-182643" defTabSz="243523">
+            <a:endParaRPr lang="en-US" dirty="0"/>
+          </a:p>
+          <a:p>
+            <a:pPr marL="426166" lvl="1" indent="-182643" defTabSz="243523">
               <a:spcBef>
                 <a:spcPts val="400"/>
               </a:spcBef>
+              <a:buChar char="•"/>
               <a:defRPr sz="1703"/>
             </a:pPr>
             <a:r>
-              <a:t>Try adding extracted features like review length, positivity/negativity scores, user votes if feasible</a:t>
+              <a:rPr lang="en-US" dirty="0"/>
+              <a:t>Supplement with </a:t>
+            </a:r>
+            <a:r>
+              <a:rPr dirty="0"/>
+              <a:t>extracted features like review length, positivity/negativity scores, user votes if feasible</a:t>
             </a:r>
           </a:p>
         </p:txBody>
@@ -7163,12 +7428,12 @@
   <p:clrMapOvr>
     <a:masterClrMapping/>
   </p:clrMapOvr>
-  <p:transition xmlns:p14="http://schemas.microsoft.com/office/powerpoint/2010/main" spd="med" advClick="1"/>
+  <p:transition spd="med"/>
 </p:sld>
 </file>
 
 <file path=ppt/slides/slide8.xml><?xml version="1.0" encoding="utf-8"?>
-<p:sld xmlns:a="http://schemas.openxmlformats.org/drawingml/2006/main" xmlns:r="http://schemas.openxmlformats.org/officeDocument/2006/relationships" xmlns:p="http://schemas.openxmlformats.org/presentationml/2006/main" xmlns:m="http://schemas.openxmlformats.org/officeDocument/2006/math" xmlns:a14="http://schemas.microsoft.com/office/drawing/2010/main" showMasterSp="1" showMasterPhAnim="1">
+<p:sld xmlns:a="http://schemas.openxmlformats.org/drawingml/2006/main" xmlns:r="http://schemas.openxmlformats.org/officeDocument/2006/relationships" xmlns:p="http://schemas.openxmlformats.org/presentationml/2006/main">
   <p:cSld>
     <p:spTree>
       <p:nvGrpSpPr>
@@ -7187,7 +7452,9 @@
       <p:sp>
         <p:nvSpPr>
           <p:cNvPr id="163" name="Modeling Approaches"/>
-          <p:cNvSpPr txBox="1"/>
+          <p:cNvSpPr txBox="1">
+            <a:spLocks noGrp="1"/>
+          </p:cNvSpPr>
           <p:nvPr>
             <p:ph type="title"/>
           </p:nvPr>
@@ -7201,7 +7468,6 @@
           <a:bodyPr/>
           <a:lstStyle/>
           <a:p>
-            <a:pPr/>
             <a:r>
               <a:t>Modeling Approaches</a:t>
             </a:r>
@@ -7211,7 +7477,9 @@
       <p:sp>
         <p:nvSpPr>
           <p:cNvPr id="164" name="Baseline classifiers: Logistic Regression, Naive Bayes, SVM (linear/non-linear), Passive-Aggressive (similar to SVM).…"/>
-          <p:cNvSpPr txBox="1"/>
+          <p:cNvSpPr txBox="1">
+            <a:spLocks noGrp="1"/>
+          </p:cNvSpPr>
           <p:nvPr>
             <p:ph type="body" idx="1"/>
           </p:nvPr>
@@ -7225,66 +7493,79 @@
           <a:bodyPr/>
           <a:lstStyle/>
           <a:p>
-            <a:pPr/>
-            <a:r>
-              <a:rPr b="1"/>
+            <a:r>
+              <a:rPr b="1" dirty="0"/>
               <a:t>Baseline classifiers:</a:t>
             </a:r>
             <a:r>
+              <a:rPr dirty="0"/>
               <a:t> Logistic Regression, Naive Bayes, SVM (linear/non-linear), Passive-Aggressive (similar to SVM). </a:t>
             </a:r>
           </a:p>
           <a:p>
-            <a:pPr/>
-            <a:r>
-              <a:rPr b="1"/>
+            <a:r>
+              <a:rPr b="1" dirty="0"/>
               <a:t>Tree-based ensembles:</a:t>
             </a:r>
             <a:r>
+              <a:rPr dirty="0"/>
               <a:t> Random Forest, AdaBoost. </a:t>
             </a:r>
           </a:p>
           <a:p>
-            <a:pPr/>
-            <a:r>
+            <a:r>
+              <a:rPr dirty="0"/>
               <a:t>Shallow/deep </a:t>
             </a:r>
             <a:r>
-              <a:rPr b="1"/>
-              <a:t>Multi-Layer Perceptrons</a:t>
-            </a:r>
-            <a:r>
+              <a:rPr b="1" dirty="0"/>
+              <a:t>Multi-Layer </a:t>
+            </a:r>
+            <a:r>
+              <a:rPr b="1" dirty="0" err="1"/>
+              <a:t>Perceptrons</a:t>
+            </a:r>
+            <a:r>
+              <a:rPr dirty="0"/>
               <a:t> with contextual embeddings. </a:t>
             </a:r>
           </a:p>
           <a:p>
-            <a:pPr/>
-            <a:r>
-              <a:rPr b="1"/>
+            <a:r>
+              <a:rPr b="1" dirty="0"/>
               <a:t>Ensemble methods:</a:t>
             </a:r>
             <a:r>
+              <a:rPr dirty="0"/>
               <a:t> weighted voting, stacking. </a:t>
             </a:r>
           </a:p>
           <a:p>
-            <a:pPr/>
-            <a:r>
-              <a:rPr b="1"/>
+            <a:r>
+              <a:rPr b="1" dirty="0"/>
               <a:t>Ordinal models</a:t>
             </a:r>
             <a:r>
+              <a:rPr dirty="0"/>
               <a:t> (ordered logistic regression) to honor rating order (i.e. 1 is closer to 2 than 4). </a:t>
             </a:r>
           </a:p>
           <a:p>
-            <a:pPr/>
-            <a:r>
-              <a:rPr b="1"/>
+            <a:r>
+              <a:rPr b="1" dirty="0"/>
               <a:t>Regressors</a:t>
             </a:r>
             <a:r>
-              <a:t> (RandomForest, SVM, etc.), layered strategies (classify sentiment then regress rating).</a:t>
+              <a:rPr dirty="0"/>
+              <a:t> (</a:t>
+            </a:r>
+            <a:r>
+              <a:rPr dirty="0" err="1"/>
+              <a:t>RandomForest</a:t>
+            </a:r>
+            <a:r>
+              <a:rPr dirty="0"/>
+              <a:t>, SVM, etc.), layered strategies (classify sentiment then regress rating).</a:t>
             </a:r>
           </a:p>
         </p:txBody>
@@ -7294,12 +7575,12 @@
   <p:clrMapOvr>
     <a:masterClrMapping/>
   </p:clrMapOvr>
-  <p:transition xmlns:p14="http://schemas.microsoft.com/office/powerpoint/2010/main" spd="med" advClick="1"/>
+  <p:transition spd="med"/>
 </p:sld>
 </file>
 
 <file path=ppt/slides/slide9.xml><?xml version="1.0" encoding="utf-8"?>
-<p:sld xmlns:a="http://schemas.openxmlformats.org/drawingml/2006/main" xmlns:r="http://schemas.openxmlformats.org/officeDocument/2006/relationships" xmlns:p="http://schemas.openxmlformats.org/presentationml/2006/main" xmlns:m="http://schemas.openxmlformats.org/officeDocument/2006/math" xmlns:a14="http://schemas.microsoft.com/office/drawing/2010/main" showMasterSp="1" showMasterPhAnim="1">
+<p:sld xmlns:a="http://schemas.openxmlformats.org/drawingml/2006/main" xmlns:r="http://schemas.openxmlformats.org/officeDocument/2006/relationships" xmlns:p="http://schemas.openxmlformats.org/presentationml/2006/main">
   <p:cSld>
     <p:spTree>
       <p:nvGrpSpPr>
@@ -7318,7 +7599,9 @@
       <p:sp>
         <p:nvSpPr>
           <p:cNvPr id="166" name="Sentiment Analysis on Product Reviews Using Machine Learning Techniques; Jagdale et al. (2019)"/>
-          <p:cNvSpPr txBox="1"/>
+          <p:cNvSpPr txBox="1">
+            <a:spLocks noGrp="1"/>
+          </p:cNvSpPr>
           <p:nvPr>
             <p:ph type="title"/>
           </p:nvPr>
@@ -7348,7 +7631,9 @@
       <p:sp>
         <p:nvSpPr>
           <p:cNvPr id="167" name="Amazon product reviews: Camera, Laptops, Mobile phones, tablets, TVs, video surveillance (approx 13k total reviews)…"/>
-          <p:cNvSpPr txBox="1"/>
+          <p:cNvSpPr txBox="1">
+            <a:spLocks noGrp="1"/>
+          </p:cNvSpPr>
           <p:nvPr>
             <p:ph type="body" sz="half" idx="1"/>
           </p:nvPr>
@@ -7433,9 +7718,7 @@
           <p:nvPr/>
         </p:nvPicPr>
         <p:blipFill>
-          <a:blip r:embed="rId2">
-            <a:extLst/>
-          </a:blip>
+          <a:blip r:embed="rId2"/>
           <a:stretch>
             <a:fillRect/>
           </a:stretch>
@@ -7462,9 +7745,7 @@
           <p:nvPr/>
         </p:nvPicPr>
         <p:blipFill>
-          <a:blip r:embed="rId3">
-            <a:extLst/>
-          </a:blip>
+          <a:blip r:embed="rId3"/>
           <a:stretch>
             <a:fillRect/>
           </a:stretch>
@@ -7491,9 +7772,7 @@
           <p:nvPr/>
         </p:nvPicPr>
         <p:blipFill>
-          <a:blip r:embed="rId4">
-            <a:extLst/>
-          </a:blip>
+          <a:blip r:embed="rId4"/>
           <a:stretch>
             <a:fillRect/>
           </a:stretch>
@@ -7516,12 +7795,12 @@
   <p:clrMapOvr>
     <a:masterClrMapping/>
   </p:clrMapOvr>
-  <p:transition xmlns:p14="http://schemas.microsoft.com/office/powerpoint/2010/main" spd="med" advClick="1"/>
+  <p:transition spd="med"/>
 </p:sld>
 </file>
 
 <file path=ppt/theme/theme1.xml><?xml version="1.0" encoding="utf-8"?>
-<a:theme xmlns:a="http://schemas.openxmlformats.org/drawingml/2006/main" xmlns:r="http://schemas.openxmlformats.org/officeDocument/2006/relationships" name="Office Theme">
+<a:theme xmlns:a="http://schemas.openxmlformats.org/drawingml/2006/main" name="Office Theme">
   <a:themeElements>
     <a:clrScheme name="Office Theme">
       <a:dk1>
@@ -7647,7 +7926,7 @@
       <a:effectStyleLst>
         <a:effectStyle>
           <a:effectLst>
-            <a:outerShdw sx="100000" sy="100000" kx="0" ky="0" algn="b" rotWithShape="0" blurRad="38100" dist="23000" dir="5400000">
+            <a:outerShdw blurRad="38100" dist="23000" dir="5400000" rotWithShape="0">
               <a:srgbClr val="000000">
                 <a:alpha val="35000"/>
               </a:srgbClr>
@@ -7656,7 +7935,7 @@
         </a:effectStyle>
         <a:effectStyle>
           <a:effectLst>
-            <a:outerShdw sx="100000" sy="100000" kx="0" ky="0" algn="b" rotWithShape="0" blurRad="38100" dist="23000" dir="5400000">
+            <a:outerShdw blurRad="38100" dist="23000" dir="5400000" rotWithShape="0">
               <a:srgbClr val="000000">
                 <a:alpha val="35000"/>
               </a:srgbClr>
@@ -7665,7 +7944,7 @@
         </a:effectStyle>
         <a:effectStyle>
           <a:effectLst>
-            <a:outerShdw sx="100000" sy="100000" kx="0" ky="0" algn="b" rotWithShape="0" blurRad="38100" dist="20000" dir="5400000">
+            <a:outerShdw blurRad="38100" dist="20000" dir="5400000" rotWithShape="0">
               <a:srgbClr val="000000">
                 <a:alpha val="38000"/>
               </a:srgbClr>
@@ -7739,7 +8018,7 @@
           <a:round/>
         </a:ln>
         <a:effectLst>
-          <a:outerShdw sx="100000" sy="100000" kx="0" ky="0" algn="b" rotWithShape="0" blurRad="38100" dist="23000" dir="5400000">
+          <a:outerShdw blurRad="38100" dist="23000" dir="5400000" rotWithShape="0">
             <a:srgbClr val="000000">
               <a:alpha val="35000"/>
             </a:srgbClr>
@@ -7747,7 +8026,7 @@
         </a:effectLst>
         <a:sp3d/>
       </a:spPr>
-      <a:bodyPr rot="0" spcFirstLastPara="1" vertOverflow="overflow" horzOverflow="overflow" vert="horz" wrap="square" lIns="45719" tIns="45719" rIns="45719" bIns="45719" numCol="1" spcCol="38100" rtlCol="0" anchor="ctr" upright="0">
+      <a:bodyPr rot="0" spcFirstLastPara="1" vertOverflow="overflow" horzOverflow="overflow" vert="horz" wrap="square" lIns="45719" tIns="45719" rIns="45719" bIns="45719" numCol="1" spcCol="38100" rtlCol="0" anchor="ctr">
         <a:spAutoFit/>
       </a:bodyPr>
       <a:lstStyle>
@@ -7766,7 +8045,7 @@
           <a:buFontTx/>
           <a:buNone/>
           <a:tabLst/>
-          <a:defRPr b="0" baseline="0" cap="none" i="0" spc="0" strike="noStrike" sz="1800" u="none" kumimoji="0" normalizeH="0">
+          <a:defRPr kumimoji="0" sz="1800" b="0" i="0" u="none" strike="noStrike" cap="none" spc="0" normalizeH="0" baseline="0">
             <a:ln>
               <a:noFill/>
             </a:ln>
@@ -7796,7 +8075,7 @@
           <a:buFontTx/>
           <a:buNone/>
           <a:tabLst/>
-          <a:defRPr b="0" baseline="0" cap="none" i="0" spc="0" strike="noStrike" sz="1800" u="none" kumimoji="0" normalizeH="0">
+          <a:defRPr kumimoji="0" sz="1800" b="0" i="0" u="none" strike="noStrike" cap="none" spc="0" normalizeH="0" baseline="0">
             <a:ln>
               <a:noFill/>
             </a:ln>
@@ -7822,7 +8101,7 @@
           <a:buFontTx/>
           <a:buNone/>
           <a:tabLst/>
-          <a:defRPr b="0" baseline="0" cap="none" i="0" spc="0" strike="noStrike" sz="1800" u="none" kumimoji="0" normalizeH="0">
+          <a:defRPr kumimoji="0" sz="1800" b="0" i="0" u="none" strike="noStrike" cap="none" spc="0" normalizeH="0" baseline="0">
             <a:ln>
               <a:noFill/>
             </a:ln>
@@ -7848,7 +8127,7 @@
           <a:buFontTx/>
           <a:buNone/>
           <a:tabLst/>
-          <a:defRPr b="0" baseline="0" cap="none" i="0" spc="0" strike="noStrike" sz="1800" u="none" kumimoji="0" normalizeH="0">
+          <a:defRPr kumimoji="0" sz="1800" b="0" i="0" u="none" strike="noStrike" cap="none" spc="0" normalizeH="0" baseline="0">
             <a:ln>
               <a:noFill/>
             </a:ln>
@@ -7874,7 +8153,7 @@
           <a:buFontTx/>
           <a:buNone/>
           <a:tabLst/>
-          <a:defRPr b="0" baseline="0" cap="none" i="0" spc="0" strike="noStrike" sz="1800" u="none" kumimoji="0" normalizeH="0">
+          <a:defRPr kumimoji="0" sz="1800" b="0" i="0" u="none" strike="noStrike" cap="none" spc="0" normalizeH="0" baseline="0">
             <a:ln>
               <a:noFill/>
             </a:ln>
@@ -7900,7 +8179,7 @@
           <a:buFontTx/>
           <a:buNone/>
           <a:tabLst/>
-          <a:defRPr b="0" baseline="0" cap="none" i="0" spc="0" strike="noStrike" sz="1800" u="none" kumimoji="0" normalizeH="0">
+          <a:defRPr kumimoji="0" sz="1800" b="0" i="0" u="none" strike="noStrike" cap="none" spc="0" normalizeH="0" baseline="0">
             <a:ln>
               <a:noFill/>
             </a:ln>
@@ -7926,7 +8205,7 @@
           <a:buFontTx/>
           <a:buNone/>
           <a:tabLst/>
-          <a:defRPr b="0" baseline="0" cap="none" i="0" spc="0" strike="noStrike" sz="1800" u="none" kumimoji="0" normalizeH="0">
+          <a:defRPr kumimoji="0" sz="1800" b="0" i="0" u="none" strike="noStrike" cap="none" spc="0" normalizeH="0" baseline="0">
             <a:ln>
               <a:noFill/>
             </a:ln>
@@ -7952,7 +8231,7 @@
           <a:buFontTx/>
           <a:buNone/>
           <a:tabLst/>
-          <a:defRPr b="0" baseline="0" cap="none" i="0" spc="0" strike="noStrike" sz="1800" u="none" kumimoji="0" normalizeH="0">
+          <a:defRPr kumimoji="0" sz="1800" b="0" i="0" u="none" strike="noStrike" cap="none" spc="0" normalizeH="0" baseline="0">
             <a:ln>
               <a:noFill/>
             </a:ln>
@@ -7978,7 +8257,7 @@
           <a:buFontTx/>
           <a:buNone/>
           <a:tabLst/>
-          <a:defRPr b="0" baseline="0" cap="none" i="0" spc="0" strike="noStrike" sz="1800" u="none" kumimoji="0" normalizeH="0">
+          <a:defRPr kumimoji="0" sz="1800" b="0" i="0" u="none" strike="noStrike" cap="none" spc="0" normalizeH="0" baseline="0">
             <a:ln>
               <a:noFill/>
             </a:ln>
@@ -8004,7 +8283,7 @@
           <a:buFontTx/>
           <a:buNone/>
           <a:tabLst/>
-          <a:defRPr b="0" baseline="0" cap="none" i="0" spc="0" strike="noStrike" sz="1800" u="none" kumimoji="0" normalizeH="0">
+          <a:defRPr kumimoji="0" sz="1800" b="0" i="0" u="none" strike="noStrike" cap="none" spc="0" normalizeH="0" baseline="0">
             <a:ln>
               <a:noFill/>
             </a:ln>
@@ -8017,9 +8296,15 @@
         </a:lvl9pPr>
       </a:lstStyle>
       <a:style>
-        <a:lnRef idx="0"/>
-        <a:fillRef idx="0"/>
-        <a:effectRef idx="0"/>
+        <a:lnRef idx="0">
+          <a:scrgbClr r="0" g="0" b="0"/>
+        </a:lnRef>
+        <a:fillRef idx="0">
+          <a:scrgbClr r="0" g="0" b="0"/>
+        </a:fillRef>
+        <a:effectRef idx="0">
+          <a:scrgbClr r="0" g="0" b="0"/>
+        </a:effectRef>
         <a:fontRef idx="none"/>
       </a:style>
     </a:spDef>
@@ -8034,7 +8319,7 @@
           <a:round/>
         </a:ln>
         <a:effectLst>
-          <a:outerShdw sx="100000" sy="100000" kx="0" ky="0" algn="b" rotWithShape="0" blurRad="38100" dist="20000" dir="5400000">
+          <a:outerShdw blurRad="38100" dist="20000" dir="5400000" rotWithShape="0">
             <a:srgbClr val="000000">
               <a:alpha val="38000"/>
             </a:srgbClr>
@@ -8042,7 +8327,7 @@
         </a:effectLst>
         <a:sp3d/>
       </a:spPr>
-      <a:bodyPr rot="0" spcFirstLastPara="1" vertOverflow="overflow" horzOverflow="overflow" vert="horz" wrap="square" lIns="91439" tIns="45719" rIns="91439" bIns="45719" numCol="1" spcCol="38100" rtlCol="0" anchor="t" upright="0">
+      <a:bodyPr rot="0" spcFirstLastPara="1" vertOverflow="overflow" horzOverflow="overflow" vert="horz" wrap="square" lIns="91439" tIns="45719" rIns="91439" bIns="45719" numCol="1" spcCol="38100" rtlCol="0" anchor="t">
         <a:noAutofit/>
       </a:bodyPr>
       <a:lstStyle>
@@ -8061,7 +8346,7 @@
           <a:buFontTx/>
           <a:buNone/>
           <a:tabLst/>
-          <a:defRPr b="0" baseline="0" cap="none" i="0" spc="0" strike="noStrike" sz="1800" u="none" kumimoji="0" normalizeH="0">
+          <a:defRPr kumimoji="0" sz="1800" b="0" i="0" u="none" strike="noStrike" cap="none" spc="0" normalizeH="0" baseline="0">
             <a:ln>
               <a:noFill/>
             </a:ln>
@@ -8087,7 +8372,7 @@
           <a:buFontTx/>
           <a:buNone/>
           <a:tabLst/>
-          <a:defRPr b="0" baseline="0" cap="none" i="0" spc="0" strike="noStrike" sz="1800" u="none" kumimoji="0" normalizeH="0">
+          <a:defRPr kumimoji="0" sz="1800" b="0" i="0" u="none" strike="noStrike" cap="none" spc="0" normalizeH="0" baseline="0">
             <a:ln>
               <a:noFill/>
             </a:ln>
@@ -8113,7 +8398,7 @@
           <a:buFontTx/>
           <a:buNone/>
           <a:tabLst/>
-          <a:defRPr b="0" baseline="0" cap="none" i="0" spc="0" strike="noStrike" sz="1800" u="none" kumimoji="0" normalizeH="0">
+          <a:defRPr kumimoji="0" sz="1800" b="0" i="0" u="none" strike="noStrike" cap="none" spc="0" normalizeH="0" baseline="0">
             <a:ln>
               <a:noFill/>
             </a:ln>
@@ -8139,7 +8424,7 @@
           <a:buFontTx/>
           <a:buNone/>
           <a:tabLst/>
-          <a:defRPr b="0" baseline="0" cap="none" i="0" spc="0" strike="noStrike" sz="1800" u="none" kumimoji="0" normalizeH="0">
+          <a:defRPr kumimoji="0" sz="1800" b="0" i="0" u="none" strike="noStrike" cap="none" spc="0" normalizeH="0" baseline="0">
             <a:ln>
               <a:noFill/>
             </a:ln>
@@ -8165,7 +8450,7 @@
           <a:buFontTx/>
           <a:buNone/>
           <a:tabLst/>
-          <a:defRPr b="0" baseline="0" cap="none" i="0" spc="0" strike="noStrike" sz="1800" u="none" kumimoji="0" normalizeH="0">
+          <a:defRPr kumimoji="0" sz="1800" b="0" i="0" u="none" strike="noStrike" cap="none" spc="0" normalizeH="0" baseline="0">
             <a:ln>
               <a:noFill/>
             </a:ln>
@@ -8191,7 +8476,7 @@
           <a:buFontTx/>
           <a:buNone/>
           <a:tabLst/>
-          <a:defRPr b="0" baseline="0" cap="none" i="0" spc="0" strike="noStrike" sz="1800" u="none" kumimoji="0" normalizeH="0">
+          <a:defRPr kumimoji="0" sz="1800" b="0" i="0" u="none" strike="noStrike" cap="none" spc="0" normalizeH="0" baseline="0">
             <a:ln>
               <a:noFill/>
             </a:ln>
@@ -8217,7 +8502,7 @@
           <a:buFontTx/>
           <a:buNone/>
           <a:tabLst/>
-          <a:defRPr b="0" baseline="0" cap="none" i="0" spc="0" strike="noStrike" sz="1800" u="none" kumimoji="0" normalizeH="0">
+          <a:defRPr kumimoji="0" sz="1800" b="0" i="0" u="none" strike="noStrike" cap="none" spc="0" normalizeH="0" baseline="0">
             <a:ln>
               <a:noFill/>
             </a:ln>
@@ -8243,7 +8528,7 @@
           <a:buFontTx/>
           <a:buNone/>
           <a:tabLst/>
-          <a:defRPr b="0" baseline="0" cap="none" i="0" spc="0" strike="noStrike" sz="1800" u="none" kumimoji="0" normalizeH="0">
+          <a:defRPr kumimoji="0" sz="1800" b="0" i="0" u="none" strike="noStrike" cap="none" spc="0" normalizeH="0" baseline="0">
             <a:ln>
               <a:noFill/>
             </a:ln>
@@ -8269,7 +8554,7 @@
           <a:buFontTx/>
           <a:buNone/>
           <a:tabLst/>
-          <a:defRPr b="0" baseline="0" cap="none" i="0" spc="0" strike="noStrike" sz="1800" u="none" kumimoji="0" normalizeH="0">
+          <a:defRPr kumimoji="0" sz="1800" b="0" i="0" u="none" strike="noStrike" cap="none" spc="0" normalizeH="0" baseline="0">
             <a:ln>
               <a:noFill/>
             </a:ln>
@@ -8295,7 +8580,7 @@
           <a:buFontTx/>
           <a:buNone/>
           <a:tabLst/>
-          <a:defRPr b="0" baseline="0" cap="none" i="0" spc="0" strike="noStrike" sz="1800" u="none" kumimoji="0" normalizeH="0">
+          <a:defRPr kumimoji="0" sz="1800" b="0" i="0" u="none" strike="noStrike" cap="none" spc="0" normalizeH="0" baseline="0">
             <a:ln>
               <a:noFill/>
             </a:ln>
@@ -8308,9 +8593,15 @@
         </a:lvl9pPr>
       </a:lstStyle>
       <a:style>
-        <a:lnRef idx="0"/>
-        <a:fillRef idx="0"/>
-        <a:effectRef idx="0"/>
+        <a:lnRef idx="0">
+          <a:scrgbClr r="0" g="0" b="0"/>
+        </a:lnRef>
+        <a:fillRef idx="0">
+          <a:scrgbClr r="0" g="0" b="0"/>
+        </a:fillRef>
+        <a:effectRef idx="0">
+          <a:scrgbClr r="0" g="0" b="0"/>
+        </a:effectRef>
         <a:fontRef idx="none"/>
       </a:style>
     </a:lnDef>
@@ -8324,7 +8615,7 @@
         <a:effectLst/>
         <a:sp3d/>
       </a:spPr>
-      <a:bodyPr rot="0" spcFirstLastPara="1" vertOverflow="overflow" horzOverflow="overflow" vert="horz" wrap="square" lIns="45719" tIns="45719" rIns="45719" bIns="45719" numCol="1" spcCol="38100" rtlCol="0" anchor="t" upright="0">
+      <a:bodyPr rot="0" spcFirstLastPara="1" vertOverflow="overflow" horzOverflow="overflow" vert="horz" wrap="square" lIns="45719" tIns="45719" rIns="45719" bIns="45719" numCol="1" spcCol="38100" rtlCol="0" anchor="t">
         <a:spAutoFit/>
       </a:bodyPr>
       <a:lstStyle>
@@ -8343,7 +8634,7 @@
           <a:buFontTx/>
           <a:buNone/>
           <a:tabLst/>
-          <a:defRPr b="0" baseline="0" cap="none" i="0" spc="0" strike="noStrike" sz="1800" u="none" kumimoji="0" normalizeH="0">
+          <a:defRPr kumimoji="0" sz="1800" b="0" i="0" u="none" strike="noStrike" cap="none" spc="0" normalizeH="0" baseline="0">
             <a:ln>
               <a:noFill/>
             </a:ln>
@@ -8373,7 +8664,7 @@
           <a:buFontTx/>
           <a:buNone/>
           <a:tabLst/>
-          <a:defRPr b="0" baseline="0" cap="none" i="0" spc="0" strike="noStrike" sz="1800" u="none" kumimoji="0" normalizeH="0">
+          <a:defRPr kumimoji="0" sz="1800" b="0" i="0" u="none" strike="noStrike" cap="none" spc="0" normalizeH="0" baseline="0">
             <a:ln>
               <a:noFill/>
             </a:ln>
@@ -8399,7 +8690,7 @@
           <a:buFontTx/>
           <a:buNone/>
           <a:tabLst/>
-          <a:defRPr b="0" baseline="0" cap="none" i="0" spc="0" strike="noStrike" sz="1800" u="none" kumimoji="0" normalizeH="0">
+          <a:defRPr kumimoji="0" sz="1800" b="0" i="0" u="none" strike="noStrike" cap="none" spc="0" normalizeH="0" baseline="0">
             <a:ln>
               <a:noFill/>
             </a:ln>
@@ -8425,7 +8716,7 @@
           <a:buFontTx/>
           <a:buNone/>
           <a:tabLst/>
-          <a:defRPr b="0" baseline="0" cap="none" i="0" spc="0" strike="noStrike" sz="1800" u="none" kumimoji="0" normalizeH="0">
+          <a:defRPr kumimoji="0" sz="1800" b="0" i="0" u="none" strike="noStrike" cap="none" spc="0" normalizeH="0" baseline="0">
             <a:ln>
               <a:noFill/>
             </a:ln>
@@ -8451,7 +8742,7 @@
           <a:buFontTx/>
           <a:buNone/>
           <a:tabLst/>
-          <a:defRPr b="0" baseline="0" cap="none" i="0" spc="0" strike="noStrike" sz="1800" u="none" kumimoji="0" normalizeH="0">
+          <a:defRPr kumimoji="0" sz="1800" b="0" i="0" u="none" strike="noStrike" cap="none" spc="0" normalizeH="0" baseline="0">
             <a:ln>
               <a:noFill/>
             </a:ln>
@@ -8477,7 +8768,7 @@
           <a:buFontTx/>
           <a:buNone/>
           <a:tabLst/>
-          <a:defRPr b="0" baseline="0" cap="none" i="0" spc="0" strike="noStrike" sz="1800" u="none" kumimoji="0" normalizeH="0">
+          <a:defRPr kumimoji="0" sz="1800" b="0" i="0" u="none" strike="noStrike" cap="none" spc="0" normalizeH="0" baseline="0">
             <a:ln>
               <a:noFill/>
             </a:ln>
@@ -8503,7 +8794,7 @@
           <a:buFontTx/>
           <a:buNone/>
           <a:tabLst/>
-          <a:defRPr b="0" baseline="0" cap="none" i="0" spc="0" strike="noStrike" sz="1800" u="none" kumimoji="0" normalizeH="0">
+          <a:defRPr kumimoji="0" sz="1800" b="0" i="0" u="none" strike="noStrike" cap="none" spc="0" normalizeH="0" baseline="0">
             <a:ln>
               <a:noFill/>
             </a:ln>
@@ -8529,7 +8820,7 @@
           <a:buFontTx/>
           <a:buNone/>
           <a:tabLst/>
-          <a:defRPr b="0" baseline="0" cap="none" i="0" spc="0" strike="noStrike" sz="1800" u="none" kumimoji="0" normalizeH="0">
+          <a:defRPr kumimoji="0" sz="1800" b="0" i="0" u="none" strike="noStrike" cap="none" spc="0" normalizeH="0" baseline="0">
             <a:ln>
               <a:noFill/>
             </a:ln>
@@ -8555,7 +8846,7 @@
           <a:buFontTx/>
           <a:buNone/>
           <a:tabLst/>
-          <a:defRPr b="0" baseline="0" cap="none" i="0" spc="0" strike="noStrike" sz="1800" u="none" kumimoji="0" normalizeH="0">
+          <a:defRPr kumimoji="0" sz="1800" b="0" i="0" u="none" strike="noStrike" cap="none" spc="0" normalizeH="0" baseline="0">
             <a:ln>
               <a:noFill/>
             </a:ln>
@@ -8581,7 +8872,7 @@
           <a:buFontTx/>
           <a:buNone/>
           <a:tabLst/>
-          <a:defRPr b="0" baseline="0" cap="none" i="0" spc="0" strike="noStrike" sz="1800" u="none" kumimoji="0" normalizeH="0">
+          <a:defRPr kumimoji="0" sz="1800" b="0" i="0" u="none" strike="noStrike" cap="none" spc="0" normalizeH="0" baseline="0">
             <a:ln>
               <a:noFill/>
             </a:ln>
@@ -8594,18 +8885,25 @@
         </a:lvl9pPr>
       </a:lstStyle>
       <a:style>
-        <a:lnRef idx="0"/>
-        <a:fillRef idx="0"/>
-        <a:effectRef idx="0"/>
+        <a:lnRef idx="0">
+          <a:scrgbClr r="0" g="0" b="0"/>
+        </a:lnRef>
+        <a:fillRef idx="0">
+          <a:scrgbClr r="0" g="0" b="0"/>
+        </a:fillRef>
+        <a:effectRef idx="0">
+          <a:scrgbClr r="0" g="0" b="0"/>
+        </a:effectRef>
         <a:fontRef idx="none"/>
       </a:style>
     </a:txDef>
   </a:objectDefaults>
+  <a:extraClrSchemeLst/>
 </a:theme>
 </file>
 
 <file path=ppt/theme/theme2.xml><?xml version="1.0" encoding="utf-8"?>
-<a:theme xmlns:a="http://schemas.openxmlformats.org/drawingml/2006/main" xmlns:r="http://schemas.openxmlformats.org/officeDocument/2006/relationships" name="Office Theme">
+<a:theme xmlns:a="http://schemas.openxmlformats.org/drawingml/2006/main" name="Office Theme">
   <a:themeElements>
     <a:clrScheme name="Office Theme">
       <a:dk1>
@@ -8731,7 +9029,7 @@
       <a:effectStyleLst>
         <a:effectStyle>
           <a:effectLst>
-            <a:outerShdw sx="100000" sy="100000" kx="0" ky="0" algn="b" rotWithShape="0" blurRad="38100" dist="23000" dir="5400000">
+            <a:outerShdw blurRad="38100" dist="23000" dir="5400000" rotWithShape="0">
               <a:srgbClr val="000000">
                 <a:alpha val="35000"/>
               </a:srgbClr>
@@ -8740,7 +9038,7 @@
         </a:effectStyle>
         <a:effectStyle>
           <a:effectLst>
-            <a:outerShdw sx="100000" sy="100000" kx="0" ky="0" algn="b" rotWithShape="0" blurRad="38100" dist="23000" dir="5400000">
+            <a:outerShdw blurRad="38100" dist="23000" dir="5400000" rotWithShape="0">
               <a:srgbClr val="000000">
                 <a:alpha val="35000"/>
               </a:srgbClr>
@@ -8749,7 +9047,7 @@
         </a:effectStyle>
         <a:effectStyle>
           <a:effectLst>
-            <a:outerShdw sx="100000" sy="100000" kx="0" ky="0" algn="b" rotWithShape="0" blurRad="38100" dist="20000" dir="5400000">
+            <a:outerShdw blurRad="38100" dist="20000" dir="5400000" rotWithShape="0">
               <a:srgbClr val="000000">
                 <a:alpha val="38000"/>
               </a:srgbClr>
@@ -8823,7 +9121,7 @@
           <a:round/>
         </a:ln>
         <a:effectLst>
-          <a:outerShdw sx="100000" sy="100000" kx="0" ky="0" algn="b" rotWithShape="0" blurRad="38100" dist="23000" dir="5400000">
+          <a:outerShdw blurRad="38100" dist="23000" dir="5400000" rotWithShape="0">
             <a:srgbClr val="000000">
               <a:alpha val="35000"/>
             </a:srgbClr>
@@ -8831,7 +9129,7 @@
         </a:effectLst>
         <a:sp3d/>
       </a:spPr>
-      <a:bodyPr rot="0" spcFirstLastPara="1" vertOverflow="overflow" horzOverflow="overflow" vert="horz" wrap="square" lIns="45719" tIns="45719" rIns="45719" bIns="45719" numCol="1" spcCol="38100" rtlCol="0" anchor="ctr" upright="0">
+      <a:bodyPr rot="0" spcFirstLastPara="1" vertOverflow="overflow" horzOverflow="overflow" vert="horz" wrap="square" lIns="45719" tIns="45719" rIns="45719" bIns="45719" numCol="1" spcCol="38100" rtlCol="0" anchor="ctr">
         <a:spAutoFit/>
       </a:bodyPr>
       <a:lstStyle>
@@ -8850,7 +9148,7 @@
           <a:buFontTx/>
           <a:buNone/>
           <a:tabLst/>
-          <a:defRPr b="0" baseline="0" cap="none" i="0" spc="0" strike="noStrike" sz="1800" u="none" kumimoji="0" normalizeH="0">
+          <a:defRPr kumimoji="0" sz="1800" b="0" i="0" u="none" strike="noStrike" cap="none" spc="0" normalizeH="0" baseline="0">
             <a:ln>
               <a:noFill/>
             </a:ln>
@@ -8880,7 +9178,7 @@
           <a:buFontTx/>
           <a:buNone/>
           <a:tabLst/>
-          <a:defRPr b="0" baseline="0" cap="none" i="0" spc="0" strike="noStrike" sz="1800" u="none" kumimoji="0" normalizeH="0">
+          <a:defRPr kumimoji="0" sz="1800" b="0" i="0" u="none" strike="noStrike" cap="none" spc="0" normalizeH="0" baseline="0">
             <a:ln>
               <a:noFill/>
             </a:ln>
@@ -8906,7 +9204,7 @@
           <a:buFontTx/>
           <a:buNone/>
           <a:tabLst/>
-          <a:defRPr b="0" baseline="0" cap="none" i="0" spc="0" strike="noStrike" sz="1800" u="none" kumimoji="0" normalizeH="0">
+          <a:defRPr kumimoji="0" sz="1800" b="0" i="0" u="none" strike="noStrike" cap="none" spc="0" normalizeH="0" baseline="0">
             <a:ln>
               <a:noFill/>
             </a:ln>
@@ -8932,7 +9230,7 @@
           <a:buFontTx/>
           <a:buNone/>
           <a:tabLst/>
-          <a:defRPr b="0" baseline="0" cap="none" i="0" spc="0" strike="noStrike" sz="1800" u="none" kumimoji="0" normalizeH="0">
+          <a:defRPr kumimoji="0" sz="1800" b="0" i="0" u="none" strike="noStrike" cap="none" spc="0" normalizeH="0" baseline="0">
             <a:ln>
               <a:noFill/>
             </a:ln>
@@ -8958,7 +9256,7 @@
           <a:buFontTx/>
           <a:buNone/>
           <a:tabLst/>
-          <a:defRPr b="0" baseline="0" cap="none" i="0" spc="0" strike="noStrike" sz="1800" u="none" kumimoji="0" normalizeH="0">
+          <a:defRPr kumimoji="0" sz="1800" b="0" i="0" u="none" strike="noStrike" cap="none" spc="0" normalizeH="0" baseline="0">
             <a:ln>
               <a:noFill/>
             </a:ln>
@@ -8984,7 +9282,7 @@
           <a:buFontTx/>
           <a:buNone/>
           <a:tabLst/>
-          <a:defRPr b="0" baseline="0" cap="none" i="0" spc="0" strike="noStrike" sz="1800" u="none" kumimoji="0" normalizeH="0">
+          <a:defRPr kumimoji="0" sz="1800" b="0" i="0" u="none" strike="noStrike" cap="none" spc="0" normalizeH="0" baseline="0">
             <a:ln>
               <a:noFill/>
             </a:ln>
@@ -9010,7 +9308,7 @@
           <a:buFontTx/>
           <a:buNone/>
           <a:tabLst/>
-          <a:defRPr b="0" baseline="0" cap="none" i="0" spc="0" strike="noStrike" sz="1800" u="none" kumimoji="0" normalizeH="0">
+          <a:defRPr kumimoji="0" sz="1800" b="0" i="0" u="none" strike="noStrike" cap="none" spc="0" normalizeH="0" baseline="0">
             <a:ln>
               <a:noFill/>
             </a:ln>
@@ -9036,7 +9334,7 @@
           <a:buFontTx/>
           <a:buNone/>
           <a:tabLst/>
-          <a:defRPr b="0" baseline="0" cap="none" i="0" spc="0" strike="noStrike" sz="1800" u="none" kumimoji="0" normalizeH="0">
+          <a:defRPr kumimoji="0" sz="1800" b="0" i="0" u="none" strike="noStrike" cap="none" spc="0" normalizeH="0" baseline="0">
             <a:ln>
               <a:noFill/>
             </a:ln>
@@ -9062,7 +9360,7 @@
           <a:buFontTx/>
           <a:buNone/>
           <a:tabLst/>
-          <a:defRPr b="0" baseline="0" cap="none" i="0" spc="0" strike="noStrike" sz="1800" u="none" kumimoji="0" normalizeH="0">
+          <a:defRPr kumimoji="0" sz="1800" b="0" i="0" u="none" strike="noStrike" cap="none" spc="0" normalizeH="0" baseline="0">
             <a:ln>
               <a:noFill/>
             </a:ln>
@@ -9088,7 +9386,7 @@
           <a:buFontTx/>
           <a:buNone/>
           <a:tabLst/>
-          <a:defRPr b="0" baseline="0" cap="none" i="0" spc="0" strike="noStrike" sz="1800" u="none" kumimoji="0" normalizeH="0">
+          <a:defRPr kumimoji="0" sz="1800" b="0" i="0" u="none" strike="noStrike" cap="none" spc="0" normalizeH="0" baseline="0">
             <a:ln>
               <a:noFill/>
             </a:ln>
@@ -9101,9 +9399,15 @@
         </a:lvl9pPr>
       </a:lstStyle>
       <a:style>
-        <a:lnRef idx="0"/>
-        <a:fillRef idx="0"/>
-        <a:effectRef idx="0"/>
+        <a:lnRef idx="0">
+          <a:scrgbClr r="0" g="0" b="0"/>
+        </a:lnRef>
+        <a:fillRef idx="0">
+          <a:scrgbClr r="0" g="0" b="0"/>
+        </a:fillRef>
+        <a:effectRef idx="0">
+          <a:scrgbClr r="0" g="0" b="0"/>
+        </a:effectRef>
         <a:fontRef idx="none"/>
       </a:style>
     </a:spDef>
@@ -9118,7 +9422,7 @@
           <a:round/>
         </a:ln>
         <a:effectLst>
-          <a:outerShdw sx="100000" sy="100000" kx="0" ky="0" algn="b" rotWithShape="0" blurRad="38100" dist="20000" dir="5400000">
+          <a:outerShdw blurRad="38100" dist="20000" dir="5400000" rotWithShape="0">
             <a:srgbClr val="000000">
               <a:alpha val="38000"/>
             </a:srgbClr>
@@ -9126,7 +9430,7 @@
         </a:effectLst>
         <a:sp3d/>
       </a:spPr>
-      <a:bodyPr rot="0" spcFirstLastPara="1" vertOverflow="overflow" horzOverflow="overflow" vert="horz" wrap="square" lIns="91439" tIns="45719" rIns="91439" bIns="45719" numCol="1" spcCol="38100" rtlCol="0" anchor="t" upright="0">
+      <a:bodyPr rot="0" spcFirstLastPara="1" vertOverflow="overflow" horzOverflow="overflow" vert="horz" wrap="square" lIns="91439" tIns="45719" rIns="91439" bIns="45719" numCol="1" spcCol="38100" rtlCol="0" anchor="t">
         <a:noAutofit/>
       </a:bodyPr>
       <a:lstStyle>
@@ -9145,7 +9449,7 @@
           <a:buFontTx/>
           <a:buNone/>
           <a:tabLst/>
-          <a:defRPr b="0" baseline="0" cap="none" i="0" spc="0" strike="noStrike" sz="1800" u="none" kumimoji="0" normalizeH="0">
+          <a:defRPr kumimoji="0" sz="1800" b="0" i="0" u="none" strike="noStrike" cap="none" spc="0" normalizeH="0" baseline="0">
             <a:ln>
               <a:noFill/>
             </a:ln>
@@ -9171,7 +9475,7 @@
           <a:buFontTx/>
           <a:buNone/>
           <a:tabLst/>
-          <a:defRPr b="0" baseline="0" cap="none" i="0" spc="0" strike="noStrike" sz="1800" u="none" kumimoji="0" normalizeH="0">
+          <a:defRPr kumimoji="0" sz="1800" b="0" i="0" u="none" strike="noStrike" cap="none" spc="0" normalizeH="0" baseline="0">
             <a:ln>
               <a:noFill/>
             </a:ln>
@@ -9197,7 +9501,7 @@
           <a:buFontTx/>
           <a:buNone/>
           <a:tabLst/>
-          <a:defRPr b="0" baseline="0" cap="none" i="0" spc="0" strike="noStrike" sz="1800" u="none" kumimoji="0" normalizeH="0">
+          <a:defRPr kumimoji="0" sz="1800" b="0" i="0" u="none" strike="noStrike" cap="none" spc="0" normalizeH="0" baseline="0">
             <a:ln>
               <a:noFill/>
             </a:ln>
@@ -9223,7 +9527,7 @@
           <a:buFontTx/>
           <a:buNone/>
           <a:tabLst/>
-          <a:defRPr b="0" baseline="0" cap="none" i="0" spc="0" strike="noStrike" sz="1800" u="none" kumimoji="0" normalizeH="0">
+          <a:defRPr kumimoji="0" sz="1800" b="0" i="0" u="none" strike="noStrike" cap="none" spc="0" normalizeH="0" baseline="0">
             <a:ln>
               <a:noFill/>
             </a:ln>
@@ -9249,7 +9553,7 @@
           <a:buFontTx/>
           <a:buNone/>
           <a:tabLst/>
-          <a:defRPr b="0" baseline="0" cap="none" i="0" spc="0" strike="noStrike" sz="1800" u="none" kumimoji="0" normalizeH="0">
+          <a:defRPr kumimoji="0" sz="1800" b="0" i="0" u="none" strike="noStrike" cap="none" spc="0" normalizeH="0" baseline="0">
             <a:ln>
               <a:noFill/>
             </a:ln>
@@ -9275,7 +9579,7 @@
           <a:buFontTx/>
           <a:buNone/>
           <a:tabLst/>
-          <a:defRPr b="0" baseline="0" cap="none" i="0" spc="0" strike="noStrike" sz="1800" u="none" kumimoji="0" normalizeH="0">
+          <a:defRPr kumimoji="0" sz="1800" b="0" i="0" u="none" strike="noStrike" cap="none" spc="0" normalizeH="0" baseline="0">
             <a:ln>
               <a:noFill/>
             </a:ln>
@@ -9301,7 +9605,7 @@
           <a:buFontTx/>
           <a:buNone/>
           <a:tabLst/>
-          <a:defRPr b="0" baseline="0" cap="none" i="0" spc="0" strike="noStrike" sz="1800" u="none" kumimoji="0" normalizeH="0">
+          <a:defRPr kumimoji="0" sz="1800" b="0" i="0" u="none" strike="noStrike" cap="none" spc="0" normalizeH="0" baseline="0">
             <a:ln>
               <a:noFill/>
             </a:ln>
@@ -9327,7 +9631,7 @@
           <a:buFontTx/>
           <a:buNone/>
           <a:tabLst/>
-          <a:defRPr b="0" baseline="0" cap="none" i="0" spc="0" strike="noStrike" sz="1800" u="none" kumimoji="0" normalizeH="0">
+          <a:defRPr kumimoji="0" sz="1800" b="0" i="0" u="none" strike="noStrike" cap="none" spc="0" normalizeH="0" baseline="0">
             <a:ln>
               <a:noFill/>
             </a:ln>
@@ -9353,7 +9657,7 @@
           <a:buFontTx/>
           <a:buNone/>
           <a:tabLst/>
-          <a:defRPr b="0" baseline="0" cap="none" i="0" spc="0" strike="noStrike" sz="1800" u="none" kumimoji="0" normalizeH="0">
+          <a:defRPr kumimoji="0" sz="1800" b="0" i="0" u="none" strike="noStrike" cap="none" spc="0" normalizeH="0" baseline="0">
             <a:ln>
               <a:noFill/>
             </a:ln>
@@ -9379,7 +9683,7 @@
           <a:buFontTx/>
           <a:buNone/>
           <a:tabLst/>
-          <a:defRPr b="0" baseline="0" cap="none" i="0" spc="0" strike="noStrike" sz="1800" u="none" kumimoji="0" normalizeH="0">
+          <a:defRPr kumimoji="0" sz="1800" b="0" i="0" u="none" strike="noStrike" cap="none" spc="0" normalizeH="0" baseline="0">
             <a:ln>
               <a:noFill/>
             </a:ln>
@@ -9392,9 +9696,15 @@
         </a:lvl9pPr>
       </a:lstStyle>
       <a:style>
-        <a:lnRef idx="0"/>
-        <a:fillRef idx="0"/>
-        <a:effectRef idx="0"/>
+        <a:lnRef idx="0">
+          <a:scrgbClr r="0" g="0" b="0"/>
+        </a:lnRef>
+        <a:fillRef idx="0">
+          <a:scrgbClr r="0" g="0" b="0"/>
+        </a:fillRef>
+        <a:effectRef idx="0">
+          <a:scrgbClr r="0" g="0" b="0"/>
+        </a:effectRef>
         <a:fontRef idx="none"/>
       </a:style>
     </a:lnDef>
@@ -9408,7 +9718,7 @@
         <a:effectLst/>
         <a:sp3d/>
       </a:spPr>
-      <a:bodyPr rot="0" spcFirstLastPara="1" vertOverflow="overflow" horzOverflow="overflow" vert="horz" wrap="square" lIns="45719" tIns="45719" rIns="45719" bIns="45719" numCol="1" spcCol="38100" rtlCol="0" anchor="t" upright="0">
+      <a:bodyPr rot="0" spcFirstLastPara="1" vertOverflow="overflow" horzOverflow="overflow" vert="horz" wrap="square" lIns="45719" tIns="45719" rIns="45719" bIns="45719" numCol="1" spcCol="38100" rtlCol="0" anchor="t">
         <a:spAutoFit/>
       </a:bodyPr>
       <a:lstStyle>
@@ -9427,7 +9737,7 @@
           <a:buFontTx/>
           <a:buNone/>
           <a:tabLst/>
-          <a:defRPr b="0" baseline="0" cap="none" i="0" spc="0" strike="noStrike" sz="1800" u="none" kumimoji="0" normalizeH="0">
+          <a:defRPr kumimoji="0" sz="1800" b="0" i="0" u="none" strike="noStrike" cap="none" spc="0" normalizeH="0" baseline="0">
             <a:ln>
               <a:noFill/>
             </a:ln>
@@ -9457,7 +9767,7 @@
           <a:buFontTx/>
           <a:buNone/>
           <a:tabLst/>
-          <a:defRPr b="0" baseline="0" cap="none" i="0" spc="0" strike="noStrike" sz="1800" u="none" kumimoji="0" normalizeH="0">
+          <a:defRPr kumimoji="0" sz="1800" b="0" i="0" u="none" strike="noStrike" cap="none" spc="0" normalizeH="0" baseline="0">
             <a:ln>
               <a:noFill/>
             </a:ln>
@@ -9483,7 +9793,7 @@
           <a:buFontTx/>
           <a:buNone/>
           <a:tabLst/>
-          <a:defRPr b="0" baseline="0" cap="none" i="0" spc="0" strike="noStrike" sz="1800" u="none" kumimoji="0" normalizeH="0">
+          <a:defRPr kumimoji="0" sz="1800" b="0" i="0" u="none" strike="noStrike" cap="none" spc="0" normalizeH="0" baseline="0">
             <a:ln>
               <a:noFill/>
             </a:ln>
@@ -9509,7 +9819,7 @@
           <a:buFontTx/>
           <a:buNone/>
           <a:tabLst/>
-          <a:defRPr b="0" baseline="0" cap="none" i="0" spc="0" strike="noStrike" sz="1800" u="none" kumimoji="0" normalizeH="0">
+          <a:defRPr kumimoji="0" sz="1800" b="0" i="0" u="none" strike="noStrike" cap="none" spc="0" normalizeH="0" baseline="0">
             <a:ln>
               <a:noFill/>
             </a:ln>
@@ -9535,7 +9845,7 @@
           <a:buFontTx/>
           <a:buNone/>
           <a:tabLst/>
-          <a:defRPr b="0" baseline="0" cap="none" i="0" spc="0" strike="noStrike" sz="1800" u="none" kumimoji="0" normalizeH="0">
+          <a:defRPr kumimoji="0" sz="1800" b="0" i="0" u="none" strike="noStrike" cap="none" spc="0" normalizeH="0" baseline="0">
             <a:ln>
               <a:noFill/>
             </a:ln>
@@ -9561,7 +9871,7 @@
           <a:buFontTx/>
           <a:buNone/>
           <a:tabLst/>
-          <a:defRPr b="0" baseline="0" cap="none" i="0" spc="0" strike="noStrike" sz="1800" u="none" kumimoji="0" normalizeH="0">
+          <a:defRPr kumimoji="0" sz="1800" b="0" i="0" u="none" strike="noStrike" cap="none" spc="0" normalizeH="0" baseline="0">
             <a:ln>
               <a:noFill/>
             </a:ln>
@@ -9587,7 +9897,7 @@
           <a:buFontTx/>
           <a:buNone/>
           <a:tabLst/>
-          <a:defRPr b="0" baseline="0" cap="none" i="0" spc="0" strike="noStrike" sz="1800" u="none" kumimoji="0" normalizeH="0">
+          <a:defRPr kumimoji="0" sz="1800" b="0" i="0" u="none" strike="noStrike" cap="none" spc="0" normalizeH="0" baseline="0">
             <a:ln>
               <a:noFill/>
             </a:ln>
@@ -9613,7 +9923,7 @@
           <a:buFontTx/>
           <a:buNone/>
           <a:tabLst/>
-          <a:defRPr b="0" baseline="0" cap="none" i="0" spc="0" strike="noStrike" sz="1800" u="none" kumimoji="0" normalizeH="0">
+          <a:defRPr kumimoji="0" sz="1800" b="0" i="0" u="none" strike="noStrike" cap="none" spc="0" normalizeH="0" baseline="0">
             <a:ln>
               <a:noFill/>
             </a:ln>
@@ -9639,7 +9949,7 @@
           <a:buFontTx/>
           <a:buNone/>
           <a:tabLst/>
-          <a:defRPr b="0" baseline="0" cap="none" i="0" spc="0" strike="noStrike" sz="1800" u="none" kumimoji="0" normalizeH="0">
+          <a:defRPr kumimoji="0" sz="1800" b="0" i="0" u="none" strike="noStrike" cap="none" spc="0" normalizeH="0" baseline="0">
             <a:ln>
               <a:noFill/>
             </a:ln>
@@ -9665,7 +9975,7 @@
           <a:buFontTx/>
           <a:buNone/>
           <a:tabLst/>
-          <a:defRPr b="0" baseline="0" cap="none" i="0" spc="0" strike="noStrike" sz="1800" u="none" kumimoji="0" normalizeH="0">
+          <a:defRPr kumimoji="0" sz="1800" b="0" i="0" u="none" strike="noStrike" cap="none" spc="0" normalizeH="0" baseline="0">
             <a:ln>
               <a:noFill/>
             </a:ln>
@@ -9678,12 +9988,19 @@
         </a:lvl9pPr>
       </a:lstStyle>
       <a:style>
-        <a:lnRef idx="0"/>
-        <a:fillRef idx="0"/>
-        <a:effectRef idx="0"/>
+        <a:lnRef idx="0">
+          <a:scrgbClr r="0" g="0" b="0"/>
+        </a:lnRef>
+        <a:fillRef idx="0">
+          <a:scrgbClr r="0" g="0" b="0"/>
+        </a:fillRef>
+        <a:effectRef idx="0">
+          <a:scrgbClr r="0" g="0" b="0"/>
+        </a:effectRef>
         <a:fontRef idx="none"/>
       </a:style>
     </a:txDef>
   </a:objectDefaults>
+  <a:extraClrSchemeLst/>
 </a:theme>
 </file>